--- a/LRU Cache — Workshop de Algoritmos.pptx
+++ b/LRU Cache — Workshop de Algoritmos.pptx
@@ -4,6 +4,9 @@
   <p:sldMasterIdLst>
     <p:sldMasterId id="2147483648" r:id="rId1"/>
   </p:sldMasterIdLst>
+  <p:notesMasterIdLst>
+    <p:notesMasterId r:id="rId19"/>
+  </p:notesMasterIdLst>
   <p:sldIdLst>
     <p:sldId id="256" r:id="rId2"/>
     <p:sldId id="257" r:id="rId3"/>
@@ -21,22 +24,25 @@
     <p:sldId id="269" r:id="rId15"/>
     <p:sldId id="270" r:id="rId16"/>
     <p:sldId id="271" r:id="rId17"/>
+    <p:sldId id="272" r:id="rId18"/>
   </p:sldIdLst>
-  <p:notesMasterIdLst>
-    <p:notesMasterId r:id="rId18"/>
-  </p:notesMasterIdLst>
   <p:sldSz cx="12192000" cy="6858000"/>
   <p:notesSz cx="6858000" cy="12192000"/>
   <p:embeddedFontLst>
     <p:embeddedFont>
-      <p:font typeface="JetBrains Mono" panose="02000009000000000000" pitchFamily="49" charset="0"/>
-      <p:regular r:id="rId23"/>
-      <p:bold r:id="rId24"/>
+      <p:font typeface="IBM Plex Sans" panose="020B0503050203000203" pitchFamily="34" charset="0"/>
+      <p:regular r:id="rId20"/>
+      <p:bold r:id="rId21"/>
     </p:embeddedFont>
     <p:embeddedFont>
-      <p:font typeface="Space Grotesk" pitchFamily="34" charset="0"/>
-      <p:regular r:id="rId25"/>
-      <p:bold r:id="rId26"/>
+      <p:font typeface="JetBrains Mono" panose="020B0604020202020204" charset="0"/>
+      <p:regular r:id="rId22"/>
+      <p:bold r:id="rId23"/>
+    </p:embeddedFont>
+    <p:embeddedFont>
+      <p:font typeface="Space Grotesk" panose="020B0604020202020204" charset="0"/>
+      <p:regular r:id="rId24"/>
+      <p:bold r:id="rId25"/>
     </p:embeddedFont>
   </p:embeddedFontLst>
   <p:defaultTextStyle>
@@ -131,6 +137,11 @@
       </a:defRPr>
     </a:lvl9pPr>
   </p:defaultTextStyle>
+  <p:extLst>
+    <p:ext uri="{EFAFB233-063F-42B5-8137-9DF3F51BA10A}">
+      <p15:sldGuideLst xmlns:p15="http://schemas.microsoft.com/office/powerpoint/2012/main"/>
+    </p:ext>
+  </p:extLst>
 </p:presentation>
 </file>
 
@@ -156,234 +167,10 @@
           <a:chExt cx="0" cy="0"/>
         </a:xfrm>
       </p:grpSpPr>
-      <p:sp>
-        <p:nvSpPr>
-          <p:cNvPr id="2" name="Header Placeholder 1"/>
-          <p:cNvSpPr>
-            <a:spLocks noGrp="1"/>
-          </p:cNvSpPr>
-          <p:nvPr>
-            <p:ph type="hdr" sz="quarter"/>
-          </p:nvPr>
-        </p:nvSpPr>
-        <p:spPr>
-          <a:xfrm>
-            <a:off x="0" y="0"/>
-            <a:ext cx="2971800" cy="458788"/>
-          </a:xfrm>
-          <a:prstGeom prst="rect">
-            <a:avLst/>
-          </a:prstGeom>
-        </p:spPr>
-        <p:txBody>
-          <a:bodyPr vert="horz" lIns="91440" tIns="45720" rIns="91440" bIns="45720" rtlCol="0"/>
-          <a:lstStyle>
-            <a:lvl1pPr algn="l">
-              <a:defRPr sz="1200"/>
-            </a:lvl1pPr>
-          </a:lstStyle>
-          <a:p>
-            <a:endParaRPr lang="en-US"/>
-          </a:p>
-        </p:txBody>
-      </p:sp>
-      <p:sp>
-        <p:nvSpPr>
-          <p:cNvPr id="3" name="Date Placeholder 2"/>
-          <p:cNvSpPr>
-            <a:spLocks noGrp="1"/>
-          </p:cNvSpPr>
-          <p:nvPr>
-            <p:ph type="dt" idx="1"/>
-          </p:nvPr>
-        </p:nvSpPr>
-        <p:spPr>
-          <a:xfrm>
-            <a:off x="3884613" y="0"/>
-            <a:ext cx="2971800" cy="458788"/>
-          </a:xfrm>
-          <a:prstGeom prst="rect">
-            <a:avLst/>
-          </a:prstGeom>
-        </p:spPr>
-        <p:txBody>
-          <a:bodyPr vert="horz" lIns="91440" tIns="45720" rIns="91440" bIns="45720" rtlCol="0"/>
-          <a:lstStyle>
-            <a:lvl1pPr algn="r">
-              <a:defRPr sz="1200"/>
-            </a:lvl1pPr>
-          </a:lstStyle>
-          <a:p>
-            <a:fld id="{5282F153-3F37-0F45-9E97-73ACFA13230C}" type="datetimeFigureOut">
-              <a:rPr lang="en-US"/>
-              <a:t>7/23/19</a:t>
-            </a:fld>
-            <a:endParaRPr lang="en-US"/>
-          </a:p>
-        </p:txBody>
-      </p:sp>
-      <p:sp>
-        <p:nvSpPr>
-          <p:cNvPr id="4" name="Slide Image Placeholder 3"/>
-          <p:cNvSpPr>
-            <a:spLocks noGrp="1" noRot="1" noChangeAspect="1"/>
-          </p:cNvSpPr>
-          <p:nvPr>
-            <p:ph type="sldImg" idx="2"/>
-          </p:nvPr>
-        </p:nvSpPr>
-        <p:spPr>
-          <a:xfrm>
-            <a:off x="685800" y="1143000"/>
-            <a:ext cx="5486400" cy="3086100"/>
-          </a:xfrm>
-          <a:prstGeom prst="rect">
-            <a:avLst/>
-          </a:prstGeom>
-          <a:noFill/>
-          <a:ln w="12700">
-            <a:solidFill>
-              <a:prstClr val="black"/>
-            </a:solidFill>
-          </a:ln>
-        </p:spPr>
-        <p:txBody>
-          <a:bodyPr vert="horz" lIns="91440" tIns="45720" rIns="91440" bIns="45720" rtlCol="0" anchor="ctr"/>
-          <a:lstStyle/>
-          <a:p>
-            <a:endParaRPr lang="en-US"/>
-          </a:p>
-        </p:txBody>
-      </p:sp>
-      <p:sp>
-        <p:nvSpPr>
-          <p:cNvPr id="5" name="Notes Placeholder 4"/>
-          <p:cNvSpPr>
-            <a:spLocks noGrp="1"/>
-          </p:cNvSpPr>
-          <p:nvPr>
-            <p:ph type="body" sz="quarter" idx="3"/>
-          </p:nvPr>
-        </p:nvSpPr>
-        <p:spPr>
-          <a:xfrm>
-            <a:off x="685800" y="4400550"/>
-            <a:ext cx="5486400" cy="3600450"/>
-          </a:xfrm>
-          <a:prstGeom prst="rect">
-            <a:avLst/>
-          </a:prstGeom>
-        </p:spPr>
-        <p:txBody>
-          <a:bodyPr vert="horz" lIns="91440" tIns="45720" rIns="91440" bIns="45720" rtlCol="0"/>
-          <a:lstStyle/>
-          <a:p>
-            <a:pPr lvl="0"/>
-            <a:r>
-              <a:rPr lang="en-US"/>
-              <a:t>Click to edit Master text styles</a:t>
-            </a:r>
-          </a:p>
-          <a:p>
-            <a:pPr lvl="1"/>
-            <a:r>
-              <a:rPr lang="en-US"/>
-              <a:t>Second level</a:t>
-            </a:r>
-          </a:p>
-          <a:p>
-            <a:pPr lvl="2"/>
-            <a:r>
-              <a:rPr lang="en-US"/>
-              <a:t>Third level</a:t>
-            </a:r>
-          </a:p>
-          <a:p>
-            <a:pPr lvl="3"/>
-            <a:r>
-              <a:rPr lang="en-US"/>
-              <a:t>Fourth level</a:t>
-            </a:r>
-          </a:p>
-          <a:p>
-            <a:pPr lvl="4"/>
-            <a:r>
-              <a:rPr lang="en-US"/>
-              <a:t>Fifth level</a:t>
-            </a:r>
-          </a:p>
-        </p:txBody>
-      </p:sp>
-      <p:sp>
-        <p:nvSpPr>
-          <p:cNvPr id="6" name="Footer Placeholder 5"/>
-          <p:cNvSpPr>
-            <a:spLocks noGrp="1"/>
-          </p:cNvSpPr>
-          <p:nvPr>
-            <p:ph type="ftr" sz="quarter" idx="4"/>
-          </p:nvPr>
-        </p:nvSpPr>
-        <p:spPr>
-          <a:xfrm>
-            <a:off x="0" y="8685213"/>
-            <a:ext cx="2971800" cy="458787"/>
-          </a:xfrm>
-          <a:prstGeom prst="rect">
-            <a:avLst/>
-          </a:prstGeom>
-        </p:spPr>
-        <p:txBody>
-          <a:bodyPr vert="horz" lIns="91440" tIns="45720" rIns="91440" bIns="45720" rtlCol="0" anchor="b"/>
-          <a:lstStyle>
-            <a:lvl1pPr algn="l">
-              <a:defRPr sz="1200"/>
-            </a:lvl1pPr>
-          </a:lstStyle>
-          <a:p>
-            <a:endParaRPr lang="en-US"/>
-          </a:p>
-        </p:txBody>
-      </p:sp>
-      <p:sp>
-        <p:nvSpPr>
-          <p:cNvPr id="7" name="Slide Number Placeholder 6"/>
-          <p:cNvSpPr>
-            <a:spLocks noGrp="1"/>
-          </p:cNvSpPr>
-          <p:nvPr>
-            <p:ph type="sldNum" sz="quarter" idx="5"/>
-          </p:nvPr>
-        </p:nvSpPr>
-        <p:spPr>
-          <a:xfrm>
-            <a:off x="3884613" y="8685213"/>
-            <a:ext cx="2971800" cy="458787"/>
-          </a:xfrm>
-          <a:prstGeom prst="rect">
-            <a:avLst/>
-          </a:prstGeom>
-        </p:spPr>
-        <p:txBody>
-          <a:bodyPr vert="horz" lIns="91440" tIns="45720" rIns="91440" bIns="45720" rtlCol="0" anchor="b"/>
-          <a:lstStyle>
-            <a:lvl1pPr algn="r">
-              <a:defRPr sz="1200"/>
-            </a:lvl1pPr>
-          </a:lstStyle>
-          <a:p>
-            <a:fld id="{CE5E9CC1-C706-0F49-92D6-E571CC5EEA8F}" type="slidenum">
-              <a:rPr lang="en-US"/>
-              <a:t>‹#›</a:t>
-            </a:fld>
-            <a:endParaRPr lang="en-US"/>
-          </a:p>
-        </p:txBody>
-      </p:sp>
     </p:spTree>
     <p:extLst>
       <p:ext uri="{BB962C8B-B14F-4D97-AF65-F5344CB8AC3E}">
-        <p14:creationId xmlns:p14="http://schemas.microsoft.com/office/powerpoint/2010/main" val="1024086991"/>
+        <p14:creationId xmlns:p14="http://schemas.microsoft.com/office/powerpoint/2010/main" val="4244128120"/>
       </p:ext>
     </p:extLst>
   </p:cSld>
@@ -531,7 +318,6 @@
               <a:rPr lang="en-US" dirty="0"/>
               <a:t>Abertura. Este é o bloco de fechamento do workshop: o único problema que combina duas estruturas ao mesmo tempo. A faixa de quadradinhos já antecipa a ideia: o mais recente à esquerda, o mais antigo à direita, quase saindo.</a:t>
             </a:r>
-            <a:endParaRPr lang="en-US" dirty="0"/>
           </a:p>
         </p:txBody>
       </p:sp>
@@ -619,7 +405,6 @@
               <a:rPr lang="en-US" dirty="0"/>
               <a:t>Insight central: nenhuma das duas sozinha resolve. O hashmap aponta direto para o nó da lista; a lista mantém a ordem de uso. HEAD e TAIL são nós sentinela: evitam casos especiais de lista vazia. Usou um item: tira o nó de onde está e coloca logo depois do HEAD. Estourou: remove o nó antes do TAIL.</a:t>
             </a:r>
-            <a:endParaRPr lang="en-US" dirty="0"/>
           </a:p>
         </p:txBody>
       </p:sp>
@@ -707,7 +492,6 @@
               <a:rPr lang="en-US" dirty="0"/>
               <a:t>Antes de começar, avise: cirurgia de ponteiro com calma vence pressa. Dê dicas em forma de pergunta, sem entregar a técnica: “qual estrutura acha uma chave em O(1)?”, “e qual move um item para a frente em O(1)?”. Quem terminar cedo: tente com collections.OrderedDict e compare.</a:t>
             </a:r>
-            <a:endParaRPr lang="en-US" dirty="0"/>
           </a:p>
         </p:txBody>
       </p:sp>
@@ -795,7 +579,6 @@
               <a:rPr lang="en-US" dirty="0"/>
               <a:t>Percorra a tabela com a turma antes do código. Destaque a linha do get(1): como 1 foi lido, ele sobe e quem sai no put(3) é o 2. Quem esqueceu de atualizar a ordem no get vai remover o 1 aqui e errar todo o resto.</a:t>
             </a:r>
-            <a:endParaRPr lang="en-US" dirty="0"/>
           </a:p>
         </p:txBody>
       </p:sp>
@@ -883,7 +666,6 @@
               <a:rPr lang="en-US" dirty="0"/>
               <a:t>Desenhe a lista passo a passo enquanto lê o código. Sentinelas HEAD e TAIL eliminam os ifs de lista vazia. _remove mexe nos dois vizinhos; _add_front mexe em quatro ponteiros — é aqui que aparecem os erros silenciosos. No put, o nó despejado precisa guardar a própria chave para ser apagado do map: por isso Node tem key, não só val.</a:t>
             </a:r>
-            <a:endParaRPr lang="en-US" dirty="0"/>
           </a:p>
         </p:txBody>
       </p:sp>
@@ -971,7 +753,6 @@
               <a:rPr lang="en-US" dirty="0"/>
               <a:t>Feche a correção com os números: O(1) por operação, O(capacidade) de espaço. As três armadilhas vêm do guia. Mencione o OrderedDict como versão do dia a dia, mas reforce que o entrevistador quer ver a composição das duas estruturas.</a:t>
             </a:r>
-            <a:endParaRPr lang="en-US" dirty="0"/>
           </a:p>
         </p:txBody>
       </p:sp>
@@ -1059,7 +840,6 @@
               <a:rPr lang="en-US" dirty="0"/>
               <a:t>Ponte para a prática: ninguém reimplementa a lista duplamente encadeada no trabalho — mas entender o mecanismo ajuda a escolher e configurar. Três níveis: dentro de uma função (@lru_cache, já vem no Python), dentro da aplicação (cachetools; TTLCache expira por tempo) e entre servidores (Redis, com maxmemory e maxmemory-policy allkeys-lru, no padrão cache-aside: tenta o cache, se não achar vai ao banco e grava no cache). Cuidados: dados que mudam muito ficam desatualizados no cache — defina expiração ou invalide ao escrever. Mostre buscar_cliente.cache_info() para ver hits e misses ao vivo.</a:t>
             </a:r>
-            <a:endParaRPr lang="en-US" dirty="0"/>
           </a:p>
         </p:txBody>
       </p:sp>
@@ -1147,7 +927,6 @@
               <a:rPr lang="en-US" dirty="0"/>
               <a:t>Mensagem final do guia. LRU é um design de sistema em miniatura: não é aplicar um algoritmo pronto, é decidir como compor estruturas sob uma restrição real (O(1)). Abra para perguntas.</a:t>
             </a:r>
-            <a:endParaRPr lang="en-US" dirty="0"/>
           </a:p>
         </p:txBody>
       </p:sp>
@@ -1178,6 +957,117 @@
     <p:extLst>
       <p:ext uri="{BB962C8B-B14F-4D97-AF65-F5344CB8AC3E}">
         <p14:creationId xmlns:p14="http://schemas.microsoft.com/office/powerpoint/2010/main" val="1024086991"/>
+      </p:ext>
+    </p:extLst>
+  </p:cSld>
+  <p:clrMapOvr>
+    <a:masterClrMapping/>
+  </p:clrMapOvr>
+</p:notes>
+</file>
+
+<file path=ppt/notesSlides/notesSlide17.xml><?xml version="1.0" encoding="utf-8"?>
+<p:notes xmlns:a="http://schemas.openxmlformats.org/drawingml/2006/main" xmlns:r="http://schemas.openxmlformats.org/officeDocument/2006/relationships" xmlns:p="http://schemas.openxmlformats.org/presentationml/2006/main">
+  <p:cSld>
+    <p:spTree>
+      <p:nvGrpSpPr>
+        <p:cNvPr id="1" name="">
+          <a:extLst>
+            <a:ext uri="{FF2B5EF4-FFF2-40B4-BE49-F238E27FC236}">
+              <a16:creationId xmlns:a16="http://schemas.microsoft.com/office/drawing/2014/main" id="{906E9F8D-E6AB-FFE8-F2A1-3E9B0FDC3F79}"/>
+            </a:ext>
+          </a:extLst>
+        </p:cNvPr>
+        <p:cNvGrpSpPr/>
+        <p:nvPr/>
+      </p:nvGrpSpPr>
+      <p:grpSpPr>
+        <a:xfrm>
+          <a:off x="0" y="0"/>
+          <a:ext cx="0" cy="0"/>
+          <a:chOff x="0" y="0"/>
+          <a:chExt cx="0" cy="0"/>
+        </a:xfrm>
+      </p:grpSpPr>
+      <p:sp>
+        <p:nvSpPr>
+          <p:cNvPr id="2" name="Slide Image Placeholder 1">
+            <a:extLst>
+              <a:ext uri="{FF2B5EF4-FFF2-40B4-BE49-F238E27FC236}">
+                <a16:creationId xmlns:a16="http://schemas.microsoft.com/office/drawing/2014/main" id="{EDB13236-5AF9-E3D5-1A81-FFE5FC62A571}"/>
+              </a:ext>
+            </a:extLst>
+          </p:cNvPr>
+          <p:cNvSpPr>
+            <a:spLocks noGrp="1" noRot="1" noChangeAspect="1"/>
+          </p:cNvSpPr>
+          <p:nvPr>
+            <p:ph type="sldImg"/>
+          </p:nvPr>
+        </p:nvSpPr>
+        <p:spPr/>
+      </p:sp>
+      <p:sp>
+        <p:nvSpPr>
+          <p:cNvPr id="3" name="Notes Placeholder 2">
+            <a:extLst>
+              <a:ext uri="{FF2B5EF4-FFF2-40B4-BE49-F238E27FC236}">
+                <a16:creationId xmlns:a16="http://schemas.microsoft.com/office/drawing/2014/main" id="{ACC274A0-1F42-0A97-2173-667F352A4AF3}"/>
+              </a:ext>
+            </a:extLst>
+          </p:cNvPr>
+          <p:cNvSpPr>
+            <a:spLocks noGrp="1"/>
+          </p:cNvSpPr>
+          <p:nvPr>
+            <p:ph type="body" idx="1"/>
+          </p:nvPr>
+        </p:nvSpPr>
+        <p:spPr/>
+        <p:txBody>
+          <a:bodyPr/>
+          <a:lstStyle/>
+          <a:p>
+            <a:r>
+              <a:rPr lang="en-US" dirty="0"/>
+              <a:t>Feche a correção com os números: O(1) por operação, O(capacidade) de espaço. As três armadilhas vêm do guia. Mencione o OrderedDict como versão do dia a dia, mas reforce que o entrevistador quer ver a composição das duas estruturas.</a:t>
+            </a:r>
+          </a:p>
+        </p:txBody>
+      </p:sp>
+      <p:sp>
+        <p:nvSpPr>
+          <p:cNvPr id="4" name="Slide Number Placeholder 3">
+            <a:extLst>
+              <a:ext uri="{FF2B5EF4-FFF2-40B4-BE49-F238E27FC236}">
+                <a16:creationId xmlns:a16="http://schemas.microsoft.com/office/drawing/2014/main" id="{A91B44F1-C625-A9B9-9D0C-19AB2A97B461}"/>
+              </a:ext>
+            </a:extLst>
+          </p:cNvPr>
+          <p:cNvSpPr>
+            <a:spLocks noGrp="1"/>
+          </p:cNvSpPr>
+          <p:nvPr>
+            <p:ph type="sldNum" sz="quarter" idx="10"/>
+          </p:nvPr>
+        </p:nvSpPr>
+        <p:spPr/>
+        <p:txBody>
+          <a:bodyPr/>
+          <a:lstStyle/>
+          <a:p>
+            <a:fld id="{F7021451-1387-4CA6-816F-3879F97B5CBC}" type="slidenum">
+              <a:rPr lang="en-US"/>
+              <a:t>17</a:t>
+            </a:fld>
+            <a:endParaRPr lang="en-US"/>
+          </a:p>
+        </p:txBody>
+      </p:sp>
+    </p:spTree>
+    <p:extLst>
+      <p:ext uri="{BB962C8B-B14F-4D97-AF65-F5344CB8AC3E}">
+        <p14:creationId xmlns:p14="http://schemas.microsoft.com/office/powerpoint/2010/main" val="3847361306"/>
       </p:ext>
     </p:extLst>
   </p:cSld>
@@ -1235,7 +1125,6 @@
               <a:rPr lang="en-US" dirty="0"/>
               <a:t>Apresentação rápida, 1 minuto. Comecei como Jovem Aprendiz em 2017 e passei por Marketing, REC, Financeiro, Logística e Compras até chegar ao Hub Performance SP. Gancho para o tema: trabalhar com dados o dia todo significa lidar com cache o dia todo — dashboards, queries e APIs vivem disso.</a:t>
             </a:r>
-            <a:endParaRPr lang="en-US" dirty="0"/>
           </a:p>
         </p:txBody>
       </p:sp>
@@ -1323,7 +1212,6 @@
               <a:rPr lang="en-US" dirty="0"/>
               <a:t>Analogia da mesa: o cache é rápido e pequeno; a fonte original é grande e lenta. Todo cache tem capacidade fixa, então a pergunta inevitável é: quando enche, quem eu tiro da mesa? Essa decisão é a política de despejo.</a:t>
             </a:r>
-            <a:endParaRPr lang="en-US" dirty="0"/>
           </a:p>
         </p:txBody>
       </p:sp>
@@ -1411,7 +1299,6 @@
               <a:rPr lang="en-US" dirty="0"/>
               <a:t>Belády (IBM, 1966) descreveu a política ótima: tirar quem será usado mais tarde no futuro. Impossível na prática. Por isso sistemas reais usam aproximações. A aposta do LRU: o passado recente prevê o futuro próximo — se você usou agora, provavelmente vai usar de novo logo.</a:t>
             </a:r>
-            <a:endParaRPr lang="en-US" dirty="0"/>
           </a:p>
         </p:txBody>
       </p:sp>
@@ -1499,7 +1386,6 @@
               <a:rPr lang="en-US" dirty="0"/>
               <a:t>Faça a sequência devagar. O ponto-chave está no get A: ler também conta como uso, então A volta para a frente. Por isso, quando D chega, quem sai é B, não A. Esse detalhe é a armadilha número um do exercício.</a:t>
             </a:r>
-            <a:endParaRPr lang="en-US" dirty="0"/>
           </a:p>
         </p:txBody>
       </p:sp>
@@ -1587,7 +1473,6 @@
               <a:rPr lang="en-US" dirty="0"/>
               <a:t>LRU ou variações dele estão em praticamente toda a pilha: Redis com allkeys-lru, page cache e buffer cache do Linux, buffer pool de InnoDB e PostgreSQL, e de forma aproximada no cache de CPU, porque LRU exato em hardware custa caro demais. Pergunte à turma quem já configurou um maxmemory-policy no Redis.</a:t>
             </a:r>
-            <a:endParaRPr lang="en-US" dirty="0"/>
           </a:p>
         </p:txBody>
       </p:sp>
@@ -1675,7 +1560,6 @@
               <a:rPr lang="en-US" dirty="0"/>
               <a:t>Traga para perto da turma. O exemplo mais visual é a lista de arquivos recentes do Office ou do celular: é literalmente um LRU de capacidade fixa. Pergunte: o que acontece com a lista quando você abre um arquivo que já estava nela? Ele sobe pro topo — é o get.</a:t>
             </a:r>
-            <a:endParaRPr lang="en-US" dirty="0"/>
           </a:p>
         </p:txBody>
       </p:sp>
@@ -1763,7 +1647,6 @@
               <a:rPr lang="en-US" dirty="0"/>
               <a:t>Slide de ponte para a prática, sem amarrar a uma linguagem. Cache vale onde a mesma leitura cara se repete: consultas ao banco, chamadas a APIs (especialmente pagas ou com rate limit), cálculos pesados e conteúdo que muda pouco. As três perguntas guiam qualquer decisão: se a leitura não se repete, cache não ajuda; o limite é a capacidade — e é aí que entra o LRU, decidindo quem sai quando enche; e dado velho é o maior risco de cache, então defina expiração ou invalide quando o dado mudar. Quase toda linguagem e framework já tem um cache LRU pronto — o importante é saber quando usar e como configurar.</a:t>
             </a:r>
-            <a:endParaRPr lang="en-US" dirty="0"/>
           </a:p>
         </p:txBody>
       </p:sp>
@@ -1851,7 +1734,6 @@
               <a:rPr lang="en-US" dirty="0"/>
               <a:t>Big-O não mede segundos, mede crescimento. Use a analogia da estante: ir direto à posição (O(1)), procurar livro por livro (O(n)), comparar cada livro com todos os outros (O(n²)). Gancho para o próximo slide: o exercício exige get e put em O(1), e nenhuma estrutura sozinha entrega isso — o hashmap busca em O(1) mas não guarda ordem; a lista guarda ordem mas busca em O(n).</a:t>
             </a:r>
-            <a:endParaRPr lang="en-US" dirty="0"/>
           </a:p>
         </p:txBody>
       </p:sp>
@@ -1929,6 +1811,7 @@
         <a:solidFill>
           <a:srgbClr val="12161F"/>
         </a:solidFill>
+        <a:effectLst/>
       </p:bgPr>
     </p:bg>
     <p:spTree>
@@ -1948,7 +1831,9 @@
       <p:sp>
         <p:nvSpPr>
           <p:cNvPr id="2" name="Title Placeholder 1"/>
-          <p:cNvSpPr/>
+          <p:cNvSpPr>
+            <a:spLocks noGrp="1"/>
+          </p:cNvSpPr>
           <p:nvPr>
             <p:ph type="title"/>
           </p:nvPr>
@@ -1967,7 +1852,7 @@
         <p:txBody>
           <a:bodyPr wrap="square" lIns="0" tIns="0" rIns="0" bIns="0" rtlCol="0" anchor="t"/>
           <a:lstStyle>
-            <a:lvl1pPr algn="l" indent="0" marL="0">
+            <a:lvl1pPr marL="0" indent="0" algn="l">
               <a:lnSpc>
                 <a:spcPct val="115000"/>
               </a:lnSpc>
@@ -1983,7 +1868,7 @@
             </a:lvl1pPr>
           </a:lstStyle>
           <a:p>
-            <a:pPr algn="l" indent="0" marL="0">
+            <a:pPr marL="0" indent="0" algn="l">
               <a:lnSpc>
                 <a:spcPct val="115000"/>
               </a:lnSpc>
@@ -1996,9 +1881,11 @@
       <p:sp>
         <p:nvSpPr>
           <p:cNvPr id="3" name="Text Placeholder 2"/>
-          <p:cNvSpPr/>
+          <p:cNvSpPr>
+            <a:spLocks noGrp="1"/>
+          </p:cNvSpPr>
           <p:nvPr>
-            <p:ph idx="101" type="body"/>
+            <p:ph type="body" idx="101"/>
           </p:nvPr>
         </p:nvSpPr>
         <p:spPr>
@@ -2015,7 +1902,7 @@
         <p:txBody>
           <a:bodyPr wrap="square" lIns="0" tIns="0" rIns="0" bIns="0" rtlCol="0" anchor="t"/>
           <a:lstStyle>
-            <a:lvl1pPr algn="l" indent="0" marL="0">
+            <a:lvl1pPr marL="0" indent="0" algn="l">
               <a:lnSpc>
                 <a:spcPct val="140000"/>
               </a:lnSpc>
@@ -2031,7 +1918,7 @@
             </a:lvl1pPr>
           </a:lstStyle>
           <a:p>
-            <a:pPr algn="l" indent="0" marL="0">
+            <a:pPr marL="0" indent="0" algn="l">
               <a:lnSpc>
                 <a:spcPct val="140000"/>
               </a:lnSpc>
@@ -2057,6 +1944,7 @@
         <a:solidFill>
           <a:srgbClr val="12161F"/>
         </a:solidFill>
+        <a:effectLst/>
       </p:bgPr>
     </p:bg>
     <p:spTree>
@@ -2076,7 +1964,9 @@
       <p:sp>
         <p:nvSpPr>
           <p:cNvPr id="2" name="Title Placeholder 1"/>
-          <p:cNvSpPr/>
+          <p:cNvSpPr>
+            <a:spLocks noGrp="1"/>
+          </p:cNvSpPr>
           <p:nvPr>
             <p:ph type="title"/>
           </p:nvPr>
@@ -2095,7 +1985,7 @@
         <p:txBody>
           <a:bodyPr wrap="square" lIns="0" tIns="0" rIns="0" bIns="0" rtlCol="0" anchor="t"/>
           <a:lstStyle>
-            <a:lvl1pPr algn="l" indent="0" marL="0">
+            <a:lvl1pPr marL="0" indent="0" algn="l">
               <a:lnSpc>
                 <a:spcPct val="115000"/>
               </a:lnSpc>
@@ -2111,7 +2001,7 @@
             </a:lvl1pPr>
           </a:lstStyle>
           <a:p>
-            <a:pPr algn="l" indent="0" marL="0">
+            <a:pPr marL="0" indent="0" algn="l">
               <a:lnSpc>
                 <a:spcPct val="115000"/>
               </a:lnSpc>
@@ -2124,9 +2014,11 @@
       <p:sp>
         <p:nvSpPr>
           <p:cNvPr id="3" name="Text Placeholder 2"/>
-          <p:cNvSpPr/>
+          <p:cNvSpPr>
+            <a:spLocks noGrp="1"/>
+          </p:cNvSpPr>
           <p:nvPr>
-            <p:ph idx="101" type="body"/>
+            <p:ph type="body" idx="101"/>
           </p:nvPr>
         </p:nvSpPr>
         <p:spPr>
@@ -2143,7 +2035,7 @@
         <p:txBody>
           <a:bodyPr wrap="square" lIns="0" tIns="0" rIns="0" bIns="0" rtlCol="0" anchor="t"/>
           <a:lstStyle>
-            <a:lvl1pPr algn="l" indent="0" marL="0">
+            <a:lvl1pPr marL="0" indent="0" algn="l">
               <a:lnSpc>
                 <a:spcPct val="140000"/>
               </a:lnSpc>
@@ -2159,7 +2051,7 @@
             </a:lvl1pPr>
           </a:lstStyle>
           <a:p>
-            <a:pPr algn="l" indent="0" marL="0">
+            <a:pPr marL="0" indent="0" algn="l">
               <a:lnSpc>
                 <a:spcPct val="140000"/>
               </a:lnSpc>
@@ -2438,6 +2330,7 @@
         <a:solidFill>
           <a:srgbClr val="12161F"/>
         </a:solidFill>
+        <a:effectLst/>
       </p:bgPr>
     </p:bg>
     <p:spTree>
@@ -2477,14 +2370,14 @@
           </a:bodyPr>
           <a:lstStyle/>
           <a:p>
-            <a:pPr algn="l" indent="0" marL="0">
+            <a:pPr marL="0" indent="0" algn="l">
               <a:lnSpc>
                 <a:spcPts val="1960"/>
               </a:lnSpc>
               <a:buNone/>
             </a:pPr>
             <a:r>
-              <a:rPr lang="en-US" sz="1400" spc="200" kern="0" dirty="0">
+              <a:rPr lang="en-US" sz="1400" kern="0" spc="200" dirty="0">
                 <a:solidFill>
                   <a:srgbClr val="F2A541"/>
                 </a:solidFill>
@@ -2501,7 +2394,9 @@
       <p:sp>
         <p:nvSpPr>
           <p:cNvPr id="3" name="Text 1"/>
-          <p:cNvSpPr/>
+          <p:cNvSpPr>
+            <a:spLocks noGrp="1"/>
+          </p:cNvSpPr>
           <p:nvPr>
             <p:ph type="title"/>
           </p:nvPr>
@@ -2519,18 +2414,18 @@
         </p:spPr>
         <p:txBody>
           <a:bodyPr wrap="square" lIns="0" tIns="0" rIns="0" bIns="0" rtlCol="0" anchor="t">
-            <a:normAutofit/>
+            <a:normAutofit fontScale="90000"/>
           </a:bodyPr>
           <a:lstStyle/>
           <a:p>
-            <a:pPr algn="l" indent="0" marL="0">
+            <a:pPr marL="0" indent="0" algn="l">
               <a:lnSpc>
                 <a:spcPts val="10000"/>
               </a:lnSpc>
               <a:buNone/>
             </a:pPr>
             <a:r>
-              <a:rPr lang="en-US" sz="10000" b="1" i="0" spc="-200" kern="0" dirty="0">
+              <a:rPr lang="en-US" sz="10000" b="1" i="0" kern="0" spc="-200" dirty="0">
                 <a:solidFill>
                   <a:srgbClr val="F4F1EA"/>
                 </a:solidFill>
@@ -2567,7 +2462,7 @@
           </a:bodyPr>
           <a:lstStyle/>
           <a:p>
-            <a:pPr algn="l" indent="0" marL="0">
+            <a:pPr marL="0" indent="0" algn="l">
               <a:lnSpc>
                 <a:spcPts val="2860"/>
               </a:lnSpc>
@@ -2609,6 +2504,13 @@
           </a:solidFill>
           <a:ln/>
         </p:spPr>
+        <p:txBody>
+          <a:bodyPr/>
+          <a:lstStyle/>
+          <a:p>
+            <a:endParaRPr lang="pt-BR"/>
+          </a:p>
+        </p:txBody>
       </p:sp>
       <p:sp>
         <p:nvSpPr>
@@ -2631,6 +2533,13 @@
           </a:solidFill>
           <a:ln/>
         </p:spPr>
+        <p:txBody>
+          <a:bodyPr/>
+          <a:lstStyle/>
+          <a:p>
+            <a:endParaRPr lang="pt-BR"/>
+          </a:p>
+        </p:txBody>
       </p:sp>
       <p:sp>
         <p:nvSpPr>
@@ -2653,6 +2562,13 @@
           </a:solidFill>
           <a:ln/>
         </p:spPr>
+        <p:txBody>
+          <a:bodyPr/>
+          <a:lstStyle/>
+          <a:p>
+            <a:endParaRPr lang="pt-BR"/>
+          </a:p>
+        </p:txBody>
       </p:sp>
       <p:sp>
         <p:nvSpPr>
@@ -2675,6 +2591,13 @@
           </a:solidFill>
           <a:ln/>
         </p:spPr>
+        <p:txBody>
+          <a:bodyPr/>
+          <a:lstStyle/>
+          <a:p>
+            <a:endParaRPr lang="pt-BR"/>
+          </a:p>
+        </p:txBody>
       </p:sp>
       <p:sp>
         <p:nvSpPr>
@@ -2699,6 +2622,13 @@
           </a:solidFill>
           <a:ln/>
         </p:spPr>
+        <p:txBody>
+          <a:bodyPr/>
+          <a:lstStyle/>
+          <a:p>
+            <a:endParaRPr lang="pt-BR"/>
+          </a:p>
+        </p:txBody>
       </p:sp>
       <p:sp>
         <p:nvSpPr>
@@ -2723,7 +2653,7 @@
           </a:bodyPr>
           <a:lstStyle/>
           <a:p>
-            <a:pPr algn="l" indent="0" marL="0">
+            <a:pPr marL="0" indent="0" algn="l">
               <a:lnSpc>
                 <a:spcPts val="1680"/>
               </a:lnSpc>
@@ -2767,7 +2697,7 @@
           </a:bodyPr>
           <a:lstStyle/>
           <a:p>
-            <a:pPr algn="l" indent="0" marL="0">
+            <a:pPr marL="0" indent="0" algn="l">
               <a:lnSpc>
                 <a:spcPts val="1680"/>
               </a:lnSpc>
@@ -2804,6 +2734,7 @@
         <a:solidFill>
           <a:srgbClr val="12161F"/>
         </a:solidFill>
+        <a:effectLst/>
       </p:bgPr>
     </p:bg>
     <p:spTree>
@@ -2843,14 +2774,14 @@
           </a:bodyPr>
           <a:lstStyle/>
           <a:p>
-            <a:pPr algn="l" indent="0" marL="0">
+            <a:pPr marL="0" indent="0" algn="l">
               <a:lnSpc>
                 <a:spcPts val="1820"/>
               </a:lnSpc>
               <a:buNone/>
             </a:pPr>
             <a:r>
-              <a:rPr lang="en-US" sz="1300" spc="150" kern="0" dirty="0">
+              <a:rPr lang="en-US" sz="1300" kern="0" spc="150" dirty="0">
                 <a:solidFill>
                   <a:srgbClr val="F2A541"/>
                 </a:solidFill>
@@ -2867,7 +2798,9 @@
       <p:sp>
         <p:nvSpPr>
           <p:cNvPr id="3" name="Text 1"/>
-          <p:cNvSpPr/>
+          <p:cNvSpPr>
+            <a:spLocks noGrp="1"/>
+          </p:cNvSpPr>
           <p:nvPr>
             <p:ph type="title"/>
           </p:nvPr>
@@ -2889,7 +2822,7 @@
           </a:bodyPr>
           <a:lstStyle/>
           <a:p>
-            <a:pPr algn="l" indent="0" marL="0">
+            <a:pPr marL="0" indent="0" algn="l">
               <a:lnSpc>
                 <a:spcPts val="3960"/>
               </a:lnSpc>
@@ -2931,6 +2864,13 @@
           </a:solidFill>
           <a:ln/>
         </p:spPr>
+        <p:txBody>
+          <a:bodyPr/>
+          <a:lstStyle/>
+          <a:p>
+            <a:endParaRPr lang="pt-BR"/>
+          </a:p>
+        </p:txBody>
       </p:sp>
       <p:sp>
         <p:nvSpPr>
@@ -2955,7 +2895,7 @@
           </a:bodyPr>
           <a:lstStyle/>
           <a:p>
-            <a:pPr algn="l" indent="0" marL="0">
+            <a:pPr marL="0" indent="0" algn="l">
               <a:lnSpc>
                 <a:spcPts val="2160"/>
               </a:lnSpc>
@@ -2999,7 +2939,7 @@
           </a:bodyPr>
           <a:lstStyle/>
           <a:p>
-            <a:pPr algn="l" indent="0" marL="0">
+            <a:pPr marL="0" indent="0" algn="l">
               <a:lnSpc>
                 <a:spcPts val="1960"/>
               </a:lnSpc>
@@ -3041,6 +2981,13 @@
           </a:solidFill>
           <a:ln/>
         </p:spPr>
+        <p:txBody>
+          <a:bodyPr/>
+          <a:lstStyle/>
+          <a:p>
+            <a:endParaRPr lang="pt-BR"/>
+          </a:p>
+        </p:txBody>
       </p:sp>
       <p:sp>
         <p:nvSpPr>
@@ -3065,7 +3012,7 @@
           </a:bodyPr>
           <a:lstStyle/>
           <a:p>
-            <a:pPr algn="l" indent="0" marL="0">
+            <a:pPr marL="0" indent="0" algn="l">
               <a:lnSpc>
                 <a:spcPts val="2160"/>
               </a:lnSpc>
@@ -3109,7 +3056,7 @@
           </a:bodyPr>
           <a:lstStyle/>
           <a:p>
-            <a:pPr algn="l" indent="0" marL="0">
+            <a:pPr marL="0" indent="0" algn="l">
               <a:lnSpc>
                 <a:spcPts val="1960"/>
               </a:lnSpc>
@@ -3160,7 +3107,7 @@
           </a:bodyPr>
           <a:lstStyle/>
           <a:p>
-            <a:pPr algn="ctr" indent="0" marL="0">
+            <a:pPr marL="0" indent="0" algn="ctr">
               <a:lnSpc>
                 <a:spcPts val="1960"/>
               </a:lnSpc>
@@ -3204,7 +3151,7 @@
           </a:bodyPr>
           <a:lstStyle/>
           <a:p>
-            <a:pPr algn="l" indent="0" marL="0">
+            <a:pPr marL="0" indent="0" algn="l">
               <a:lnSpc>
                 <a:spcPts val="2240"/>
               </a:lnSpc>
@@ -3252,7 +3199,7 @@
           </a:bodyPr>
           <a:lstStyle/>
           <a:p>
-            <a:pPr algn="ctr" indent="0" marL="0">
+            <a:pPr marL="0" indent="0" algn="ctr">
               <a:lnSpc>
                 <a:spcPts val="2240"/>
               </a:lnSpc>
@@ -3296,7 +3243,7 @@
           </a:bodyPr>
           <a:lstStyle/>
           <a:p>
-            <a:pPr algn="l" indent="0" marL="0">
+            <a:pPr marL="0" indent="0" algn="l">
               <a:lnSpc>
                 <a:spcPts val="2240"/>
               </a:lnSpc>
@@ -3344,7 +3291,7 @@
           </a:bodyPr>
           <a:lstStyle/>
           <a:p>
-            <a:pPr algn="ctr" indent="0" marL="0">
+            <a:pPr marL="0" indent="0" algn="ctr">
               <a:lnSpc>
                 <a:spcPts val="2240"/>
               </a:lnSpc>
@@ -3388,7 +3335,7 @@
           </a:bodyPr>
           <a:lstStyle/>
           <a:p>
-            <a:pPr algn="l" indent="0" marL="0">
+            <a:pPr marL="0" indent="0" algn="l">
               <a:lnSpc>
                 <a:spcPts val="2240"/>
               </a:lnSpc>
@@ -3441,7 +3388,7 @@
           </a:bodyPr>
           <a:lstStyle/>
           <a:p>
-            <a:pPr algn="ctr" indent="0" marL="0">
+            <a:pPr marL="0" indent="0" algn="ctr">
               <a:lnSpc>
                 <a:spcPts val="2240"/>
               </a:lnSpc>
@@ -3485,7 +3432,7 @@
           </a:bodyPr>
           <a:lstStyle/>
           <a:p>
-            <a:pPr algn="l" indent="0" marL="0">
+            <a:pPr marL="0" indent="0" algn="l">
               <a:lnSpc>
                 <a:spcPts val="2240"/>
               </a:lnSpc>
@@ -3536,7 +3483,7 @@
           </a:bodyPr>
           <a:lstStyle/>
           <a:p>
-            <a:pPr algn="ctr" indent="0" marL="0">
+            <a:pPr marL="0" indent="0" algn="ctr">
               <a:lnSpc>
                 <a:spcPts val="1960"/>
               </a:lnSpc>
@@ -3580,7 +3527,7 @@
           </a:bodyPr>
           <a:lstStyle/>
           <a:p>
-            <a:pPr algn="l" indent="0" marL="0">
+            <a:pPr marL="0" indent="0" algn="l">
               <a:lnSpc>
                 <a:spcPts val="1820"/>
               </a:lnSpc>
@@ -3624,7 +3571,7 @@
           </a:bodyPr>
           <a:lstStyle/>
           <a:p>
-            <a:pPr algn="l" indent="0" marL="0">
+            <a:pPr marL="0" indent="0" algn="l">
               <a:lnSpc>
                 <a:spcPts val="1680"/>
               </a:lnSpc>
@@ -3690,7 +3637,7 @@
           </a:bodyPr>
           <a:lstStyle/>
           <a:p>
-            <a:pPr algn="l" indent="0" marL="0">
+            <a:pPr marL="0" indent="0" algn="l">
               <a:lnSpc>
                 <a:spcPts val="2800"/>
               </a:lnSpc>
@@ -3727,6 +3674,7 @@
         <a:solidFill>
           <a:srgbClr val="F2A541"/>
         </a:solidFill>
+        <a:effectLst/>
       </p:bgPr>
     </p:bg>
     <p:spTree>
@@ -3766,14 +3714,14 @@
           </a:bodyPr>
           <a:lstStyle/>
           <a:p>
-            <a:pPr algn="l" indent="0" marL="0">
+            <a:pPr marL="0" indent="0" algn="l">
               <a:lnSpc>
                 <a:spcPts val="1820"/>
               </a:lnSpc>
               <a:buNone/>
             </a:pPr>
             <a:r>
-              <a:rPr lang="en-US" sz="1300" spc="150" kern="0" dirty="0">
+              <a:rPr lang="en-US" sz="1300" kern="0" spc="150" dirty="0">
                 <a:solidFill>
                   <a:srgbClr val="1A1D24"/>
                 </a:solidFill>
@@ -3790,7 +3738,9 @@
       <p:sp>
         <p:nvSpPr>
           <p:cNvPr id="3" name="Text 1"/>
-          <p:cNvSpPr/>
+          <p:cNvSpPr>
+            <a:spLocks noGrp="1"/>
+          </p:cNvSpPr>
           <p:nvPr>
             <p:ph type="title"/>
           </p:nvPr>
@@ -3812,7 +3762,7 @@
           </a:bodyPr>
           <a:lstStyle/>
           <a:p>
-            <a:pPr algn="l" indent="0" marL="0">
+            <a:pPr marL="0" indent="0" algn="l">
               <a:lnSpc>
                 <a:spcPts val="4400"/>
               </a:lnSpc>
@@ -3856,7 +3806,7 @@
           </a:bodyPr>
           <a:lstStyle/>
           <a:p>
-            <a:pPr algn="l" indent="0" marL="0">
+            <a:pPr marL="0" indent="0" algn="l">
               <a:lnSpc>
                 <a:spcPts val="2240"/>
               </a:lnSpc>
@@ -3911,7 +3861,7 @@
           </a:bodyPr>
           <a:lstStyle/>
           <a:p>
-            <a:pPr algn="l" indent="0" marL="0">
+            <a:pPr marL="0" indent="0" algn="l">
               <a:lnSpc>
                 <a:spcPts val="2240"/>
               </a:lnSpc>
@@ -3966,7 +3916,7 @@
           </a:bodyPr>
           <a:lstStyle/>
           <a:p>
-            <a:pPr algn="l" indent="0" marL="0">
+            <a:pPr marL="0" indent="0" algn="l">
               <a:lnSpc>
                 <a:spcPts val="2240"/>
               </a:lnSpc>
@@ -4021,7 +3971,7 @@
           </a:bodyPr>
           <a:lstStyle/>
           <a:p>
-            <a:pPr algn="l" indent="0" marL="0">
+            <a:pPr marL="0" indent="0" algn="l">
               <a:lnSpc>
                 <a:spcPts val="2240"/>
               </a:lnSpc>
@@ -4063,6 +4013,13 @@
           </a:solidFill>
           <a:ln/>
         </p:spPr>
+        <p:txBody>
+          <a:bodyPr/>
+          <a:lstStyle/>
+          <a:p>
+            <a:endParaRPr lang="pt-BR"/>
+          </a:p>
+        </p:txBody>
       </p:sp>
       <p:sp>
         <p:nvSpPr>
@@ -4087,7 +4044,7 @@
           </a:bodyPr>
           <a:lstStyle/>
           <a:p>
-            <a:pPr algn="l" indent="0" marL="0">
+            <a:pPr marL="0" indent="0" algn="l">
               <a:lnSpc>
                 <a:spcPts val="1680"/>
               </a:lnSpc>
@@ -4131,7 +4088,7 @@
           </a:bodyPr>
           <a:lstStyle/>
           <a:p>
-            <a:pPr algn="l" indent="0" marL="0">
+            <a:pPr marL="0" indent="0" algn="l">
               <a:lnSpc>
                 <a:spcPts val="2100"/>
               </a:lnSpc>
@@ -4151,7 +4108,7 @@
             <a:endParaRPr lang="en-US" sz="1400" dirty="0"/>
           </a:p>
           <a:p>
-            <a:pPr algn="l" indent="0" marL="0">
+            <a:pPr marL="0" indent="0" algn="l">
               <a:lnSpc>
                 <a:spcPts val="2100"/>
               </a:lnSpc>
@@ -4171,7 +4128,7 @@
             <a:endParaRPr lang="en-US" sz="1400" dirty="0"/>
           </a:p>
           <a:p>
-            <a:pPr algn="l" indent="0" marL="0">
+            <a:pPr marL="0" indent="0" algn="l">
               <a:lnSpc>
                 <a:spcPts val="2100"/>
               </a:lnSpc>
@@ -4191,7 +4148,7 @@
             <a:endParaRPr lang="en-US" sz="1400" dirty="0"/>
           </a:p>
           <a:p>
-            <a:pPr algn="l" indent="0" marL="0">
+            <a:pPr marL="0" indent="0" algn="l">
               <a:lnSpc>
                 <a:spcPts val="2100"/>
               </a:lnSpc>
@@ -4211,7 +4168,7 @@
             <a:endParaRPr lang="en-US" sz="1400" dirty="0"/>
           </a:p>
           <a:p>
-            <a:pPr algn="l" indent="0" marL="0">
+            <a:pPr marL="0" indent="0" algn="l">
               <a:lnSpc>
                 <a:spcPts val="2100"/>
               </a:lnSpc>
@@ -4231,7 +4188,7 @@
             <a:endParaRPr lang="en-US" sz="1400" dirty="0"/>
           </a:p>
           <a:p>
-            <a:pPr algn="l" indent="0" marL="0">
+            <a:pPr marL="0" indent="0" algn="l">
               <a:lnSpc>
                 <a:spcPts val="2100"/>
               </a:lnSpc>
@@ -4251,7 +4208,7 @@
             <a:endParaRPr lang="en-US" sz="1400" dirty="0"/>
           </a:p>
           <a:p>
-            <a:pPr algn="l" indent="0" marL="0">
+            <a:pPr marL="0" indent="0" algn="l">
               <a:lnSpc>
                 <a:spcPts val="2100"/>
               </a:lnSpc>
@@ -4271,7 +4228,7 @@
             <a:endParaRPr lang="en-US" sz="1400" dirty="0"/>
           </a:p>
           <a:p>
-            <a:pPr algn="l" indent="0" marL="0">
+            <a:pPr marL="0" indent="0" algn="l">
               <a:lnSpc>
                 <a:spcPts val="2100"/>
               </a:lnSpc>
@@ -4291,7 +4248,7 @@
             <a:endParaRPr lang="en-US" sz="1400" dirty="0"/>
           </a:p>
           <a:p>
-            <a:pPr algn="l" indent="0" marL="0">
+            <a:pPr marL="0" indent="0" algn="l">
               <a:lnSpc>
                 <a:spcPts val="2100"/>
               </a:lnSpc>
@@ -4311,7 +4268,7 @@
             <a:endParaRPr lang="en-US" sz="1400" dirty="0"/>
           </a:p>
           <a:p>
-            <a:pPr algn="l" indent="0" marL="0">
+            <a:pPr marL="0" indent="0" algn="l">
               <a:lnSpc>
                 <a:spcPts val="2100"/>
               </a:lnSpc>
@@ -4348,6 +4305,7 @@
         <a:solidFill>
           <a:srgbClr val="F4F1EA"/>
         </a:solidFill>
+        <a:effectLst/>
       </p:bgPr>
     </p:bg>
     <p:spTree>
@@ -4387,14 +4345,14 @@
           </a:bodyPr>
           <a:lstStyle/>
           <a:p>
-            <a:pPr algn="l" indent="0" marL="0">
+            <a:pPr marL="0" indent="0" algn="l">
               <a:lnSpc>
                 <a:spcPts val="1820"/>
               </a:lnSpc>
               <a:buNone/>
             </a:pPr>
             <a:r>
-              <a:rPr lang="en-US" sz="1300" spc="150" kern="0" dirty="0">
+              <a:rPr lang="en-US" sz="1300" kern="0" spc="150" dirty="0">
                 <a:solidFill>
                   <a:srgbClr val="A65A00"/>
                 </a:solidFill>
@@ -4411,7 +4369,9 @@
       <p:sp>
         <p:nvSpPr>
           <p:cNvPr id="3" name="Text 1"/>
-          <p:cNvSpPr/>
+          <p:cNvSpPr>
+            <a:spLocks noGrp="1"/>
+          </p:cNvSpPr>
           <p:nvPr>
             <p:ph type="title"/>
           </p:nvPr>
@@ -4433,7 +4393,7 @@
           </a:bodyPr>
           <a:lstStyle/>
           <a:p>
-            <a:pPr algn="l" indent="0" marL="0">
+            <a:pPr marL="0" indent="0" algn="l">
               <a:lnSpc>
                 <a:spcPts val="3960"/>
               </a:lnSpc>
@@ -4477,10 +4437,34 @@
             <a:tbl>
               <a:tblPr/>
               <a:tblGrid>
-                <a:gridCol w="2955036"/>
-                <a:gridCol w="1688592"/>
-                <a:gridCol w="3377184"/>
-                <a:gridCol w="2532888"/>
+                <a:gridCol w="2955036">
+                  <a:extLst>
+                    <a:ext uri="{9D8B030D-6E8A-4147-A177-3AD203B41FA5}">
+                      <a16:colId xmlns:a16="http://schemas.microsoft.com/office/drawing/2014/main" val="20000"/>
+                    </a:ext>
+                  </a:extLst>
+                </a:gridCol>
+                <a:gridCol w="1688592">
+                  <a:extLst>
+                    <a:ext uri="{9D8B030D-6E8A-4147-A177-3AD203B41FA5}">
+                      <a16:colId xmlns:a16="http://schemas.microsoft.com/office/drawing/2014/main" val="20001"/>
+                    </a:ext>
+                  </a:extLst>
+                </a:gridCol>
+                <a:gridCol w="3377184">
+                  <a:extLst>
+                    <a:ext uri="{9D8B030D-6E8A-4147-A177-3AD203B41FA5}">
+                      <a16:colId xmlns:a16="http://schemas.microsoft.com/office/drawing/2014/main" val="20002"/>
+                    </a:ext>
+                  </a:extLst>
+                </a:gridCol>
+                <a:gridCol w="2532888">
+                  <a:extLst>
+                    <a:ext uri="{9D8B030D-6E8A-4147-A177-3AD203B41FA5}">
+                      <a16:colId xmlns:a16="http://schemas.microsoft.com/office/drawing/2014/main" val="20003"/>
+                    </a:ext>
+                  </a:extLst>
+                </a:gridCol>
               </a:tblGrid>
               <a:tr h="385961">
                 <a:tc>
@@ -4488,7 +4472,7 @@
                     <a:bodyPr/>
                     <a:lstStyle/>
                     <a:p>
-                      <a:pPr indent="0" marL="0">
+                      <a:pPr marL="0" indent="0">
                         <a:lnSpc>
                           <a:spcPts val="1960"/>
                         </a:lnSpc>
@@ -4512,7 +4496,7 @@
                       </a:endParaRPr>
                     </a:p>
                   </a:txBody>
-                  <a:tcPr marL="62230" marR="62230" marT="62230" marB="62230" anchor="t">
+                  <a:tcPr marL="62230" marR="62230" marT="62230" marB="62230">
                     <a:lnL w="12700" cap="flat" cmpd="sng" algn="ctr">
                       <a:solidFill>
                         <a:srgbClr val="C3C0BB"/>
@@ -4559,7 +4543,7 @@
                     <a:bodyPr/>
                     <a:lstStyle/>
                     <a:p>
-                      <a:pPr indent="0" marL="0">
+                      <a:pPr marL="0" indent="0">
                         <a:lnSpc>
                           <a:spcPts val="1960"/>
                         </a:lnSpc>
@@ -4583,7 +4567,7 @@
                       </a:endParaRPr>
                     </a:p>
                   </a:txBody>
-                  <a:tcPr marL="62230" marR="62230" marT="62230" marB="62230" anchor="t">
+                  <a:tcPr marL="62230" marR="62230" marT="62230" marB="62230">
                     <a:lnL w="12700" cap="flat" cmpd="sng" algn="ctr">
                       <a:solidFill>
                         <a:srgbClr val="B5B0A3"/>
@@ -4630,7 +4614,7 @@
                     <a:bodyPr/>
                     <a:lstStyle/>
                     <a:p>
-                      <a:pPr indent="0" marL="0">
+                      <a:pPr marL="0" indent="0">
                         <a:lnSpc>
                           <a:spcPts val="1960"/>
                         </a:lnSpc>
@@ -4654,7 +4638,7 @@
                       </a:endParaRPr>
                     </a:p>
                   </a:txBody>
-                  <a:tcPr marL="62230" marR="62230" marT="62230" marB="62230" anchor="t">
+                  <a:tcPr marL="62230" marR="62230" marT="62230" marB="62230">
                     <a:lnL w="12700" cap="flat" cmpd="sng" algn="ctr">
                       <a:solidFill>
                         <a:srgbClr val="B5B0A3"/>
@@ -4701,7 +4685,7 @@
                     <a:bodyPr/>
                     <a:lstStyle/>
                     <a:p>
-                      <a:pPr indent="0" marL="0">
+                      <a:pPr marL="0" indent="0">
                         <a:lnSpc>
                           <a:spcPts val="1960"/>
                         </a:lnSpc>
@@ -4725,7 +4709,7 @@
                       </a:endParaRPr>
                     </a:p>
                   </a:txBody>
-                  <a:tcPr marL="62230" marR="62230" marT="62230" marB="62230" anchor="t">
+                  <a:tcPr marL="62230" marR="62230" marT="62230" marB="62230">
                     <a:lnL w="12700" cap="flat" cmpd="sng" algn="ctr">
                       <a:solidFill>
                         <a:srgbClr val="B5B0A3"/>
@@ -4767,6 +4751,11 @@
                     </a:solidFill>
                   </a:tcPr>
                 </a:tc>
+                <a:extLst>
+                  <a:ext uri="{0D108BD9-81ED-4DB2-BD59-A6C34878D82A}">
+                    <a16:rowId xmlns:a16="http://schemas.microsoft.com/office/drawing/2014/main" val="10000"/>
+                  </a:ext>
+                </a:extLst>
               </a:tr>
               <a:tr h="385961">
                 <a:tc>
@@ -4774,7 +4763,7 @@
                     <a:bodyPr/>
                     <a:lstStyle/>
                     <a:p>
-                      <a:pPr indent="0" marL="0">
+                      <a:pPr marL="0" indent="0">
                         <a:lnSpc>
                           <a:spcPts val="1960"/>
                         </a:lnSpc>
@@ -4798,7 +4787,7 @@
                       </a:endParaRPr>
                     </a:p>
                   </a:txBody>
-                  <a:tcPr marL="62230" marR="62230" marT="62230" marB="62230" anchor="t">
+                  <a:tcPr marL="62230" marR="62230" marT="62230" marB="62230">
                     <a:lnL w="12700" cap="flat" cmpd="sng" algn="ctr">
                       <a:solidFill>
                         <a:srgbClr val="C3C0BB"/>
@@ -4842,7 +4831,7 @@
                     <a:bodyPr/>
                     <a:lstStyle/>
                     <a:p>
-                      <a:pPr indent="0" marL="0">
+                      <a:pPr marL="0" indent="0">
                         <a:lnSpc>
                           <a:spcPts val="1960"/>
                         </a:lnSpc>
@@ -4866,7 +4855,7 @@
                       </a:endParaRPr>
                     </a:p>
                   </a:txBody>
-                  <a:tcPr marL="62230" marR="62230" marT="62230" marB="62230" anchor="t">
+                  <a:tcPr marL="62230" marR="62230" marT="62230" marB="62230">
                     <a:lnL w="12700" cap="flat" cmpd="sng" algn="ctr">
                       <a:solidFill>
                         <a:srgbClr val="C3C0BB"/>
@@ -4910,7 +4899,7 @@
                     <a:bodyPr/>
                     <a:lstStyle/>
                     <a:p>
-                      <a:pPr indent="0" marL="0">
+                      <a:pPr marL="0" indent="0">
                         <a:lnSpc>
                           <a:spcPts val="1960"/>
                         </a:lnSpc>
@@ -4934,7 +4923,7 @@
                       </a:endParaRPr>
                     </a:p>
                   </a:txBody>
-                  <a:tcPr marL="62230" marR="62230" marT="62230" marB="62230" anchor="t">
+                  <a:tcPr marL="62230" marR="62230" marT="62230" marB="62230">
                     <a:lnL w="12700" cap="flat" cmpd="sng" algn="ctr">
                       <a:solidFill>
                         <a:srgbClr val="C3C0BB"/>
@@ -4978,7 +4967,7 @@
                     <a:bodyPr/>
                     <a:lstStyle/>
                     <a:p>
-                      <a:pPr indent="0" marL="0">
+                      <a:pPr marL="0" indent="0">
                         <a:lnSpc>
                           <a:spcPts val="1960"/>
                         </a:lnSpc>
@@ -5002,7 +4991,7 @@
                       </a:endParaRPr>
                     </a:p>
                   </a:txBody>
-                  <a:tcPr marL="62230" marR="62230" marT="62230" marB="62230" anchor="t">
+                  <a:tcPr marL="62230" marR="62230" marT="62230" marB="62230">
                     <a:lnL w="12700" cap="flat" cmpd="sng" algn="ctr">
                       <a:solidFill>
                         <a:srgbClr val="C3C0BB"/>
@@ -5041,6 +5030,11 @@
                     </a:lnB>
                   </a:tcPr>
                 </a:tc>
+                <a:extLst>
+                  <a:ext uri="{0D108BD9-81ED-4DB2-BD59-A6C34878D82A}">
+                    <a16:rowId xmlns:a16="http://schemas.microsoft.com/office/drawing/2014/main" val="10001"/>
+                  </a:ext>
+                </a:extLst>
               </a:tr>
               <a:tr h="385961">
                 <a:tc>
@@ -5048,7 +5042,7 @@
                     <a:bodyPr/>
                     <a:lstStyle/>
                     <a:p>
-                      <a:pPr indent="0" marL="0">
+                      <a:pPr marL="0" indent="0">
                         <a:lnSpc>
                           <a:spcPts val="1960"/>
                         </a:lnSpc>
@@ -5072,7 +5066,7 @@
                       </a:endParaRPr>
                     </a:p>
                   </a:txBody>
-                  <a:tcPr marL="62230" marR="62230" marT="62230" marB="62230" anchor="t">
+                  <a:tcPr marL="62230" marR="62230" marT="62230" marB="62230">
                     <a:lnL w="12700" cap="flat" cmpd="sng" algn="ctr">
                       <a:solidFill>
                         <a:srgbClr val="C3C0BB"/>
@@ -5116,7 +5110,7 @@
                     <a:bodyPr/>
                     <a:lstStyle/>
                     <a:p>
-                      <a:pPr indent="0" marL="0">
+                      <a:pPr marL="0" indent="0">
                         <a:lnSpc>
                           <a:spcPts val="1960"/>
                         </a:lnSpc>
@@ -5140,7 +5134,7 @@
                       </a:endParaRPr>
                     </a:p>
                   </a:txBody>
-                  <a:tcPr marL="62230" marR="62230" marT="62230" marB="62230" anchor="t">
+                  <a:tcPr marL="62230" marR="62230" marT="62230" marB="62230">
                     <a:lnL w="12700" cap="flat" cmpd="sng" algn="ctr">
                       <a:solidFill>
                         <a:srgbClr val="C3C0BB"/>
@@ -5184,7 +5178,7 @@
                     <a:bodyPr/>
                     <a:lstStyle/>
                     <a:p>
-                      <a:pPr indent="0" marL="0">
+                      <a:pPr marL="0" indent="0">
                         <a:lnSpc>
                           <a:spcPts val="1960"/>
                         </a:lnSpc>
@@ -5208,7 +5202,7 @@
                       </a:endParaRPr>
                     </a:p>
                   </a:txBody>
-                  <a:tcPr marL="62230" marR="62230" marT="62230" marB="62230" anchor="t">
+                  <a:tcPr marL="62230" marR="62230" marT="62230" marB="62230">
                     <a:lnL w="12700" cap="flat" cmpd="sng" algn="ctr">
                       <a:solidFill>
                         <a:srgbClr val="C3C0BB"/>
@@ -5252,7 +5246,7 @@
                     <a:bodyPr/>
                     <a:lstStyle/>
                     <a:p>
-                      <a:pPr indent="0" marL="0">
+                      <a:pPr marL="0" indent="0">
                         <a:lnSpc>
                           <a:spcPts val="1960"/>
                         </a:lnSpc>
@@ -5276,7 +5270,7 @@
                       </a:endParaRPr>
                     </a:p>
                   </a:txBody>
-                  <a:tcPr marL="62230" marR="62230" marT="62230" marB="62230" anchor="t">
+                  <a:tcPr marL="62230" marR="62230" marT="62230" marB="62230">
                     <a:lnL w="12700" cap="flat" cmpd="sng" algn="ctr">
                       <a:solidFill>
                         <a:srgbClr val="C3C0BB"/>
@@ -5315,6 +5309,11 @@
                     </a:lnB>
                   </a:tcPr>
                 </a:tc>
+                <a:extLst>
+                  <a:ext uri="{0D108BD9-81ED-4DB2-BD59-A6C34878D82A}">
+                    <a16:rowId xmlns:a16="http://schemas.microsoft.com/office/drawing/2014/main" val="10002"/>
+                  </a:ext>
+                </a:extLst>
               </a:tr>
               <a:tr h="385961">
                 <a:tc>
@@ -5322,7 +5321,7 @@
                     <a:bodyPr/>
                     <a:lstStyle/>
                     <a:p>
-                      <a:pPr indent="0" marL="0">
+                      <a:pPr marL="0" indent="0">
                         <a:lnSpc>
                           <a:spcPts val="1960"/>
                         </a:lnSpc>
@@ -5346,7 +5345,7 @@
                       </a:endParaRPr>
                     </a:p>
                   </a:txBody>
-                  <a:tcPr marL="62230" marR="62230" marT="62230" marB="62230" anchor="t">
+                  <a:tcPr marL="62230" marR="62230" marT="62230" marB="62230">
                     <a:lnL w="12700" cap="flat" cmpd="sng" algn="ctr">
                       <a:solidFill>
                         <a:srgbClr val="C3C0BB"/>
@@ -5393,7 +5392,7 @@
                     <a:bodyPr/>
                     <a:lstStyle/>
                     <a:p>
-                      <a:pPr indent="0" marL="0">
+                      <a:pPr marL="0" indent="0">
                         <a:lnSpc>
                           <a:spcPts val="1960"/>
                         </a:lnSpc>
@@ -5417,7 +5416,7 @@
                       </a:endParaRPr>
                     </a:p>
                   </a:txBody>
-                  <a:tcPr marL="62230" marR="62230" marT="62230" marB="62230" anchor="t">
+                  <a:tcPr marL="62230" marR="62230" marT="62230" marB="62230">
                     <a:lnL w="12700" cap="flat" cmpd="sng" algn="ctr">
                       <a:solidFill>
                         <a:srgbClr val="C8B598"/>
@@ -5464,7 +5463,7 @@
                     <a:bodyPr/>
                     <a:lstStyle/>
                     <a:p>
-                      <a:pPr indent="0" marL="0">
+                      <a:pPr marL="0" indent="0">
                         <a:lnSpc>
                           <a:spcPts val="1960"/>
                         </a:lnSpc>
@@ -5488,7 +5487,7 @@
                       </a:endParaRPr>
                     </a:p>
                   </a:txBody>
-                  <a:tcPr marL="62230" marR="62230" marT="62230" marB="62230" anchor="t">
+                  <a:tcPr marL="62230" marR="62230" marT="62230" marB="62230">
                     <a:lnL w="12700" cap="flat" cmpd="sng" algn="ctr">
                       <a:solidFill>
                         <a:srgbClr val="C8B598"/>
@@ -5535,7 +5534,7 @@
                     <a:bodyPr/>
                     <a:lstStyle/>
                     <a:p>
-                      <a:pPr indent="0" marL="0">
+                      <a:pPr marL="0" indent="0">
                         <a:lnSpc>
                           <a:spcPts val="1960"/>
                         </a:lnSpc>
@@ -5559,7 +5558,7 @@
                       </a:endParaRPr>
                     </a:p>
                   </a:txBody>
-                  <a:tcPr marL="62230" marR="62230" marT="62230" marB="62230" anchor="t">
+                  <a:tcPr marL="62230" marR="62230" marT="62230" marB="62230">
                     <a:lnL w="12700" cap="flat" cmpd="sng" algn="ctr">
                       <a:solidFill>
                         <a:srgbClr val="C8B598"/>
@@ -5601,6 +5600,11 @@
                     </a:solidFill>
                   </a:tcPr>
                 </a:tc>
+                <a:extLst>
+                  <a:ext uri="{0D108BD9-81ED-4DB2-BD59-A6C34878D82A}">
+                    <a16:rowId xmlns:a16="http://schemas.microsoft.com/office/drawing/2014/main" val="10003"/>
+                  </a:ext>
+                </a:extLst>
               </a:tr>
               <a:tr h="385961">
                 <a:tc>
@@ -5608,7 +5612,7 @@
                     <a:bodyPr/>
                     <a:lstStyle/>
                     <a:p>
-                      <a:pPr indent="0" marL="0">
+                      <a:pPr marL="0" indent="0">
                         <a:lnSpc>
                           <a:spcPts val="1960"/>
                         </a:lnSpc>
@@ -5632,7 +5636,7 @@
                       </a:endParaRPr>
                     </a:p>
                   </a:txBody>
-                  <a:tcPr marL="62230" marR="62230" marT="62230" marB="62230" anchor="t">
+                  <a:tcPr marL="62230" marR="62230" marT="62230" marB="62230">
                     <a:lnL w="12700" cap="flat" cmpd="sng" algn="ctr">
                       <a:solidFill>
                         <a:srgbClr val="C3C0BB"/>
@@ -5676,7 +5680,7 @@
                     <a:bodyPr/>
                     <a:lstStyle/>
                     <a:p>
-                      <a:pPr indent="0" marL="0">
+                      <a:pPr marL="0" indent="0">
                         <a:lnSpc>
                           <a:spcPts val="1960"/>
                         </a:lnSpc>
@@ -5700,7 +5704,7 @@
                       </a:endParaRPr>
                     </a:p>
                   </a:txBody>
-                  <a:tcPr marL="62230" marR="62230" marT="62230" marB="62230" anchor="t">
+                  <a:tcPr marL="62230" marR="62230" marT="62230" marB="62230">
                     <a:lnL w="12700" cap="flat" cmpd="sng" algn="ctr">
                       <a:solidFill>
                         <a:srgbClr val="C3C0BB"/>
@@ -5744,7 +5748,7 @@
                     <a:bodyPr/>
                     <a:lstStyle/>
                     <a:p>
-                      <a:pPr indent="0" marL="0">
+                      <a:pPr marL="0" indent="0">
                         <a:lnSpc>
                           <a:spcPts val="1960"/>
                         </a:lnSpc>
@@ -5768,7 +5772,7 @@
                       </a:endParaRPr>
                     </a:p>
                   </a:txBody>
-                  <a:tcPr marL="62230" marR="62230" marT="62230" marB="62230" anchor="t">
+                  <a:tcPr marL="62230" marR="62230" marT="62230" marB="62230">
                     <a:lnL w="12700" cap="flat" cmpd="sng" algn="ctr">
                       <a:solidFill>
                         <a:srgbClr val="C3C0BB"/>
@@ -5812,7 +5816,7 @@
                     <a:bodyPr/>
                     <a:lstStyle/>
                     <a:p>
-                      <a:pPr indent="0" marL="0">
+                      <a:pPr marL="0" indent="0">
                         <a:lnSpc>
                           <a:spcPts val="1960"/>
                         </a:lnSpc>
@@ -5836,7 +5840,7 @@
                       </a:endParaRPr>
                     </a:p>
                   </a:txBody>
-                  <a:tcPr marL="62230" marR="62230" marT="62230" marB="62230" anchor="t">
+                  <a:tcPr marL="62230" marR="62230" marT="62230" marB="62230">
                     <a:lnL w="12700" cap="flat" cmpd="sng" algn="ctr">
                       <a:solidFill>
                         <a:srgbClr val="C3C0BB"/>
@@ -5875,6 +5879,11 @@
                     </a:lnB>
                   </a:tcPr>
                 </a:tc>
+                <a:extLst>
+                  <a:ext uri="{0D108BD9-81ED-4DB2-BD59-A6C34878D82A}">
+                    <a16:rowId xmlns:a16="http://schemas.microsoft.com/office/drawing/2014/main" val="10004"/>
+                  </a:ext>
+                </a:extLst>
               </a:tr>
               <a:tr h="385961">
                 <a:tc>
@@ -5882,7 +5891,7 @@
                     <a:bodyPr/>
                     <a:lstStyle/>
                     <a:p>
-                      <a:pPr indent="0" marL="0">
+                      <a:pPr marL="0" indent="0">
                         <a:lnSpc>
                           <a:spcPts val="1960"/>
                         </a:lnSpc>
@@ -5906,7 +5915,7 @@
                       </a:endParaRPr>
                     </a:p>
                   </a:txBody>
-                  <a:tcPr marL="62230" marR="62230" marT="62230" marB="62230" anchor="t">
+                  <a:tcPr marL="62230" marR="62230" marT="62230" marB="62230">
                     <a:lnL w="12700" cap="flat" cmpd="sng" algn="ctr">
                       <a:solidFill>
                         <a:srgbClr val="C3C0BB"/>
@@ -5950,7 +5959,7 @@
                     <a:bodyPr/>
                     <a:lstStyle/>
                     <a:p>
-                      <a:pPr indent="0" marL="0">
+                      <a:pPr marL="0" indent="0">
                         <a:lnSpc>
                           <a:spcPts val="1960"/>
                         </a:lnSpc>
@@ -5974,7 +5983,7 @@
                       </a:endParaRPr>
                     </a:p>
                   </a:txBody>
-                  <a:tcPr marL="62230" marR="62230" marT="62230" marB="62230" anchor="t">
+                  <a:tcPr marL="62230" marR="62230" marT="62230" marB="62230">
                     <a:lnL w="12700" cap="flat" cmpd="sng" algn="ctr">
                       <a:solidFill>
                         <a:srgbClr val="C3C0BB"/>
@@ -6018,7 +6027,7 @@
                     <a:bodyPr/>
                     <a:lstStyle/>
                     <a:p>
-                      <a:pPr indent="0" marL="0">
+                      <a:pPr marL="0" indent="0">
                         <a:lnSpc>
                           <a:spcPts val="1960"/>
                         </a:lnSpc>
@@ -6042,7 +6051,7 @@
                       </a:endParaRPr>
                     </a:p>
                   </a:txBody>
-                  <a:tcPr marL="62230" marR="62230" marT="62230" marB="62230" anchor="t">
+                  <a:tcPr marL="62230" marR="62230" marT="62230" marB="62230">
                     <a:lnL w="12700" cap="flat" cmpd="sng" algn="ctr">
                       <a:solidFill>
                         <a:srgbClr val="C3C0BB"/>
@@ -6086,7 +6095,7 @@
                     <a:bodyPr/>
                     <a:lstStyle/>
                     <a:p>
-                      <a:pPr indent="0" marL="0">
+                      <a:pPr marL="0" indent="0">
                         <a:lnSpc>
                           <a:spcPts val="1960"/>
                         </a:lnSpc>
@@ -6110,7 +6119,7 @@
                       </a:endParaRPr>
                     </a:p>
                   </a:txBody>
-                  <a:tcPr marL="62230" marR="62230" marT="62230" marB="62230" anchor="t">
+                  <a:tcPr marL="62230" marR="62230" marT="62230" marB="62230">
                     <a:lnL w="12700" cap="flat" cmpd="sng" algn="ctr">
                       <a:solidFill>
                         <a:srgbClr val="C3C0BB"/>
@@ -6149,6 +6158,11 @@
                     </a:lnB>
                   </a:tcPr>
                 </a:tc>
+                <a:extLst>
+                  <a:ext uri="{0D108BD9-81ED-4DB2-BD59-A6C34878D82A}">
+                    <a16:rowId xmlns:a16="http://schemas.microsoft.com/office/drawing/2014/main" val="10005"/>
+                  </a:ext>
+                </a:extLst>
               </a:tr>
               <a:tr h="385961">
                 <a:tc>
@@ -6156,7 +6170,7 @@
                     <a:bodyPr/>
                     <a:lstStyle/>
                     <a:p>
-                      <a:pPr indent="0" marL="0">
+                      <a:pPr marL="0" indent="0">
                         <a:lnSpc>
                           <a:spcPts val="1960"/>
                         </a:lnSpc>
@@ -6180,7 +6194,7 @@
                       </a:endParaRPr>
                     </a:p>
                   </a:txBody>
-                  <a:tcPr marL="62230" marR="62230" marT="62230" marB="62230" anchor="t">
+                  <a:tcPr marL="62230" marR="62230" marT="62230" marB="62230">
                     <a:lnL w="12700" cap="flat" cmpd="sng" algn="ctr">
                       <a:solidFill>
                         <a:srgbClr val="C3C0BB"/>
@@ -6224,7 +6238,7 @@
                     <a:bodyPr/>
                     <a:lstStyle/>
                     <a:p>
-                      <a:pPr indent="0" marL="0">
+                      <a:pPr marL="0" indent="0">
                         <a:lnSpc>
                           <a:spcPts val="1960"/>
                         </a:lnSpc>
@@ -6248,7 +6262,7 @@
                       </a:endParaRPr>
                     </a:p>
                   </a:txBody>
-                  <a:tcPr marL="62230" marR="62230" marT="62230" marB="62230" anchor="t">
+                  <a:tcPr marL="62230" marR="62230" marT="62230" marB="62230">
                     <a:lnL w="12700" cap="flat" cmpd="sng" algn="ctr">
                       <a:solidFill>
                         <a:srgbClr val="C3C0BB"/>
@@ -6292,7 +6306,7 @@
                     <a:bodyPr/>
                     <a:lstStyle/>
                     <a:p>
-                      <a:pPr indent="0" marL="0">
+                      <a:pPr marL="0" indent="0">
                         <a:lnSpc>
                           <a:spcPts val="1960"/>
                         </a:lnSpc>
@@ -6316,7 +6330,7 @@
                       </a:endParaRPr>
                     </a:p>
                   </a:txBody>
-                  <a:tcPr marL="62230" marR="62230" marT="62230" marB="62230" anchor="t">
+                  <a:tcPr marL="62230" marR="62230" marT="62230" marB="62230">
                     <a:lnL w="12700" cap="flat" cmpd="sng" algn="ctr">
                       <a:solidFill>
                         <a:srgbClr val="C3C0BB"/>
@@ -6360,7 +6374,7 @@
                     <a:bodyPr/>
                     <a:lstStyle/>
                     <a:p>
-                      <a:pPr indent="0" marL="0">
+                      <a:pPr marL="0" indent="0">
                         <a:lnSpc>
                           <a:spcPts val="1960"/>
                         </a:lnSpc>
@@ -6384,7 +6398,7 @@
                       </a:endParaRPr>
                     </a:p>
                   </a:txBody>
-                  <a:tcPr marL="62230" marR="62230" marT="62230" marB="62230" anchor="t">
+                  <a:tcPr marL="62230" marR="62230" marT="62230" marB="62230">
                     <a:lnL w="12700" cap="flat" cmpd="sng" algn="ctr">
                       <a:solidFill>
                         <a:srgbClr val="C3C0BB"/>
@@ -6423,6 +6437,11 @@
                     </a:lnB>
                   </a:tcPr>
                 </a:tc>
+                <a:extLst>
+                  <a:ext uri="{0D108BD9-81ED-4DB2-BD59-A6C34878D82A}">
+                    <a16:rowId xmlns:a16="http://schemas.microsoft.com/office/drawing/2014/main" val="10006"/>
+                  </a:ext>
+                </a:extLst>
               </a:tr>
               <a:tr h="385961">
                 <a:tc>
@@ -6430,7 +6449,7 @@
                     <a:bodyPr/>
                     <a:lstStyle/>
                     <a:p>
-                      <a:pPr indent="0" marL="0">
+                      <a:pPr marL="0" indent="0">
                         <a:lnSpc>
                           <a:spcPts val="1960"/>
                         </a:lnSpc>
@@ -6454,7 +6473,7 @@
                       </a:endParaRPr>
                     </a:p>
                   </a:txBody>
-                  <a:tcPr marL="62230" marR="62230" marT="62230" marB="62230" anchor="t">
+                  <a:tcPr marL="62230" marR="62230" marT="62230" marB="62230">
                     <a:lnL w="12700" cap="flat" cmpd="sng" algn="ctr">
                       <a:solidFill>
                         <a:srgbClr val="C3C0BB"/>
@@ -6498,7 +6517,7 @@
                     <a:bodyPr/>
                     <a:lstStyle/>
                     <a:p>
-                      <a:pPr indent="0" marL="0">
+                      <a:pPr marL="0" indent="0">
                         <a:lnSpc>
                           <a:spcPts val="1960"/>
                         </a:lnSpc>
@@ -6522,7 +6541,7 @@
                       </a:endParaRPr>
                     </a:p>
                   </a:txBody>
-                  <a:tcPr marL="62230" marR="62230" marT="62230" marB="62230" anchor="t">
+                  <a:tcPr marL="62230" marR="62230" marT="62230" marB="62230">
                     <a:lnL w="12700" cap="flat" cmpd="sng" algn="ctr">
                       <a:solidFill>
                         <a:srgbClr val="C3C0BB"/>
@@ -6566,7 +6585,7 @@
                     <a:bodyPr/>
                     <a:lstStyle/>
                     <a:p>
-                      <a:pPr indent="0" marL="0">
+                      <a:pPr marL="0" indent="0">
                         <a:lnSpc>
                           <a:spcPts val="1960"/>
                         </a:lnSpc>
@@ -6590,7 +6609,7 @@
                       </a:endParaRPr>
                     </a:p>
                   </a:txBody>
-                  <a:tcPr marL="62230" marR="62230" marT="62230" marB="62230" anchor="t">
+                  <a:tcPr marL="62230" marR="62230" marT="62230" marB="62230">
                     <a:lnL w="12700" cap="flat" cmpd="sng" algn="ctr">
                       <a:solidFill>
                         <a:srgbClr val="C3C0BB"/>
@@ -6634,7 +6653,7 @@
                     <a:bodyPr/>
                     <a:lstStyle/>
                     <a:p>
-                      <a:pPr indent="0" marL="0">
+                      <a:pPr marL="0" indent="0">
                         <a:lnSpc>
                           <a:spcPts val="1960"/>
                         </a:lnSpc>
@@ -6658,7 +6677,7 @@
                       </a:endParaRPr>
                     </a:p>
                   </a:txBody>
-                  <a:tcPr marL="62230" marR="62230" marT="62230" marB="62230" anchor="t">
+                  <a:tcPr marL="62230" marR="62230" marT="62230" marB="62230">
                     <a:lnL w="12700" cap="flat" cmpd="sng" algn="ctr">
                       <a:solidFill>
                         <a:srgbClr val="C3C0BB"/>
@@ -6697,6 +6716,11 @@
                     </a:lnB>
                   </a:tcPr>
                 </a:tc>
+                <a:extLst>
+                  <a:ext uri="{0D108BD9-81ED-4DB2-BD59-A6C34878D82A}">
+                    <a16:rowId xmlns:a16="http://schemas.microsoft.com/office/drawing/2014/main" val="10007"/>
+                  </a:ext>
+                </a:extLst>
               </a:tr>
               <a:tr h="385961">
                 <a:tc>
@@ -6704,7 +6728,7 @@
                     <a:bodyPr/>
                     <a:lstStyle/>
                     <a:p>
-                      <a:pPr indent="0" marL="0">
+                      <a:pPr marL="0" indent="0">
                         <a:lnSpc>
                           <a:spcPts val="1960"/>
                         </a:lnSpc>
@@ -6728,7 +6752,7 @@
                       </a:endParaRPr>
                     </a:p>
                   </a:txBody>
-                  <a:tcPr marL="62230" marR="62230" marT="62230" marB="62230" anchor="t">
+                  <a:tcPr marL="62230" marR="62230" marT="62230" marB="62230">
                     <a:lnL w="12700" cap="flat" cmpd="sng" algn="ctr">
                       <a:solidFill>
                         <a:srgbClr val="C3C0BB"/>
@@ -6772,7 +6796,7 @@
                     <a:bodyPr/>
                     <a:lstStyle/>
                     <a:p>
-                      <a:pPr indent="0" marL="0">
+                      <a:pPr marL="0" indent="0">
                         <a:lnSpc>
                           <a:spcPts val="1960"/>
                         </a:lnSpc>
@@ -6796,7 +6820,7 @@
                       </a:endParaRPr>
                     </a:p>
                   </a:txBody>
-                  <a:tcPr marL="62230" marR="62230" marT="62230" marB="62230" anchor="t">
+                  <a:tcPr marL="62230" marR="62230" marT="62230" marB="62230">
                     <a:lnL w="12700" cap="flat" cmpd="sng" algn="ctr">
                       <a:solidFill>
                         <a:srgbClr val="C3C0BB"/>
@@ -6840,7 +6864,7 @@
                     <a:bodyPr/>
                     <a:lstStyle/>
                     <a:p>
-                      <a:pPr indent="0" marL="0">
+                      <a:pPr marL="0" indent="0">
                         <a:lnSpc>
                           <a:spcPts val="1960"/>
                         </a:lnSpc>
@@ -6864,7 +6888,7 @@
                       </a:endParaRPr>
                     </a:p>
                   </a:txBody>
-                  <a:tcPr marL="62230" marR="62230" marT="62230" marB="62230" anchor="t">
+                  <a:tcPr marL="62230" marR="62230" marT="62230" marB="62230">
                     <a:lnL w="12700" cap="flat" cmpd="sng" algn="ctr">
                       <a:solidFill>
                         <a:srgbClr val="C3C0BB"/>
@@ -6908,7 +6932,7 @@
                     <a:bodyPr/>
                     <a:lstStyle/>
                     <a:p>
-                      <a:pPr indent="0" marL="0">
+                      <a:pPr marL="0" indent="0">
                         <a:lnSpc>
                           <a:spcPts val="1960"/>
                         </a:lnSpc>
@@ -6932,7 +6956,7 @@
                       </a:endParaRPr>
                     </a:p>
                   </a:txBody>
-                  <a:tcPr marL="62230" marR="62230" marT="62230" marB="62230" anchor="t">
+                  <a:tcPr marL="62230" marR="62230" marT="62230" marB="62230">
                     <a:lnL w="12700" cap="flat" cmpd="sng" algn="ctr">
                       <a:solidFill>
                         <a:srgbClr val="C3C0BB"/>
@@ -6971,6 +6995,11 @@
                     </a:lnB>
                   </a:tcPr>
                 </a:tc>
+                <a:extLst>
+                  <a:ext uri="{0D108BD9-81ED-4DB2-BD59-A6C34878D82A}">
+                    <a16:rowId xmlns:a16="http://schemas.microsoft.com/office/drawing/2014/main" val="10008"/>
+                  </a:ext>
+                </a:extLst>
               </a:tr>
               <a:tr h="385961">
                 <a:tc>
@@ -6978,7 +7007,7 @@
                     <a:bodyPr/>
                     <a:lstStyle/>
                     <a:p>
-                      <a:pPr indent="0" marL="0">
+                      <a:pPr marL="0" indent="0">
                         <a:lnSpc>
                           <a:spcPts val="1960"/>
                         </a:lnSpc>
@@ -7002,7 +7031,7 @@
                       </a:endParaRPr>
                     </a:p>
                   </a:txBody>
-                  <a:tcPr marL="62230" marR="62230" marT="62230" marB="62230" anchor="t">
+                  <a:tcPr marL="62230" marR="62230" marT="62230" marB="62230">
                     <a:lnL w="12700" cap="flat" cmpd="sng" algn="ctr">
                       <a:solidFill>
                         <a:srgbClr val="C3C0BB"/>
@@ -7046,7 +7075,7 @@
                     <a:bodyPr/>
                     <a:lstStyle/>
                     <a:p>
-                      <a:pPr indent="0" marL="0">
+                      <a:pPr marL="0" indent="0">
                         <a:lnSpc>
                           <a:spcPts val="1960"/>
                         </a:lnSpc>
@@ -7070,7 +7099,7 @@
                       </a:endParaRPr>
                     </a:p>
                   </a:txBody>
-                  <a:tcPr marL="62230" marR="62230" marT="62230" marB="62230" anchor="t">
+                  <a:tcPr marL="62230" marR="62230" marT="62230" marB="62230">
                     <a:lnL w="12700" cap="flat" cmpd="sng" algn="ctr">
                       <a:solidFill>
                         <a:srgbClr val="C3C0BB"/>
@@ -7114,7 +7143,7 @@
                     <a:bodyPr/>
                     <a:lstStyle/>
                     <a:p>
-                      <a:pPr indent="0" marL="0">
+                      <a:pPr marL="0" indent="0">
                         <a:lnSpc>
                           <a:spcPts val="1960"/>
                         </a:lnSpc>
@@ -7138,7 +7167,7 @@
                       </a:endParaRPr>
                     </a:p>
                   </a:txBody>
-                  <a:tcPr marL="62230" marR="62230" marT="62230" marB="62230" anchor="t">
+                  <a:tcPr marL="62230" marR="62230" marT="62230" marB="62230">
                     <a:lnL w="12700" cap="flat" cmpd="sng" algn="ctr">
                       <a:solidFill>
                         <a:srgbClr val="C3C0BB"/>
@@ -7182,7 +7211,7 @@
                     <a:bodyPr/>
                     <a:lstStyle/>
                     <a:p>
-                      <a:pPr indent="0" marL="0">
+                      <a:pPr marL="0" indent="0">
                         <a:lnSpc>
                           <a:spcPts val="1960"/>
                         </a:lnSpc>
@@ -7206,7 +7235,7 @@
                       </a:endParaRPr>
                     </a:p>
                   </a:txBody>
-                  <a:tcPr marL="62230" marR="62230" marT="62230" marB="62230" anchor="t">
+                  <a:tcPr marL="62230" marR="62230" marT="62230" marB="62230">
                     <a:lnL w="12700" cap="flat" cmpd="sng" algn="ctr">
                       <a:solidFill>
                         <a:srgbClr val="C3C0BB"/>
@@ -7245,6 +7274,11 @@
                     </a:lnB>
                   </a:tcPr>
                 </a:tc>
+                <a:extLst>
+                  <a:ext uri="{0D108BD9-81ED-4DB2-BD59-A6C34878D82A}">
+                    <a16:rowId xmlns:a16="http://schemas.microsoft.com/office/drawing/2014/main" val="10009"/>
+                  </a:ext>
+                </a:extLst>
               </a:tr>
             </a:tbl>
           </a:graphicData>
@@ -7266,6 +7300,7 @@
         <a:solidFill>
           <a:srgbClr val="12161F"/>
         </a:solidFill>
+        <a:effectLst/>
       </p:bgPr>
     </p:bg>
     <p:spTree>
@@ -7285,7 +7320,9 @@
       <p:sp>
         <p:nvSpPr>
           <p:cNvPr id="2" name="Text 0"/>
-          <p:cNvSpPr/>
+          <p:cNvSpPr>
+            <a:spLocks noGrp="1"/>
+          </p:cNvSpPr>
           <p:nvPr>
             <p:ph type="title"/>
           </p:nvPr>
@@ -7307,7 +7344,7 @@
           </a:bodyPr>
           <a:lstStyle/>
           <a:p>
-            <a:pPr algn="l" indent="0" marL="0">
+            <a:pPr marL="0" indent="0" algn="l">
               <a:lnSpc>
                 <a:spcPts val="3080"/>
               </a:lnSpc>
@@ -7351,11 +7388,11 @@
         </p:spPr>
         <p:txBody>
           <a:bodyPr wrap="square" lIns="173442" tIns="122642" rIns="30186" bIns="97242" rtlCol="0" anchor="t">
-            <a:normAutofit/>
+            <a:normAutofit fontScale="25000" lnSpcReduction="20000"/>
           </a:bodyPr>
           <a:lstStyle/>
           <a:p>
-            <a:pPr algn="l" indent="0" marL="0">
+            <a:pPr marL="0" indent="0" algn="l">
               <a:lnSpc>
                 <a:spcPts val="1560"/>
               </a:lnSpc>
@@ -7386,7 +7423,7 @@
             <a:endParaRPr lang="en-US" sz="1200" dirty="0"/>
           </a:p>
           <a:p>
-            <a:pPr algn="l" indent="0" marL="0">
+            <a:pPr marL="0" indent="0" algn="l">
               <a:lnSpc>
                 <a:spcPts val="1560"/>
               </a:lnSpc>
@@ -7428,7 +7465,7 @@
             <a:endParaRPr lang="en-US" sz="1200" dirty="0"/>
           </a:p>
           <a:p>
-            <a:pPr algn="l" indent="0" marL="0">
+            <a:pPr marL="0" indent="0" algn="l">
               <a:lnSpc>
                 <a:spcPts val="1560"/>
               </a:lnSpc>
@@ -7448,7 +7485,7 @@
             <a:endParaRPr lang="en-US" sz="1200" dirty="0"/>
           </a:p>
           <a:p>
-            <a:pPr algn="l" indent="0" marL="0">
+            <a:pPr marL="0" indent="0" algn="l">
               <a:lnSpc>
                 <a:spcPts val="1560"/>
               </a:lnSpc>
@@ -7468,7 +7505,7 @@
             <a:endParaRPr lang="en-US" sz="1200" dirty="0"/>
           </a:p>
           <a:p>
-            <a:pPr algn="l" indent="0" marL="0">
+            <a:pPr marL="0" indent="0" algn="l">
               <a:lnSpc>
                 <a:spcPts val="1560"/>
               </a:lnSpc>
@@ -7477,7 +7514,7 @@
             <a:endParaRPr lang="en-US" sz="1200" dirty="0"/>
           </a:p>
           <a:p>
-            <a:pPr algn="l" indent="0" marL="0">
+            <a:pPr marL="0" indent="0" algn="l">
               <a:lnSpc>
                 <a:spcPts val="1560"/>
               </a:lnSpc>
@@ -7508,7 +7545,7 @@
             <a:endParaRPr lang="en-US" sz="1200" dirty="0"/>
           </a:p>
           <a:p>
-            <a:pPr algn="l" indent="0" marL="0">
+            <a:pPr marL="0" indent="0" algn="l">
               <a:lnSpc>
                 <a:spcPts val="1560"/>
               </a:lnSpc>
@@ -7550,7 +7587,7 @@
             <a:endParaRPr lang="en-US" sz="1200" dirty="0"/>
           </a:p>
           <a:p>
-            <a:pPr algn="l" indent="0" marL="0">
+            <a:pPr marL="0" indent="0" algn="l">
               <a:lnSpc>
                 <a:spcPts val="1560"/>
               </a:lnSpc>
@@ -7570,7 +7607,7 @@
             <a:endParaRPr lang="en-US" sz="1200" dirty="0"/>
           </a:p>
           <a:p>
-            <a:pPr algn="l" indent="0" marL="0">
+            <a:pPr marL="0" indent="0" algn="l">
               <a:lnSpc>
                 <a:spcPts val="1560"/>
               </a:lnSpc>
@@ -7601,7 +7638,7 @@
             <a:endParaRPr lang="en-US" sz="1200" dirty="0"/>
           </a:p>
           <a:p>
-            <a:pPr algn="l" indent="0" marL="0">
+            <a:pPr marL="0" indent="0" algn="l">
               <a:lnSpc>
                 <a:spcPts val="1560"/>
               </a:lnSpc>
@@ -7621,7 +7658,7 @@
             <a:endParaRPr lang="en-US" sz="1200" dirty="0"/>
           </a:p>
           <a:p>
-            <a:pPr algn="l" indent="0" marL="0">
+            <a:pPr marL="0" indent="0" algn="l">
               <a:lnSpc>
                 <a:spcPts val="1560"/>
               </a:lnSpc>
@@ -7641,7 +7678,7 @@
             <a:endParaRPr lang="en-US" sz="1200" dirty="0"/>
           </a:p>
           <a:p>
-            <a:pPr algn="l" indent="0" marL="0">
+            <a:pPr marL="0" indent="0" algn="l">
               <a:lnSpc>
                 <a:spcPts val="1560"/>
               </a:lnSpc>
@@ -7661,7 +7698,7 @@
             <a:endParaRPr lang="en-US" sz="1200" dirty="0"/>
           </a:p>
           <a:p>
-            <a:pPr algn="l" indent="0" marL="0">
+            <a:pPr marL="0" indent="0" algn="l">
               <a:lnSpc>
                 <a:spcPts val="1560"/>
               </a:lnSpc>
@@ -7670,7 +7707,7 @@
             <a:endParaRPr lang="en-US" sz="1200" dirty="0"/>
           </a:p>
           <a:p>
-            <a:pPr algn="l" indent="0" marL="0">
+            <a:pPr marL="0" indent="0" algn="l">
               <a:lnSpc>
                 <a:spcPts val="1560"/>
               </a:lnSpc>
@@ -7734,7 +7771,7 @@
             <a:endParaRPr lang="en-US" sz="1200" dirty="0"/>
           </a:p>
           <a:p>
-            <a:pPr algn="l" indent="0" marL="0">
+            <a:pPr marL="0" indent="0" algn="l">
               <a:lnSpc>
                 <a:spcPts val="1560"/>
               </a:lnSpc>
@@ -7754,7 +7791,7 @@
             <a:endParaRPr lang="en-US" sz="1200" dirty="0"/>
           </a:p>
           <a:p>
-            <a:pPr algn="l" indent="0" marL="0">
+            <a:pPr marL="0" indent="0" algn="l">
               <a:lnSpc>
                 <a:spcPts val="1560"/>
               </a:lnSpc>
@@ -7774,7 +7811,7 @@
             <a:endParaRPr lang="en-US" sz="1200" dirty="0"/>
           </a:p>
           <a:p>
-            <a:pPr algn="l" indent="0" marL="0">
+            <a:pPr marL="0" indent="0" algn="l">
               <a:lnSpc>
                 <a:spcPts val="1560"/>
               </a:lnSpc>
@@ -7783,7 +7820,7 @@
             <a:endParaRPr lang="en-US" sz="1200" dirty="0"/>
           </a:p>
           <a:p>
-            <a:pPr algn="l" indent="0" marL="0">
+            <a:pPr marL="0" indent="0" algn="l">
               <a:lnSpc>
                 <a:spcPts val="1560"/>
               </a:lnSpc>
@@ -7847,7 +7884,7 @@
             <a:endParaRPr lang="en-US" sz="1200" dirty="0"/>
           </a:p>
           <a:p>
-            <a:pPr algn="l" indent="0" marL="0">
+            <a:pPr marL="0" indent="0" algn="l">
               <a:lnSpc>
                 <a:spcPts val="1560"/>
               </a:lnSpc>
@@ -7867,7 +7904,7 @@
             <a:endParaRPr lang="en-US" sz="1200" dirty="0"/>
           </a:p>
           <a:p>
-            <a:pPr algn="l" indent="0" marL="0">
+            <a:pPr marL="0" indent="0" algn="l">
               <a:lnSpc>
                 <a:spcPts val="1560"/>
               </a:lnSpc>
@@ -7887,7 +7924,7 @@
             <a:endParaRPr lang="en-US" sz="1200" dirty="0"/>
           </a:p>
           <a:p>
-            <a:pPr algn="l" indent="0" marL="0">
+            <a:pPr marL="0" indent="0" algn="l">
               <a:lnSpc>
                 <a:spcPts val="1560"/>
               </a:lnSpc>
@@ -7907,7 +7944,7 @@
             <a:endParaRPr lang="en-US" sz="1200" dirty="0"/>
           </a:p>
           <a:p>
-            <a:pPr algn="l" indent="0" marL="0">
+            <a:pPr marL="0" indent="0" algn="l">
               <a:lnSpc>
                 <a:spcPts val="1560"/>
               </a:lnSpc>
@@ -7955,7 +7992,7 @@
           </a:bodyPr>
           <a:lstStyle/>
           <a:p>
-            <a:pPr algn="l" indent="0" marL="0">
+            <a:pPr marL="0" indent="0" algn="l">
               <a:lnSpc>
                 <a:spcPts val="1560"/>
               </a:lnSpc>
@@ -8019,7 +8056,7 @@
             <a:endParaRPr lang="en-US" sz="1200" dirty="0"/>
           </a:p>
           <a:p>
-            <a:pPr algn="l" indent="0" marL="0">
+            <a:pPr marL="0" indent="0" algn="l">
               <a:lnSpc>
                 <a:spcPts val="1560"/>
               </a:lnSpc>
@@ -8083,7 +8120,7 @@
             <a:endParaRPr lang="en-US" sz="1200" dirty="0"/>
           </a:p>
           <a:p>
-            <a:pPr algn="l" indent="0" marL="0">
+            <a:pPr marL="0" indent="0" algn="l">
               <a:lnSpc>
                 <a:spcPts val="1560"/>
               </a:lnSpc>
@@ -8125,7 +8162,7 @@
             <a:endParaRPr lang="en-US" sz="1200" dirty="0"/>
           </a:p>
           <a:p>
-            <a:pPr algn="l" indent="0" marL="0">
+            <a:pPr marL="0" indent="0" algn="l">
               <a:lnSpc>
                 <a:spcPts val="1560"/>
               </a:lnSpc>
@@ -8145,7 +8182,7 @@
             <a:endParaRPr lang="en-US" sz="1200" dirty="0"/>
           </a:p>
           <a:p>
-            <a:pPr algn="l" indent="0" marL="0">
+            <a:pPr marL="0" indent="0" algn="l">
               <a:lnSpc>
                 <a:spcPts val="1560"/>
               </a:lnSpc>
@@ -8176,7 +8213,7 @@
             <a:endParaRPr lang="en-US" sz="1200" dirty="0"/>
           </a:p>
           <a:p>
-            <a:pPr algn="l" indent="0" marL="0">
+            <a:pPr marL="0" indent="0" algn="l">
               <a:lnSpc>
                 <a:spcPts val="1560"/>
               </a:lnSpc>
@@ -8207,7 +8244,7 @@
             <a:endParaRPr lang="en-US" sz="1200" dirty="0"/>
           </a:p>
           <a:p>
-            <a:pPr algn="l" indent="0" marL="0">
+            <a:pPr marL="0" indent="0" algn="l">
               <a:lnSpc>
                 <a:spcPts val="1560"/>
               </a:lnSpc>
@@ -8249,7 +8286,7 @@
             <a:endParaRPr lang="en-US" sz="1200" dirty="0"/>
           </a:p>
           <a:p>
-            <a:pPr algn="l" indent="0" marL="0">
+            <a:pPr marL="0" indent="0" algn="l">
               <a:lnSpc>
                 <a:spcPts val="1560"/>
               </a:lnSpc>
@@ -8258,7 +8295,7 @@
             <a:endParaRPr lang="en-US" sz="1200" dirty="0"/>
           </a:p>
           <a:p>
-            <a:pPr algn="l" indent="0" marL="0">
+            <a:pPr marL="0" indent="0" algn="l">
               <a:lnSpc>
                 <a:spcPts val="1560"/>
               </a:lnSpc>
@@ -8322,7 +8359,7 @@
             <a:endParaRPr lang="en-US" sz="1200" dirty="0"/>
           </a:p>
           <a:p>
-            <a:pPr algn="l" indent="0" marL="0">
+            <a:pPr marL="0" indent="0" algn="l">
               <a:lnSpc>
                 <a:spcPts val="1560"/>
               </a:lnSpc>
@@ -8386,7 +8423,7 @@
             <a:endParaRPr lang="en-US" sz="1200" dirty="0"/>
           </a:p>
           <a:p>
-            <a:pPr algn="l" indent="0" marL="0">
+            <a:pPr marL="0" indent="0" algn="l">
               <a:lnSpc>
                 <a:spcPts val="1560"/>
               </a:lnSpc>
@@ -8406,7 +8443,7 @@
             <a:endParaRPr lang="en-US" sz="1200" dirty="0"/>
           </a:p>
           <a:p>
-            <a:pPr algn="l" indent="0" marL="0">
+            <a:pPr marL="0" indent="0" algn="l">
               <a:lnSpc>
                 <a:spcPts val="1560"/>
               </a:lnSpc>
@@ -8426,7 +8463,7 @@
             <a:endParaRPr lang="en-US" sz="1200" dirty="0"/>
           </a:p>
           <a:p>
-            <a:pPr algn="l" indent="0" marL="0">
+            <a:pPr marL="0" indent="0" algn="l">
               <a:lnSpc>
                 <a:spcPts val="1560"/>
               </a:lnSpc>
@@ -8446,7 +8483,7 @@
             <a:endParaRPr lang="en-US" sz="1200" dirty="0"/>
           </a:p>
           <a:p>
-            <a:pPr algn="l" indent="0" marL="0">
+            <a:pPr marL="0" indent="0" algn="l">
               <a:lnSpc>
                 <a:spcPts val="1560"/>
               </a:lnSpc>
@@ -8466,7 +8503,7 @@
             <a:endParaRPr lang="en-US" sz="1200" dirty="0"/>
           </a:p>
           <a:p>
-            <a:pPr algn="l" indent="0" marL="0">
+            <a:pPr marL="0" indent="0" algn="l">
               <a:lnSpc>
                 <a:spcPts val="1560"/>
               </a:lnSpc>
@@ -8508,7 +8545,7 @@
             <a:endParaRPr lang="en-US" sz="1200" dirty="0"/>
           </a:p>
           <a:p>
-            <a:pPr algn="l" indent="0" marL="0">
+            <a:pPr marL="0" indent="0" algn="l">
               <a:lnSpc>
                 <a:spcPts val="1560"/>
               </a:lnSpc>
@@ -8539,7 +8576,7 @@
             <a:endParaRPr lang="en-US" sz="1200" dirty="0"/>
           </a:p>
           <a:p>
-            <a:pPr algn="l" indent="0" marL="0">
+            <a:pPr marL="0" indent="0" algn="l">
               <a:lnSpc>
                 <a:spcPts val="1560"/>
               </a:lnSpc>
@@ -8559,7 +8596,7 @@
             <a:endParaRPr lang="en-US" sz="1200" dirty="0"/>
           </a:p>
           <a:p>
-            <a:pPr algn="l" indent="0" marL="0">
+            <a:pPr marL="0" indent="0" algn="l">
               <a:lnSpc>
                 <a:spcPts val="1560"/>
               </a:lnSpc>
@@ -8618,6 +8655,7 @@
         <a:solidFill>
           <a:srgbClr val="F4F1EA"/>
         </a:solidFill>
+        <a:effectLst/>
       </p:bgPr>
     </p:bg>
     <p:spTree>
@@ -8657,14 +8695,14 @@
           </a:bodyPr>
           <a:lstStyle/>
           <a:p>
-            <a:pPr algn="l" indent="0" marL="0">
+            <a:pPr marL="0" indent="0" algn="l">
               <a:lnSpc>
                 <a:spcPts val="1820"/>
               </a:lnSpc>
               <a:buNone/>
             </a:pPr>
             <a:r>
-              <a:rPr lang="en-US" sz="1300" spc="150" kern="0" dirty="0">
+              <a:rPr lang="en-US" sz="1300" kern="0" spc="150" dirty="0">
                 <a:solidFill>
                   <a:srgbClr val="A65A00"/>
                 </a:solidFill>
@@ -8704,6 +8742,13 @@
             <a:prstDash val="solid"/>
           </a:ln>
         </p:spPr>
+        <p:txBody>
+          <a:bodyPr/>
+          <a:lstStyle/>
+          <a:p>
+            <a:endParaRPr lang="pt-BR"/>
+          </a:p>
+        </p:txBody>
       </p:sp>
       <p:sp>
         <p:nvSpPr>
@@ -8728,7 +8773,7 @@
           </a:bodyPr>
           <a:lstStyle/>
           <a:p>
-            <a:pPr algn="l" indent="0" marL="0">
+            <a:pPr marL="0" indent="0" algn="l">
               <a:lnSpc>
                 <a:spcPts val="4840"/>
               </a:lnSpc>
@@ -8772,7 +8817,7 @@
           </a:bodyPr>
           <a:lstStyle/>
           <a:p>
-            <a:pPr algn="l" indent="0" marL="0">
+            <a:pPr marL="0" indent="0" algn="l">
               <a:lnSpc>
                 <a:spcPts val="1960"/>
               </a:lnSpc>
@@ -8819,6 +8864,13 @@
             <a:prstDash val="solid"/>
           </a:ln>
         </p:spPr>
+        <p:txBody>
+          <a:bodyPr/>
+          <a:lstStyle/>
+          <a:p>
+            <a:endParaRPr lang="pt-BR"/>
+          </a:p>
+        </p:txBody>
       </p:sp>
       <p:sp>
         <p:nvSpPr>
@@ -8843,7 +8895,7 @@
           </a:bodyPr>
           <a:lstStyle/>
           <a:p>
-            <a:pPr algn="l" indent="0" marL="0">
+            <a:pPr marL="0" indent="0" algn="l">
               <a:lnSpc>
                 <a:spcPts val="4840"/>
               </a:lnSpc>
@@ -8887,7 +8939,7 @@
           </a:bodyPr>
           <a:lstStyle/>
           <a:p>
-            <a:pPr algn="l" indent="0" marL="0">
+            <a:pPr marL="0" indent="0" algn="l">
               <a:lnSpc>
                 <a:spcPts val="1960"/>
               </a:lnSpc>
@@ -8934,6 +8986,13 @@
             <a:prstDash val="solid"/>
           </a:ln>
         </p:spPr>
+        <p:txBody>
+          <a:bodyPr/>
+          <a:lstStyle/>
+          <a:p>
+            <a:endParaRPr lang="pt-BR"/>
+          </a:p>
+        </p:txBody>
       </p:sp>
       <p:sp>
         <p:nvSpPr>
@@ -8958,7 +9017,7 @@
           </a:bodyPr>
           <a:lstStyle/>
           <a:p>
-            <a:pPr algn="l" indent="0" marL="0">
+            <a:pPr marL="0" indent="0" algn="l">
               <a:lnSpc>
                 <a:spcPts val="4840"/>
               </a:lnSpc>
@@ -9002,7 +9061,7 @@
           </a:bodyPr>
           <a:lstStyle/>
           <a:p>
-            <a:pPr algn="l" indent="0" marL="0">
+            <a:pPr marL="0" indent="0" algn="l">
               <a:lnSpc>
                 <a:spcPts val="1960"/>
               </a:lnSpc>
@@ -9026,7 +9085,9 @@
       <p:sp>
         <p:nvSpPr>
           <p:cNvPr id="12" name="Text 10"/>
-          <p:cNvSpPr/>
+          <p:cNvSpPr>
+            <a:spLocks noGrp="1"/>
+          </p:cNvSpPr>
           <p:nvPr>
             <p:ph type="title"/>
           </p:nvPr>
@@ -9048,7 +9109,7 @@
           </a:bodyPr>
           <a:lstStyle/>
           <a:p>
-            <a:pPr algn="l" indent="0" marL="0">
+            <a:pPr marL="0" indent="0" algn="l">
               <a:lnSpc>
                 <a:spcPts val="2400"/>
               </a:lnSpc>
@@ -9092,13 +9153,13 @@
           </a:bodyPr>
           <a:lstStyle/>
           <a:p>
-            <a:pPr algn="l" marL="211138" indent="-211138">
+            <a:pPr marL="211138" indent="-211138" algn="l">
               <a:lnSpc>
                 <a:spcPts val="2250"/>
               </a:lnSpc>
               <a:buSzPct val="100000"/>
               <a:buFontTx/>
-              <a:buAutoNum type="arabicPeriod" startAt="1"/>
+              <a:buAutoNum type="arabicPeriod"/>
             </a:pPr>
             <a:r>
               <a:rPr lang="en-US" sz="1500" dirty="0">
@@ -9136,13 +9197,13 @@
             <a:endParaRPr lang="en-US" sz="1500" dirty="0"/>
           </a:p>
           <a:p>
-            <a:pPr algn="l" marL="211138" indent="-211138">
+            <a:pPr marL="211138" indent="-211138" algn="l">
               <a:lnSpc>
                 <a:spcPts val="2250"/>
               </a:lnSpc>
               <a:buSzPct val="100000"/>
               <a:buFontTx/>
-              <a:buAutoNum type="arabicPeriod" startAt="1"/>
+              <a:buAutoNum type="arabicPeriod"/>
             </a:pPr>
             <a:r>
               <a:rPr lang="en-US" sz="1500" dirty="0">
@@ -9180,13 +9241,13 @@
             <a:endParaRPr lang="en-US" sz="1500" dirty="0"/>
           </a:p>
           <a:p>
-            <a:pPr algn="l" marL="211138" indent="-211138">
+            <a:pPr marL="211138" indent="-211138" algn="l">
               <a:lnSpc>
                 <a:spcPts val="2250"/>
               </a:lnSpc>
               <a:buSzPct val="100000"/>
               <a:buFontTx/>
-              <a:buAutoNum type="arabicPeriod" startAt="1"/>
+              <a:buAutoNum type="arabicPeriod"/>
             </a:pPr>
             <a:r>
               <a:rPr lang="en-US" sz="1500" dirty="0">
@@ -9219,6 +9280,7 @@
         <a:solidFill>
           <a:srgbClr val="12161F"/>
         </a:solidFill>
+        <a:effectLst/>
       </p:bgPr>
     </p:bg>
     <p:spTree>
@@ -9258,14 +9320,14 @@
           </a:bodyPr>
           <a:lstStyle/>
           <a:p>
-            <a:pPr algn="l" indent="0" marL="0">
+            <a:pPr marL="0" indent="0" algn="l">
               <a:lnSpc>
                 <a:spcPts val="1820"/>
               </a:lnSpc>
               <a:buNone/>
             </a:pPr>
             <a:r>
-              <a:rPr lang="en-US" sz="1300" spc="150" kern="0" dirty="0">
+              <a:rPr lang="en-US" sz="1300" kern="0" spc="150" dirty="0">
                 <a:solidFill>
                   <a:srgbClr val="F2A541"/>
                 </a:solidFill>
@@ -9282,7 +9344,9 @@
       <p:sp>
         <p:nvSpPr>
           <p:cNvPr id="3" name="Text 1"/>
-          <p:cNvSpPr/>
+          <p:cNvSpPr>
+            <a:spLocks noGrp="1"/>
+          </p:cNvSpPr>
           <p:nvPr>
             <p:ph type="title"/>
           </p:nvPr>
@@ -9304,7 +9368,7 @@
           </a:bodyPr>
           <a:lstStyle/>
           <a:p>
-            <a:pPr algn="l" indent="0" marL="0">
+            <a:pPr marL="0" indent="0" algn="l">
               <a:lnSpc>
                 <a:spcPts val="3960"/>
               </a:lnSpc>
@@ -9346,6 +9410,13 @@
           </a:solidFill>
           <a:ln/>
         </p:spPr>
+        <p:txBody>
+          <a:bodyPr/>
+          <a:lstStyle/>
+          <a:p>
+            <a:endParaRPr lang="pt-BR"/>
+          </a:p>
+        </p:txBody>
       </p:sp>
       <p:sp>
         <p:nvSpPr>
@@ -9370,7 +9441,7 @@
           </a:bodyPr>
           <a:lstStyle/>
           <a:p>
-            <a:pPr algn="l" indent="0" marL="0">
+            <a:pPr marL="0" indent="0" algn="l">
               <a:lnSpc>
                 <a:spcPts val="1680"/>
               </a:lnSpc>
@@ -9414,7 +9485,7 @@
           </a:bodyPr>
           <a:lstStyle/>
           <a:p>
-            <a:pPr algn="l" indent="0" marL="0">
+            <a:pPr marL="0" indent="0" algn="l">
               <a:lnSpc>
                 <a:spcPts val="1885"/>
               </a:lnSpc>
@@ -9467,7 +9538,7 @@
             <a:endParaRPr lang="en-US" sz="1300" dirty="0"/>
           </a:p>
           <a:p>
-            <a:pPr algn="l" indent="0" marL="0">
+            <a:pPr marL="0" indent="0" algn="l">
               <a:lnSpc>
                 <a:spcPts val="1885"/>
               </a:lnSpc>
@@ -9476,7 +9547,7 @@
             <a:endParaRPr lang="en-US" sz="1300" dirty="0"/>
           </a:p>
           <a:p>
-            <a:pPr algn="l" indent="0" marL="0">
+            <a:pPr marL="0" indent="0" algn="l">
               <a:lnSpc>
                 <a:spcPts val="1885"/>
               </a:lnSpc>
@@ -9507,7 +9578,7 @@
             <a:endParaRPr lang="en-US" sz="1300" dirty="0"/>
           </a:p>
           <a:p>
-            <a:pPr algn="l" indent="0" marL="0">
+            <a:pPr marL="0" indent="0" algn="l">
               <a:lnSpc>
                 <a:spcPts val="1885"/>
               </a:lnSpc>
@@ -9538,7 +9609,7 @@
             <a:endParaRPr lang="en-US" sz="1300" dirty="0"/>
           </a:p>
           <a:p>
-            <a:pPr algn="l" indent="0" marL="0">
+            <a:pPr marL="0" indent="0" algn="l">
               <a:lnSpc>
                 <a:spcPts val="1885"/>
               </a:lnSpc>
@@ -9591,7 +9662,7 @@
             <a:endParaRPr lang="en-US" sz="1300" dirty="0"/>
           </a:p>
           <a:p>
-            <a:pPr algn="l" indent="0" marL="0">
+            <a:pPr marL="0" indent="0" algn="l">
               <a:lnSpc>
                 <a:spcPts val="1885"/>
               </a:lnSpc>
@@ -9600,7 +9671,7 @@
             <a:endParaRPr lang="en-US" sz="1300" dirty="0"/>
           </a:p>
           <a:p>
-            <a:pPr algn="l" indent="0" marL="0">
+            <a:pPr marL="0" indent="0" algn="l">
               <a:lnSpc>
                 <a:spcPts val="1885"/>
               </a:lnSpc>
@@ -9631,7 +9702,7 @@
             <a:endParaRPr lang="en-US" sz="1300" dirty="0"/>
           </a:p>
           <a:p>
-            <a:pPr algn="l" indent="0" marL="0">
+            <a:pPr marL="0" indent="0" algn="l">
               <a:lnSpc>
                 <a:spcPts val="1885"/>
               </a:lnSpc>
@@ -9684,6 +9755,13 @@
           </a:solidFill>
           <a:ln/>
         </p:spPr>
+        <p:txBody>
+          <a:bodyPr/>
+          <a:lstStyle/>
+          <a:p>
+            <a:endParaRPr lang="pt-BR"/>
+          </a:p>
+        </p:txBody>
       </p:sp>
       <p:sp>
         <p:nvSpPr>
@@ -9710,19 +9788,19 @@
                 <a:lnTo>
                   <a:pt x="101600" y="792361"/>
                 </a:lnTo>
-                <a:arcTo hR="101600" wR="101600" stAng="5400000" swAng="5400000"/>
+                <a:arcTo wR="101600" hR="101600" stAng="5400000" swAng="5400000"/>
                 <a:lnTo>
                   <a:pt x="0" y="101600"/>
                 </a:lnTo>
-                <a:arcTo hR="101600" wR="101600" stAng="10800000" swAng="5400000"/>
+                <a:arcTo wR="101600" hR="101600" stAng="10800000" swAng="5400000"/>
                 <a:lnTo>
                   <a:pt x="101600" y="0"/>
                 </a:lnTo>
-                <a:arcTo hR="101600" wR="63500" stAng="16200000" swAng="-5400000"/>
+                <a:arcTo wR="63500" hR="101600" stAng="16200000" swAng="-5400000"/>
                 <a:lnTo>
                   <a:pt x="38100" y="690761"/>
                 </a:lnTo>
-                <a:arcTo hR="101600" wR="63500" stAng="10800000" swAng="-5400000"/>
+                <a:arcTo wR="63500" hR="101600" stAng="10800000" swAng="-5400000"/>
                 <a:close/>
               </a:path>
             </a:pathLst>
@@ -9732,6 +9810,13 @@
           </a:solidFill>
           <a:ln/>
         </p:spPr>
+        <p:txBody>
+          <a:bodyPr/>
+          <a:lstStyle/>
+          <a:p>
+            <a:endParaRPr lang="pt-BR"/>
+          </a:p>
+        </p:txBody>
       </p:sp>
       <p:sp>
         <p:nvSpPr>
@@ -9756,7 +9841,7 @@
           </a:bodyPr>
           <a:lstStyle/>
           <a:p>
-            <a:pPr algn="l" indent="0" marL="0">
+            <a:pPr marL="0" indent="0" algn="l">
               <a:lnSpc>
                 <a:spcPts val="1920"/>
               </a:lnSpc>
@@ -9800,7 +9885,7 @@
           </a:bodyPr>
           <a:lstStyle/>
           <a:p>
-            <a:pPr algn="l" indent="0" marL="0">
+            <a:pPr marL="0" indent="0" algn="l">
               <a:lnSpc>
                 <a:spcPts val="1820"/>
               </a:lnSpc>
@@ -9853,6 +9938,13 @@
           </a:solidFill>
           <a:ln/>
         </p:spPr>
+        <p:txBody>
+          <a:bodyPr/>
+          <a:lstStyle/>
+          <a:p>
+            <a:endParaRPr lang="pt-BR"/>
+          </a:p>
+        </p:txBody>
       </p:sp>
       <p:sp>
         <p:nvSpPr>
@@ -9879,19 +9971,19 @@
                 <a:lnTo>
                   <a:pt x="101600" y="792361"/>
                 </a:lnTo>
-                <a:arcTo hR="101600" wR="101600" stAng="5400000" swAng="5400000"/>
+                <a:arcTo wR="101600" hR="101600" stAng="5400000" swAng="5400000"/>
                 <a:lnTo>
                   <a:pt x="0" y="101600"/>
                 </a:lnTo>
-                <a:arcTo hR="101600" wR="101600" stAng="10800000" swAng="5400000"/>
+                <a:arcTo wR="101600" hR="101600" stAng="10800000" swAng="5400000"/>
                 <a:lnTo>
                   <a:pt x="101600" y="0"/>
                 </a:lnTo>
-                <a:arcTo hR="101600" wR="63500" stAng="16200000" swAng="-5400000"/>
+                <a:arcTo wR="63500" hR="101600" stAng="16200000" swAng="-5400000"/>
                 <a:lnTo>
                   <a:pt x="38100" y="690761"/>
                 </a:lnTo>
-                <a:arcTo hR="101600" wR="63500" stAng="10800000" swAng="-5400000"/>
+                <a:arcTo wR="63500" hR="101600" stAng="10800000" swAng="-5400000"/>
                 <a:close/>
               </a:path>
             </a:pathLst>
@@ -9901,6 +9993,13 @@
           </a:solidFill>
           <a:ln/>
         </p:spPr>
+        <p:txBody>
+          <a:bodyPr/>
+          <a:lstStyle/>
+          <a:p>
+            <a:endParaRPr lang="pt-BR"/>
+          </a:p>
+        </p:txBody>
       </p:sp>
       <p:sp>
         <p:nvSpPr>
@@ -9925,7 +10024,7 @@
           </a:bodyPr>
           <a:lstStyle/>
           <a:p>
-            <a:pPr algn="l" indent="0" marL="0">
+            <a:pPr marL="0" indent="0" algn="l">
               <a:lnSpc>
                 <a:spcPts val="1920"/>
               </a:lnSpc>
@@ -9969,7 +10068,7 @@
           </a:bodyPr>
           <a:lstStyle/>
           <a:p>
-            <a:pPr algn="l" indent="0" marL="0">
+            <a:pPr marL="0" indent="0" algn="l">
               <a:lnSpc>
                 <a:spcPts val="1820"/>
               </a:lnSpc>
@@ -10033,6 +10132,13 @@
           </a:solidFill>
           <a:ln/>
         </p:spPr>
+        <p:txBody>
+          <a:bodyPr/>
+          <a:lstStyle/>
+          <a:p>
+            <a:endParaRPr lang="pt-BR"/>
+          </a:p>
+        </p:txBody>
       </p:sp>
       <p:sp>
         <p:nvSpPr>
@@ -10059,19 +10165,19 @@
                 <a:lnTo>
                   <a:pt x="101600" y="792361"/>
                 </a:lnTo>
-                <a:arcTo hR="101600" wR="101600" stAng="5400000" swAng="5400000"/>
+                <a:arcTo wR="101600" hR="101600" stAng="5400000" swAng="5400000"/>
                 <a:lnTo>
                   <a:pt x="0" y="101600"/>
                 </a:lnTo>
-                <a:arcTo hR="101600" wR="101600" stAng="10800000" swAng="5400000"/>
+                <a:arcTo wR="101600" hR="101600" stAng="10800000" swAng="5400000"/>
                 <a:lnTo>
                   <a:pt x="101600" y="0"/>
                 </a:lnTo>
-                <a:arcTo hR="101600" wR="63500" stAng="16200000" swAng="-5400000"/>
+                <a:arcTo wR="63500" hR="101600" stAng="16200000" swAng="-5400000"/>
                 <a:lnTo>
                   <a:pt x="38100" y="690761"/>
                 </a:lnTo>
-                <a:arcTo hR="101600" wR="63500" stAng="10800000" swAng="-5400000"/>
+                <a:arcTo wR="63500" hR="101600" stAng="10800000" swAng="-5400000"/>
                 <a:close/>
               </a:path>
             </a:pathLst>
@@ -10081,6 +10187,13 @@
           </a:solidFill>
           <a:ln/>
         </p:spPr>
+        <p:txBody>
+          <a:bodyPr/>
+          <a:lstStyle/>
+          <a:p>
+            <a:endParaRPr lang="pt-BR"/>
+          </a:p>
+        </p:txBody>
       </p:sp>
       <p:sp>
         <p:nvSpPr>
@@ -10105,7 +10218,7 @@
           </a:bodyPr>
           <a:lstStyle/>
           <a:p>
-            <a:pPr algn="l" indent="0" marL="0">
+            <a:pPr marL="0" indent="0" algn="l">
               <a:lnSpc>
                 <a:spcPts val="1920"/>
               </a:lnSpc>
@@ -10149,7 +10262,7 @@
           </a:bodyPr>
           <a:lstStyle/>
           <a:p>
-            <a:pPr algn="l" indent="0" marL="0">
+            <a:pPr marL="0" indent="0" algn="l">
               <a:lnSpc>
                 <a:spcPts val="1820"/>
               </a:lnSpc>
@@ -10204,7 +10317,7 @@
           </a:bodyPr>
           <a:lstStyle/>
           <a:p>
-            <a:pPr algn="l" indent="0" marL="0">
+            <a:pPr marL="0" indent="0" algn="l">
               <a:lnSpc>
                 <a:spcPts val="2100"/>
               </a:lnSpc>
@@ -10263,6 +10376,7 @@
         <a:solidFill>
           <a:srgbClr val="12161F"/>
         </a:solidFill>
+        <a:effectLst/>
       </p:bgPr>
     </p:bg>
     <p:spTree>
@@ -10302,14 +10416,14 @@
           </a:bodyPr>
           <a:lstStyle/>
           <a:p>
-            <a:pPr algn="l" indent="0" marL="0">
+            <a:pPr marL="0" indent="0" algn="l">
               <a:lnSpc>
                 <a:spcPts val="1820"/>
               </a:lnSpc>
               <a:buNone/>
             </a:pPr>
             <a:r>
-              <a:rPr lang="en-US" sz="1300" spc="150" kern="0" dirty="0">
+              <a:rPr lang="en-US" sz="1300" kern="0" spc="150" dirty="0">
                 <a:solidFill>
                   <a:srgbClr val="F2A541"/>
                 </a:solidFill>
@@ -10346,7 +10460,7 @@
           </a:bodyPr>
           <a:lstStyle/>
           <a:p>
-            <a:pPr algn="l" indent="0" marL="0">
+            <a:pPr marL="0" indent="0" algn="l">
               <a:lnSpc>
                 <a:spcPts val="4000"/>
               </a:lnSpc>
@@ -10412,7 +10526,7 @@
           </a:bodyPr>
           <a:lstStyle/>
           <a:p>
-            <a:pPr algn="l" indent="0" marL="0">
+            <a:pPr marL="0" indent="0" algn="l">
               <a:lnSpc>
                 <a:spcPts val="2240"/>
               </a:lnSpc>
@@ -10456,7 +10570,7 @@
           </a:bodyPr>
           <a:lstStyle/>
           <a:p>
-            <a:pPr algn="l" indent="0" marL="0">
+            <a:pPr marL="0" indent="0" algn="l">
               <a:lnSpc>
                 <a:spcPts val="1680"/>
               </a:lnSpc>
@@ -10478,6 +10592,276 @@
         </p:txBody>
       </p:sp>
     </p:spTree>
+  </p:cSld>
+  <p:clrMapOvr>
+    <a:masterClrMapping/>
+  </p:clrMapOvr>
+</p:sld>
+</file>
+
+<file path=ppt/slides/slide17.xml><?xml version="1.0" encoding="utf-8"?>
+<p:sld xmlns:a="http://schemas.openxmlformats.org/drawingml/2006/main" xmlns:r="http://schemas.openxmlformats.org/officeDocument/2006/relationships" xmlns:p="http://schemas.openxmlformats.org/presentationml/2006/main">
+  <p:cSld>
+    <p:bg>
+      <p:bgPr>
+        <a:solidFill>
+          <a:srgbClr val="F4F1EA"/>
+        </a:solidFill>
+        <a:effectLst/>
+      </p:bgPr>
+    </p:bg>
+    <p:spTree>
+      <p:nvGrpSpPr>
+        <p:cNvPr id="1" name="">
+          <a:extLst>
+            <a:ext uri="{FF2B5EF4-FFF2-40B4-BE49-F238E27FC236}">
+              <a16:creationId xmlns:a16="http://schemas.microsoft.com/office/drawing/2014/main" id="{864F60A6-907B-AA6D-B094-F0AD4C3ACFEA}"/>
+            </a:ext>
+          </a:extLst>
+        </p:cNvPr>
+        <p:cNvGrpSpPr/>
+        <p:nvPr/>
+      </p:nvGrpSpPr>
+      <p:grpSpPr>
+        <a:xfrm>
+          <a:off x="0" y="0"/>
+          <a:ext cx="0" cy="0"/>
+          <a:chOff x="0" y="0"/>
+          <a:chExt cx="0" cy="0"/>
+        </a:xfrm>
+      </p:grpSpPr>
+      <p:sp>
+        <p:nvSpPr>
+          <p:cNvPr id="13" name="Text 11">
+            <a:extLst>
+              <a:ext uri="{FF2B5EF4-FFF2-40B4-BE49-F238E27FC236}">
+                <a16:creationId xmlns:a16="http://schemas.microsoft.com/office/drawing/2014/main" id="{29B902A7-A0A4-8DB0-E91F-208BD488A26F}"/>
+              </a:ext>
+            </a:extLst>
+          </p:cNvPr>
+          <p:cNvSpPr/>
+          <p:nvPr/>
+        </p:nvSpPr>
+        <p:spPr>
+          <a:xfrm>
+            <a:off x="805181" y="5277863"/>
+            <a:ext cx="10832910" cy="256481"/>
+          </a:xfrm>
+          <a:prstGeom prst="rect">
+            <a:avLst/>
+          </a:prstGeom>
+          <a:noFill/>
+          <a:ln/>
+        </p:spPr>
+        <p:txBody>
+          <a:bodyPr wrap="square" lIns="0" tIns="0" rIns="0" bIns="0" rtlCol="0" anchor="t">
+            <a:normAutofit/>
+          </a:bodyPr>
+          <a:lstStyle/>
+          <a:p>
+            <a:pPr>
+              <a:buSzPct val="100000"/>
+            </a:pPr>
+            <a:r>
+              <a:rPr lang="en-US" sz="1500" dirty="0" err="1">
+                <a:solidFill>
+                  <a:srgbClr val="1A1D24"/>
+                </a:solidFill>
+                <a:latin typeface="IBM Plex Sans" pitchFamily="34" charset="0"/>
+                <a:ea typeface="IBM Plex Sans" pitchFamily="34" charset="-122"/>
+                <a:cs typeface="IBM Plex Sans" pitchFamily="34" charset="-120"/>
+              </a:rPr>
+              <a:t>Github</a:t>
+            </a:r>
+            <a:r>
+              <a:rPr lang="en-US" sz="1500" dirty="0">
+                <a:solidFill>
+                  <a:srgbClr val="1A1D24"/>
+                </a:solidFill>
+                <a:latin typeface="IBM Plex Sans" pitchFamily="34" charset="0"/>
+                <a:ea typeface="IBM Plex Sans" pitchFamily="34" charset="-122"/>
+                <a:cs typeface="IBM Plex Sans" pitchFamily="34" charset="-120"/>
+              </a:rPr>
+              <a:t>: </a:t>
+            </a:r>
+            <a:r>
+              <a:rPr lang="pt-BR" sz="1200" dirty="0" err="1">
+                <a:hlinkClick r:id="rId3"/>
+              </a:rPr>
+              <a:t>lincolnolivr</a:t>
+            </a:r>
+            <a:r>
+              <a:rPr lang="pt-BR" sz="1200" dirty="0">
+                <a:hlinkClick r:id="rId3"/>
+              </a:rPr>
+              <a:t>/</a:t>
+            </a:r>
+            <a:r>
+              <a:rPr lang="pt-BR" sz="1200" dirty="0" err="1">
+                <a:hlinkClick r:id="rId3"/>
+              </a:rPr>
+              <a:t>lru_cache</a:t>
+            </a:r>
+            <a:endParaRPr lang="en-US" sz="1500" dirty="0"/>
+          </a:p>
+        </p:txBody>
+      </p:sp>
+      <p:sp>
+        <p:nvSpPr>
+          <p:cNvPr id="18" name="Text 0">
+            <a:extLst>
+              <a:ext uri="{FF2B5EF4-FFF2-40B4-BE49-F238E27FC236}">
+                <a16:creationId xmlns:a16="http://schemas.microsoft.com/office/drawing/2014/main" id="{B215F32B-A43E-E298-62E9-0A695B993080}"/>
+              </a:ext>
+            </a:extLst>
+          </p:cNvPr>
+          <p:cNvSpPr>
+            <a:spLocks noGrp="1"/>
+          </p:cNvSpPr>
+          <p:nvPr>
+            <p:ph type="title"/>
+          </p:nvPr>
+        </p:nvSpPr>
+        <p:spPr>
+          <a:xfrm>
+            <a:off x="812800" y="762424"/>
+            <a:ext cx="10883392" cy="416520"/>
+          </a:xfrm>
+          <a:prstGeom prst="rect">
+            <a:avLst/>
+          </a:prstGeom>
+          <a:noFill/>
+          <a:ln/>
+        </p:spPr>
+        <p:txBody>
+          <a:bodyPr wrap="square" lIns="0" tIns="0" rIns="0" bIns="0" rtlCol="0" anchor="t">
+            <a:normAutofit/>
+          </a:bodyPr>
+          <a:lstStyle/>
+          <a:p>
+            <a:pPr marL="0" indent="0" algn="l">
+              <a:lnSpc>
+                <a:spcPts val="3080"/>
+              </a:lnSpc>
+              <a:buNone/>
+            </a:pPr>
+            <a:r>
+              <a:rPr lang="en-US" sz="2800" b="1" dirty="0" err="1">
+                <a:solidFill>
+                  <a:schemeClr val="bg1"/>
+                </a:solidFill>
+              </a:rPr>
+              <a:t>Baixe</a:t>
+            </a:r>
+            <a:r>
+              <a:rPr lang="en-US" sz="2800" b="1" dirty="0">
+                <a:solidFill>
+                  <a:schemeClr val="bg1"/>
+                </a:solidFill>
+              </a:rPr>
+              <a:t> o Material</a:t>
+            </a:r>
+            <a:endParaRPr lang="en-US" sz="2800" dirty="0">
+              <a:solidFill>
+                <a:schemeClr val="bg1"/>
+              </a:solidFill>
+            </a:endParaRPr>
+          </a:p>
+        </p:txBody>
+      </p:sp>
+      <p:sp>
+        <p:nvSpPr>
+          <p:cNvPr id="20" name="Text 0">
+            <a:extLst>
+              <a:ext uri="{FF2B5EF4-FFF2-40B4-BE49-F238E27FC236}">
+                <a16:creationId xmlns:a16="http://schemas.microsoft.com/office/drawing/2014/main" id="{59521343-ACE8-B128-37BF-CE55DFAB7E1A}"/>
+              </a:ext>
+            </a:extLst>
+          </p:cNvPr>
+          <p:cNvSpPr/>
+          <p:nvPr/>
+        </p:nvSpPr>
+        <p:spPr>
+          <a:xfrm>
+            <a:off x="812800" y="1119852"/>
+            <a:ext cx="10883392" cy="256480"/>
+          </a:xfrm>
+          <a:prstGeom prst="rect">
+            <a:avLst/>
+          </a:prstGeom>
+          <a:noFill/>
+          <a:ln/>
+        </p:spPr>
+        <p:txBody>
+          <a:bodyPr wrap="square" lIns="0" tIns="0" rIns="0" bIns="0" rtlCol="0" anchor="t">
+            <a:normAutofit/>
+          </a:bodyPr>
+          <a:lstStyle/>
+          <a:p>
+            <a:pPr marL="0" indent="0" algn="l">
+              <a:lnSpc>
+                <a:spcPts val="1820"/>
+              </a:lnSpc>
+              <a:buNone/>
+            </a:pPr>
+            <a:r>
+              <a:rPr lang="en-US" sz="1300" kern="0" spc="150" dirty="0">
+                <a:solidFill>
+                  <a:schemeClr val="accent6">
+                    <a:lumMod val="50000"/>
+                  </a:schemeClr>
+                </a:solidFill>
+                <a:latin typeface="JetBrains Mono" pitchFamily="49" charset="0"/>
+                <a:cs typeface="JetBrains Mono" pitchFamily="49" charset="-120"/>
+              </a:rPr>
+              <a:t>RESOLUÇÃO EM PYTHON</a:t>
+            </a:r>
+            <a:endParaRPr lang="en-US" sz="1300" dirty="0">
+              <a:solidFill>
+                <a:schemeClr val="accent6">
+                  <a:lumMod val="50000"/>
+                </a:schemeClr>
+              </a:solidFill>
+            </a:endParaRPr>
+          </a:p>
+        </p:txBody>
+      </p:sp>
+      <p:pic>
+        <p:nvPicPr>
+          <p:cNvPr id="22" name="Imagem 21">
+            <a:extLst>
+              <a:ext uri="{FF2B5EF4-FFF2-40B4-BE49-F238E27FC236}">
+                <a16:creationId xmlns:a16="http://schemas.microsoft.com/office/drawing/2014/main" id="{79F9EFED-01DF-A49E-9663-EDD6C79CC5E8}"/>
+              </a:ext>
+            </a:extLst>
+          </p:cNvPr>
+          <p:cNvPicPr>
+            <a:picLocks noChangeAspect="1"/>
+          </p:cNvPicPr>
+          <p:nvPr/>
+        </p:nvPicPr>
+        <p:blipFill>
+          <a:blip r:embed="rId4"/>
+          <a:stretch>
+            <a:fillRect/>
+          </a:stretch>
+        </p:blipFill>
+        <p:spPr>
+          <a:xfrm>
+            <a:off x="805181" y="1536372"/>
+            <a:ext cx="3496224" cy="3496224"/>
+          </a:xfrm>
+          <a:prstGeom prst="roundRect">
+            <a:avLst/>
+          </a:prstGeom>
+        </p:spPr>
+      </p:pic>
+    </p:spTree>
+    <p:extLst>
+      <p:ext uri="{BB962C8B-B14F-4D97-AF65-F5344CB8AC3E}">
+        <p14:creationId xmlns:p14="http://schemas.microsoft.com/office/powerpoint/2010/main" val="2556456760"/>
+      </p:ext>
+    </p:extLst>
   </p:cSld>
   <p:clrMapOvr>
     <a:masterClrMapping/>
@@ -10493,6 +10877,7 @@
         <a:solidFill>
           <a:srgbClr val="F4F1EA"/>
         </a:solidFill>
+        <a:effectLst/>
       </p:bgPr>
     </p:bg>
     <p:spTree>
@@ -10511,15 +10896,15 @@
       </p:grpSpPr>
       <p:pic>
         <p:nvPicPr>
-          <p:cNvPr id="2" name="Image 0" descr="Imagem1.png">    </p:cNvPr>
+          <p:cNvPr id="2" name="Image 0" descr="Imagem1.png"/>
           <p:cNvPicPr>
             <a:picLocks noChangeAspect="1"/>
           </p:cNvPicPr>
           <p:nvPr/>
         </p:nvPicPr>
         <p:blipFill>
-          <a:blip r:embed="rId1"/>
-          <a:srcRect l="0" r="0" t="21" b="21"/>
+          <a:blip r:embed="rId3"/>
+          <a:srcRect t="21" b="21"/>
           <a:stretch/>
         </p:blipFill>
         <p:spPr>
@@ -10535,7 +10920,9 @@
       <p:sp>
         <p:nvSpPr>
           <p:cNvPr id="3" name="Text 0"/>
-          <p:cNvSpPr/>
+          <p:cNvSpPr>
+            <a:spLocks noGrp="1"/>
+          </p:cNvSpPr>
           <p:nvPr>
             <p:ph type="title"/>
           </p:nvPr>
@@ -10557,7 +10944,7 @@
           </a:bodyPr>
           <a:lstStyle/>
           <a:p>
-            <a:pPr algn="ctr" indent="0" marL="0">
+            <a:pPr marL="0" indent="0" algn="ctr">
               <a:lnSpc>
                 <a:spcPts val="3080"/>
               </a:lnSpc>
@@ -10601,14 +10988,14 @@
           </a:bodyPr>
           <a:lstStyle/>
           <a:p>
-            <a:pPr algn="ctr" indent="0" marL="0">
+            <a:pPr marL="0" indent="0" algn="ctr">
               <a:lnSpc>
                 <a:spcPts val="1820"/>
               </a:lnSpc>
               <a:buNone/>
             </a:pPr>
             <a:r>
-              <a:rPr lang="en-US" sz="1300" spc="100" kern="0" dirty="0">
+              <a:rPr lang="en-US" sz="1300" kern="0" spc="100" dirty="0">
                 <a:solidFill>
                   <a:srgbClr val="A65A00"/>
                 </a:solidFill>
@@ -10645,14 +11032,14 @@
           </a:bodyPr>
           <a:lstStyle/>
           <a:p>
-            <a:pPr algn="l" indent="0" marL="0">
+            <a:pPr marL="0" indent="0" algn="l">
               <a:lnSpc>
                 <a:spcPts val="1680"/>
               </a:lnSpc>
               <a:buNone/>
             </a:pPr>
             <a:r>
-              <a:rPr lang="en-US" sz="1200" spc="150" kern="0" dirty="0">
+              <a:rPr lang="en-US" sz="1200" kern="0" spc="150" dirty="0">
                 <a:solidFill>
                   <a:srgbClr val="4A5060"/>
                 </a:solidFill>
@@ -10693,7 +11080,7 @@
           </a:bodyPr>
           <a:lstStyle/>
           <a:p>
-            <a:pPr algn="ctr" indent="0" marL="0">
+            <a:pPr marL="0" indent="0" algn="ctr">
               <a:lnSpc>
                 <a:spcPts val="1680"/>
               </a:lnSpc>
@@ -10737,7 +11124,7 @@
           </a:bodyPr>
           <a:lstStyle/>
           <a:p>
-            <a:pPr algn="l" indent="0" marL="0">
+            <a:pPr marL="0" indent="0" algn="l">
               <a:lnSpc>
                 <a:spcPts val="1680"/>
               </a:lnSpc>
@@ -10785,7 +11172,7 @@
           </a:bodyPr>
           <a:lstStyle/>
           <a:p>
-            <a:pPr algn="ctr" indent="0" marL="0">
+            <a:pPr marL="0" indent="0" algn="ctr">
               <a:lnSpc>
                 <a:spcPts val="1680"/>
               </a:lnSpc>
@@ -10829,7 +11216,7 @@
           </a:bodyPr>
           <a:lstStyle/>
           <a:p>
-            <a:pPr algn="l" indent="0" marL="0">
+            <a:pPr marL="0" indent="0" algn="l">
               <a:lnSpc>
                 <a:spcPts val="1680"/>
               </a:lnSpc>
@@ -10877,7 +11264,7 @@
           </a:bodyPr>
           <a:lstStyle/>
           <a:p>
-            <a:pPr algn="ctr" indent="0" marL="0">
+            <a:pPr marL="0" indent="0" algn="ctr">
               <a:lnSpc>
                 <a:spcPts val="1680"/>
               </a:lnSpc>
@@ -10921,7 +11308,7 @@
           </a:bodyPr>
           <a:lstStyle/>
           <a:p>
-            <a:pPr algn="l" indent="0" marL="0">
+            <a:pPr marL="0" indent="0" algn="l">
               <a:lnSpc>
                 <a:spcPts val="1680"/>
               </a:lnSpc>
@@ -10969,7 +11356,7 @@
           </a:bodyPr>
           <a:lstStyle/>
           <a:p>
-            <a:pPr algn="ctr" indent="0" marL="0">
+            <a:pPr marL="0" indent="0" algn="ctr">
               <a:lnSpc>
                 <a:spcPts val="1680"/>
               </a:lnSpc>
@@ -11013,7 +11400,7 @@
           </a:bodyPr>
           <a:lstStyle/>
           <a:p>
-            <a:pPr algn="l" indent="0" marL="0">
+            <a:pPr marL="0" indent="0" algn="l">
               <a:lnSpc>
                 <a:spcPts val="1680"/>
               </a:lnSpc>
@@ -11061,7 +11448,7 @@
           </a:bodyPr>
           <a:lstStyle/>
           <a:p>
-            <a:pPr algn="ctr" indent="0" marL="0">
+            <a:pPr marL="0" indent="0" algn="ctr">
               <a:lnSpc>
                 <a:spcPts val="1680"/>
               </a:lnSpc>
@@ -11105,7 +11492,7 @@
           </a:bodyPr>
           <a:lstStyle/>
           <a:p>
-            <a:pPr algn="l" indent="0" marL="0">
+            <a:pPr marL="0" indent="0" algn="l">
               <a:lnSpc>
                 <a:spcPts val="1680"/>
               </a:lnSpc>
@@ -11153,7 +11540,7 @@
           </a:bodyPr>
           <a:lstStyle/>
           <a:p>
-            <a:pPr algn="ctr" indent="0" marL="0">
+            <a:pPr marL="0" indent="0" algn="ctr">
               <a:lnSpc>
                 <a:spcPts val="1680"/>
               </a:lnSpc>
@@ -11201,7 +11588,7 @@
           </a:bodyPr>
           <a:lstStyle/>
           <a:p>
-            <a:pPr algn="l" indent="0" marL="0">
+            <a:pPr marL="0" indent="0" algn="l">
               <a:lnSpc>
                 <a:spcPts val="2080"/>
               </a:lnSpc>
@@ -11247,19 +11634,19 @@
                 <a:lnTo>
                   <a:pt x="101600" y="619720"/>
                 </a:lnTo>
-                <a:arcTo hR="101600" wR="101600" stAng="5400000" swAng="5400000"/>
+                <a:arcTo wR="101600" hR="101600" stAng="5400000" swAng="5400000"/>
                 <a:lnTo>
                   <a:pt x="0" y="101600"/>
                 </a:lnTo>
-                <a:arcTo hR="101600" wR="101600" stAng="10800000" swAng="5400000"/>
+                <a:arcTo wR="101600" hR="101600" stAng="10800000" swAng="5400000"/>
                 <a:lnTo>
                   <a:pt x="101600" y="0"/>
                 </a:lnTo>
-                <a:arcTo hR="101600" wR="63500" stAng="16200000" swAng="-5400000"/>
+                <a:arcTo wR="63500" hR="101600" stAng="16200000" swAng="-5400000"/>
                 <a:lnTo>
                   <a:pt x="38100" y="518120"/>
                 </a:lnTo>
-                <a:arcTo hR="101600" wR="63500" stAng="10800000" swAng="-5400000"/>
+                <a:arcTo wR="63500" hR="101600" stAng="10800000" swAng="-5400000"/>
                 <a:close/>
               </a:path>
             </a:pathLst>
@@ -11269,6 +11656,13 @@
           </a:solidFill>
           <a:ln/>
         </p:spPr>
+        <p:txBody>
+          <a:bodyPr/>
+          <a:lstStyle/>
+          <a:p>
+            <a:endParaRPr lang="pt-BR"/>
+          </a:p>
+        </p:txBody>
       </p:sp>
       <p:sp>
         <p:nvSpPr>
@@ -11297,7 +11691,7 @@
           </a:bodyPr>
           <a:lstStyle/>
           <a:p>
-            <a:pPr algn="l" indent="0" marL="0">
+            <a:pPr marL="0" indent="0" algn="l">
               <a:lnSpc>
                 <a:spcPts val="2080"/>
               </a:lnSpc>
@@ -11343,19 +11737,19 @@
                 <a:lnTo>
                   <a:pt x="101600" y="619720"/>
                 </a:lnTo>
-                <a:arcTo hR="101600" wR="101600" stAng="5400000" swAng="5400000"/>
+                <a:arcTo wR="101600" hR="101600" stAng="5400000" swAng="5400000"/>
                 <a:lnTo>
                   <a:pt x="0" y="101600"/>
                 </a:lnTo>
-                <a:arcTo hR="101600" wR="101600" stAng="10800000" swAng="5400000"/>
+                <a:arcTo wR="101600" hR="101600" stAng="10800000" swAng="5400000"/>
                 <a:lnTo>
                   <a:pt x="101600" y="0"/>
                 </a:lnTo>
-                <a:arcTo hR="101600" wR="63500" stAng="16200000" swAng="-5400000"/>
+                <a:arcTo wR="63500" hR="101600" stAng="16200000" swAng="-5400000"/>
                 <a:lnTo>
                   <a:pt x="38100" y="518120"/>
                 </a:lnTo>
-                <a:arcTo hR="101600" wR="63500" stAng="10800000" swAng="-5400000"/>
+                <a:arcTo wR="63500" hR="101600" stAng="10800000" swAng="-5400000"/>
                 <a:close/>
               </a:path>
             </a:pathLst>
@@ -11365,6 +11759,13 @@
           </a:solidFill>
           <a:ln/>
         </p:spPr>
+        <p:txBody>
+          <a:bodyPr/>
+          <a:lstStyle/>
+          <a:p>
+            <a:endParaRPr lang="pt-BR"/>
+          </a:p>
+        </p:txBody>
       </p:sp>
       <p:sp>
         <p:nvSpPr>
@@ -11393,7 +11794,7 @@
           </a:bodyPr>
           <a:lstStyle/>
           <a:p>
-            <a:pPr algn="l" indent="0" marL="0">
+            <a:pPr marL="0" indent="0" algn="l">
               <a:lnSpc>
                 <a:spcPts val="2080"/>
               </a:lnSpc>
@@ -11439,19 +11840,19 @@
                 <a:lnTo>
                   <a:pt x="101600" y="619720"/>
                 </a:lnTo>
-                <a:arcTo hR="101600" wR="101600" stAng="5400000" swAng="5400000"/>
+                <a:arcTo wR="101600" hR="101600" stAng="5400000" swAng="5400000"/>
                 <a:lnTo>
                   <a:pt x="0" y="101600"/>
                 </a:lnTo>
-                <a:arcTo hR="101600" wR="101600" stAng="10800000" swAng="5400000"/>
+                <a:arcTo wR="101600" hR="101600" stAng="10800000" swAng="5400000"/>
                 <a:lnTo>
                   <a:pt x="101600" y="0"/>
                 </a:lnTo>
-                <a:arcTo hR="101600" wR="63500" stAng="16200000" swAng="-5400000"/>
+                <a:arcTo wR="63500" hR="101600" stAng="16200000" swAng="-5400000"/>
                 <a:lnTo>
                   <a:pt x="38100" y="518120"/>
                 </a:lnTo>
-                <a:arcTo hR="101600" wR="63500" stAng="10800000" swAng="-5400000"/>
+                <a:arcTo wR="63500" hR="101600" stAng="10800000" swAng="-5400000"/>
                 <a:close/>
               </a:path>
             </a:pathLst>
@@ -11461,6 +11862,13 @@
           </a:solidFill>
           <a:ln/>
         </p:spPr>
+        <p:txBody>
+          <a:bodyPr/>
+          <a:lstStyle/>
+          <a:p>
+            <a:endParaRPr lang="pt-BR"/>
+          </a:p>
+        </p:txBody>
       </p:sp>
       <p:sp>
         <p:nvSpPr>
@@ -11489,7 +11897,7 @@
           </a:bodyPr>
           <a:lstStyle/>
           <a:p>
-            <a:pPr algn="l" indent="0" marL="0">
+            <a:pPr marL="0" indent="0" algn="l">
               <a:lnSpc>
                 <a:spcPts val="2080"/>
               </a:lnSpc>
@@ -11535,19 +11943,19 @@
                 <a:lnTo>
                   <a:pt x="101600" y="619720"/>
                 </a:lnTo>
-                <a:arcTo hR="101600" wR="101600" stAng="5400000" swAng="5400000"/>
+                <a:arcTo wR="101600" hR="101600" stAng="5400000" swAng="5400000"/>
                 <a:lnTo>
                   <a:pt x="0" y="101600"/>
                 </a:lnTo>
-                <a:arcTo hR="101600" wR="101600" stAng="10800000" swAng="5400000"/>
+                <a:arcTo wR="101600" hR="101600" stAng="10800000" swAng="5400000"/>
                 <a:lnTo>
                   <a:pt x="101600" y="0"/>
                 </a:lnTo>
-                <a:arcTo hR="101600" wR="63500" stAng="16200000" swAng="-5400000"/>
+                <a:arcTo wR="63500" hR="101600" stAng="16200000" swAng="-5400000"/>
                 <a:lnTo>
                   <a:pt x="38100" y="518120"/>
                 </a:lnTo>
-                <a:arcTo hR="101600" wR="63500" stAng="10800000" swAng="-5400000"/>
+                <a:arcTo wR="63500" hR="101600" stAng="10800000" swAng="-5400000"/>
                 <a:close/>
               </a:path>
             </a:pathLst>
@@ -11557,6 +11965,13 @@
           </a:solidFill>
           <a:ln/>
         </p:spPr>
+        <p:txBody>
+          <a:bodyPr/>
+          <a:lstStyle/>
+          <a:p>
+            <a:endParaRPr lang="pt-BR"/>
+          </a:p>
+        </p:txBody>
       </p:sp>
       <p:sp>
         <p:nvSpPr>
@@ -11585,7 +12000,7 @@
           </a:bodyPr>
           <a:lstStyle/>
           <a:p>
-            <a:pPr algn="l" indent="0" marL="0">
+            <a:pPr marL="0" indent="0" algn="l">
               <a:lnSpc>
                 <a:spcPts val="2080"/>
               </a:lnSpc>
@@ -11631,19 +12046,19 @@
                 <a:lnTo>
                   <a:pt x="101600" y="619720"/>
                 </a:lnTo>
-                <a:arcTo hR="101600" wR="101600" stAng="5400000" swAng="5400000"/>
+                <a:arcTo wR="101600" hR="101600" stAng="5400000" swAng="5400000"/>
                 <a:lnTo>
                   <a:pt x="0" y="101600"/>
                 </a:lnTo>
-                <a:arcTo hR="101600" wR="101600" stAng="10800000" swAng="5400000"/>
+                <a:arcTo wR="101600" hR="101600" stAng="10800000" swAng="5400000"/>
                 <a:lnTo>
                   <a:pt x="101600" y="0"/>
                 </a:lnTo>
-                <a:arcTo hR="101600" wR="63500" stAng="16200000" swAng="-5400000"/>
+                <a:arcTo wR="63500" hR="101600" stAng="16200000" swAng="-5400000"/>
                 <a:lnTo>
                   <a:pt x="38100" y="518120"/>
                 </a:lnTo>
-                <a:arcTo hR="101600" wR="63500" stAng="10800000" swAng="-5400000"/>
+                <a:arcTo wR="63500" hR="101600" stAng="10800000" swAng="-5400000"/>
                 <a:close/>
               </a:path>
             </a:pathLst>
@@ -11653,6 +12068,13 @@
           </a:solidFill>
           <a:ln/>
         </p:spPr>
+        <p:txBody>
+          <a:bodyPr/>
+          <a:lstStyle/>
+          <a:p>
+            <a:endParaRPr lang="pt-BR"/>
+          </a:p>
+        </p:txBody>
       </p:sp>
       <p:sp>
         <p:nvSpPr>
@@ -11681,7 +12103,7 @@
           </a:bodyPr>
           <a:lstStyle/>
           <a:p>
-            <a:pPr algn="l" indent="0" marL="0">
+            <a:pPr marL="0" indent="0" algn="l">
               <a:lnSpc>
                 <a:spcPts val="2080"/>
               </a:lnSpc>
@@ -11727,19 +12149,19 @@
                 <a:lnTo>
                   <a:pt x="101600" y="619720"/>
                 </a:lnTo>
-                <a:arcTo hR="101600" wR="101600" stAng="5400000" swAng="5400000"/>
+                <a:arcTo wR="101600" hR="101600" stAng="5400000" swAng="5400000"/>
                 <a:lnTo>
                   <a:pt x="0" y="101600"/>
                 </a:lnTo>
-                <a:arcTo hR="101600" wR="101600" stAng="10800000" swAng="5400000"/>
+                <a:arcTo wR="101600" hR="101600" stAng="10800000" swAng="5400000"/>
                 <a:lnTo>
                   <a:pt x="101600" y="0"/>
                 </a:lnTo>
-                <a:arcTo hR="101600" wR="63500" stAng="16200000" swAng="-5400000"/>
+                <a:arcTo wR="63500" hR="101600" stAng="16200000" swAng="-5400000"/>
                 <a:lnTo>
                   <a:pt x="38100" y="518120"/>
                 </a:lnTo>
-                <a:arcTo hR="101600" wR="63500" stAng="10800000" swAng="-5400000"/>
+                <a:arcTo wR="63500" hR="101600" stAng="10800000" swAng="-5400000"/>
                 <a:close/>
               </a:path>
             </a:pathLst>
@@ -11749,6 +12171,13 @@
           </a:solidFill>
           <a:ln/>
         </p:spPr>
+        <p:txBody>
+          <a:bodyPr/>
+          <a:lstStyle/>
+          <a:p>
+            <a:endParaRPr lang="pt-BR"/>
+          </a:p>
+        </p:txBody>
       </p:sp>
     </p:spTree>
   </p:cSld>
@@ -11766,6 +12195,7 @@
         <a:solidFill>
           <a:srgbClr val="F4F1EA"/>
         </a:solidFill>
+        <a:effectLst/>
       </p:bgPr>
     </p:bg>
     <p:spTree>
@@ -11805,14 +12235,14 @@
           </a:bodyPr>
           <a:lstStyle/>
           <a:p>
-            <a:pPr algn="l" indent="0" marL="0">
+            <a:pPr marL="0" indent="0" algn="l">
               <a:lnSpc>
                 <a:spcPts val="1820"/>
               </a:lnSpc>
               <a:buNone/>
             </a:pPr>
             <a:r>
-              <a:rPr lang="en-US" sz="1300" spc="150" kern="0" dirty="0">
+              <a:rPr lang="en-US" sz="1300" kern="0" spc="150" dirty="0">
                 <a:solidFill>
                   <a:srgbClr val="A65A00"/>
                 </a:solidFill>
@@ -11829,7 +12259,9 @@
       <p:sp>
         <p:nvSpPr>
           <p:cNvPr id="3" name="Text 1"/>
-          <p:cNvSpPr/>
+          <p:cNvSpPr>
+            <a:spLocks noGrp="1"/>
+          </p:cNvSpPr>
           <p:nvPr>
             <p:ph type="title"/>
           </p:nvPr>
@@ -11851,7 +12283,7 @@
           </a:bodyPr>
           <a:lstStyle/>
           <a:p>
-            <a:pPr algn="l" indent="0" marL="0">
+            <a:pPr marL="0" indent="0" algn="l">
               <a:lnSpc>
                 <a:spcPts val="3960"/>
               </a:lnSpc>
@@ -11898,6 +12330,13 @@
             <a:prstDash val="solid"/>
           </a:ln>
         </p:spPr>
+        <p:txBody>
+          <a:bodyPr/>
+          <a:lstStyle/>
+          <a:p>
+            <a:endParaRPr lang="pt-BR"/>
+          </a:p>
+        </p:txBody>
       </p:sp>
       <p:sp>
         <p:nvSpPr>
@@ -11922,7 +12361,7 @@
           </a:bodyPr>
           <a:lstStyle/>
           <a:p>
-            <a:pPr algn="l" indent="0" marL="0">
+            <a:pPr marL="0" indent="0" algn="l">
               <a:lnSpc>
                 <a:spcPts val="1680"/>
               </a:lnSpc>
@@ -11966,7 +12405,7 @@
           </a:bodyPr>
           <a:lstStyle/>
           <a:p>
-            <a:pPr algn="l" indent="0" marL="0">
+            <a:pPr marL="0" indent="0" algn="l">
               <a:lnSpc>
                 <a:spcPts val="2640"/>
               </a:lnSpc>
@@ -12010,7 +12449,7 @@
           </a:bodyPr>
           <a:lstStyle/>
           <a:p>
-            <a:pPr algn="l" indent="0" marL="0">
+            <a:pPr marL="0" indent="0" algn="l">
               <a:lnSpc>
                 <a:spcPts val="2240"/>
               </a:lnSpc>
@@ -12057,6 +12496,13 @@
             <a:prstDash val="solid"/>
           </a:ln>
         </p:spPr>
+        <p:txBody>
+          <a:bodyPr/>
+          <a:lstStyle/>
+          <a:p>
+            <a:endParaRPr lang="pt-BR"/>
+          </a:p>
+        </p:txBody>
       </p:sp>
       <p:sp>
         <p:nvSpPr>
@@ -12081,7 +12527,7 @@
           </a:bodyPr>
           <a:lstStyle/>
           <a:p>
-            <a:pPr algn="l" indent="0" marL="0">
+            <a:pPr marL="0" indent="0" algn="l">
               <a:lnSpc>
                 <a:spcPts val="1680"/>
               </a:lnSpc>
@@ -12125,7 +12571,7 @@
           </a:bodyPr>
           <a:lstStyle/>
           <a:p>
-            <a:pPr algn="l" indent="0" marL="0">
+            <a:pPr marL="0" indent="0" algn="l">
               <a:lnSpc>
                 <a:spcPts val="2640"/>
               </a:lnSpc>
@@ -12169,7 +12615,7 @@
           </a:bodyPr>
           <a:lstStyle/>
           <a:p>
-            <a:pPr algn="l" indent="0" marL="0">
+            <a:pPr marL="0" indent="0" algn="l">
               <a:lnSpc>
                 <a:spcPts val="2240"/>
               </a:lnSpc>
@@ -12213,7 +12659,7 @@
           </a:bodyPr>
           <a:lstStyle/>
           <a:p>
-            <a:pPr algn="l" indent="0" marL="0">
+            <a:pPr marL="0" indent="0" algn="l">
               <a:lnSpc>
                 <a:spcPts val="3080"/>
               </a:lnSpc>
@@ -12261,6 +12707,7 @@
         <a:solidFill>
           <a:srgbClr val="12161F"/>
         </a:solidFill>
+        <a:effectLst/>
       </p:bgPr>
     </p:bg>
     <p:spTree>
@@ -12300,14 +12747,14 @@
           </a:bodyPr>
           <a:lstStyle/>
           <a:p>
-            <a:pPr algn="l" indent="0" marL="0">
+            <a:pPr marL="0" indent="0" algn="l">
               <a:lnSpc>
                 <a:spcPts val="1820"/>
               </a:lnSpc>
               <a:buNone/>
             </a:pPr>
             <a:r>
-              <a:rPr lang="en-US" sz="1300" spc="150" kern="0" dirty="0">
+              <a:rPr lang="en-US" sz="1300" kern="0" spc="150" dirty="0">
                 <a:solidFill>
                   <a:srgbClr val="F2A541"/>
                 </a:solidFill>
@@ -12324,7 +12771,9 @@
       <p:sp>
         <p:nvSpPr>
           <p:cNvPr id="3" name="Text 1"/>
-          <p:cNvSpPr/>
+          <p:cNvSpPr>
+            <a:spLocks noGrp="1"/>
+          </p:cNvSpPr>
           <p:nvPr>
             <p:ph type="title"/>
           </p:nvPr>
@@ -12346,7 +12795,7 @@
           </a:bodyPr>
           <a:lstStyle/>
           <a:p>
-            <a:pPr algn="l" indent="0" marL="0">
+            <a:pPr marL="0" indent="0" algn="l">
               <a:lnSpc>
                 <a:spcPts val="3960"/>
               </a:lnSpc>
@@ -12388,6 +12837,13 @@
           </a:solidFill>
           <a:ln/>
         </p:spPr>
+        <p:txBody>
+          <a:bodyPr/>
+          <a:lstStyle/>
+          <a:p>
+            <a:endParaRPr lang="pt-BR"/>
+          </a:p>
+        </p:txBody>
       </p:sp>
       <p:sp>
         <p:nvSpPr>
@@ -12412,7 +12868,7 @@
           </a:bodyPr>
           <a:lstStyle/>
           <a:p>
-            <a:pPr algn="l" indent="0" marL="0">
+            <a:pPr marL="0" indent="0" algn="l">
               <a:lnSpc>
                 <a:spcPts val="1680"/>
               </a:lnSpc>
@@ -12456,7 +12912,7 @@
           </a:bodyPr>
           <a:lstStyle/>
           <a:p>
-            <a:pPr algn="l" indent="0" marL="0">
+            <a:pPr marL="0" indent="0" algn="l">
               <a:lnSpc>
                 <a:spcPts val="2750"/>
               </a:lnSpc>
@@ -12522,7 +12978,7 @@
           </a:bodyPr>
           <a:lstStyle/>
           <a:p>
-            <a:pPr algn="l" indent="0" marL="0">
+            <a:pPr marL="0" indent="0" algn="l">
               <a:lnSpc>
                 <a:spcPts val="2240"/>
               </a:lnSpc>
@@ -12566,7 +13022,7 @@
           </a:bodyPr>
           <a:lstStyle/>
           <a:p>
-            <a:pPr algn="l" indent="0" marL="0">
+            <a:pPr marL="0" indent="0" algn="l">
               <a:lnSpc>
                 <a:spcPts val="1680"/>
               </a:lnSpc>
@@ -12610,8 +13066,20 @@
             <a:tbl>
               <a:tblPr/>
               <a:tblGrid>
-                <a:gridCol w="1428750"/>
-                <a:gridCol w="3333750"/>
+                <a:gridCol w="1428750">
+                  <a:extLst>
+                    <a:ext uri="{9D8B030D-6E8A-4147-A177-3AD203B41FA5}">
+                      <a16:colId xmlns:a16="http://schemas.microsoft.com/office/drawing/2014/main" val="20000"/>
+                    </a:ext>
+                  </a:extLst>
+                </a:gridCol>
+                <a:gridCol w="3333750">
+                  <a:extLst>
+                    <a:ext uri="{9D8B030D-6E8A-4147-A177-3AD203B41FA5}">
+                      <a16:colId xmlns:a16="http://schemas.microsoft.com/office/drawing/2014/main" val="20001"/>
+                    </a:ext>
+                  </a:extLst>
+                </a:gridCol>
               </a:tblGrid>
               <a:tr h="412750">
                 <a:tc>
@@ -12619,7 +13087,7 @@
                     <a:bodyPr/>
                     <a:lstStyle/>
                     <a:p>
-                      <a:pPr indent="0" marL="0">
+                      <a:pPr marL="0" indent="0">
                         <a:lnSpc>
                           <a:spcPts val="2100"/>
                         </a:lnSpc>
@@ -12643,7 +13111,7 @@
                       </a:endParaRPr>
                     </a:p>
                   </a:txBody>
-                  <a:tcPr marL="66675" marR="66675" marT="66675" marB="66675" anchor="t">
+                  <a:tcPr marL="66675" marR="66675" marT="66675" marB="66675">
                     <a:lnL w="12700" cap="flat" cmpd="sng" algn="ctr">
                       <a:solidFill>
                         <a:srgbClr val="45484E"/>
@@ -12687,7 +13155,7 @@
                     <a:bodyPr/>
                     <a:lstStyle/>
                     <a:p>
-                      <a:pPr indent="0" marL="0">
+                      <a:pPr marL="0" indent="0">
                         <a:lnSpc>
                           <a:spcPts val="2100"/>
                         </a:lnSpc>
@@ -12711,7 +13179,7 @@
                       </a:endParaRPr>
                     </a:p>
                   </a:txBody>
-                  <a:tcPr marL="66675" marR="66675" marT="66675" marB="66675" anchor="t">
+                  <a:tcPr marL="66675" marR="66675" marT="66675" marB="66675">
                     <a:lnL w="12700" cap="flat" cmpd="sng" algn="ctr">
                       <a:solidFill>
                         <a:srgbClr val="45484E"/>
@@ -12750,6 +13218,11 @@
                     </a:lnB>
                   </a:tcPr>
                 </a:tc>
+                <a:extLst>
+                  <a:ext uri="{0D108BD9-81ED-4DB2-BD59-A6C34878D82A}">
+                    <a16:rowId xmlns:a16="http://schemas.microsoft.com/office/drawing/2014/main" val="10000"/>
+                  </a:ext>
+                </a:extLst>
               </a:tr>
               <a:tr h="412750">
                 <a:tc>
@@ -12757,7 +13230,7 @@
                     <a:bodyPr/>
                     <a:lstStyle/>
                     <a:p>
-                      <a:pPr indent="0" marL="0">
+                      <a:pPr marL="0" indent="0">
                         <a:lnSpc>
                           <a:spcPts val="2100"/>
                         </a:lnSpc>
@@ -12781,7 +13254,7 @@
                       </a:endParaRPr>
                     </a:p>
                   </a:txBody>
-                  <a:tcPr marL="66675" marR="66675" marT="66675" marB="66675" anchor="t">
+                  <a:tcPr marL="66675" marR="66675" marT="66675" marB="66675">
                     <a:lnL w="12700" cap="flat" cmpd="sng" algn="ctr">
                       <a:solidFill>
                         <a:srgbClr val="45484E"/>
@@ -12825,7 +13298,7 @@
                     <a:bodyPr/>
                     <a:lstStyle/>
                     <a:p>
-                      <a:pPr indent="0" marL="0">
+                      <a:pPr marL="0" indent="0">
                         <a:lnSpc>
                           <a:spcPts val="2100"/>
                         </a:lnSpc>
@@ -12849,7 +13322,7 @@
                       </a:endParaRPr>
                     </a:p>
                   </a:txBody>
-                  <a:tcPr marL="66675" marR="66675" marT="66675" marB="66675" anchor="t">
+                  <a:tcPr marL="66675" marR="66675" marT="66675" marB="66675">
                     <a:lnL w="12700" cap="flat" cmpd="sng" algn="ctr">
                       <a:solidFill>
                         <a:srgbClr val="45484E"/>
@@ -12888,6 +13361,11 @@
                     </a:lnB>
                   </a:tcPr>
                 </a:tc>
+                <a:extLst>
+                  <a:ext uri="{0D108BD9-81ED-4DB2-BD59-A6C34878D82A}">
+                    <a16:rowId xmlns:a16="http://schemas.microsoft.com/office/drawing/2014/main" val="10001"/>
+                  </a:ext>
+                </a:extLst>
               </a:tr>
               <a:tr h="412750">
                 <a:tc>
@@ -12895,7 +13373,7 @@
                     <a:bodyPr/>
                     <a:lstStyle/>
                     <a:p>
-                      <a:pPr indent="0" marL="0">
+                      <a:pPr marL="0" indent="0">
                         <a:lnSpc>
                           <a:spcPts val="2100"/>
                         </a:lnSpc>
@@ -12919,7 +13397,7 @@
                       </a:endParaRPr>
                     </a:p>
                   </a:txBody>
-                  <a:tcPr marL="66675" marR="66675" marT="66675" marB="66675" anchor="t">
+                  <a:tcPr marL="66675" marR="66675" marT="66675" marB="66675">
                     <a:lnL w="12700" cap="flat" cmpd="sng" algn="ctr">
                       <a:solidFill>
                         <a:srgbClr val="45484E"/>
@@ -12963,7 +13441,7 @@
                     <a:bodyPr/>
                     <a:lstStyle/>
                     <a:p>
-                      <a:pPr indent="0" marL="0">
+                      <a:pPr marL="0" indent="0">
                         <a:lnSpc>
                           <a:spcPts val="2100"/>
                         </a:lnSpc>
@@ -12987,7 +13465,7 @@
                       </a:endParaRPr>
                     </a:p>
                   </a:txBody>
-                  <a:tcPr marL="66675" marR="66675" marT="66675" marB="66675" anchor="t">
+                  <a:tcPr marL="66675" marR="66675" marT="66675" marB="66675">
                     <a:lnL w="12700" cap="flat" cmpd="sng" algn="ctr">
                       <a:solidFill>
                         <a:srgbClr val="45484E"/>
@@ -13026,6 +13504,11 @@
                     </a:lnB>
                   </a:tcPr>
                 </a:tc>
+                <a:extLst>
+                  <a:ext uri="{0D108BD9-81ED-4DB2-BD59-A6C34878D82A}">
+                    <a16:rowId xmlns:a16="http://schemas.microsoft.com/office/drawing/2014/main" val="10002"/>
+                  </a:ext>
+                </a:extLst>
               </a:tr>
               <a:tr h="412750">
                 <a:tc>
@@ -13033,7 +13516,7 @@
                     <a:bodyPr/>
                     <a:lstStyle/>
                     <a:p>
-                      <a:pPr indent="0" marL="0">
+                      <a:pPr marL="0" indent="0">
                         <a:lnSpc>
                           <a:spcPts val="2100"/>
                         </a:lnSpc>
@@ -13057,7 +13540,7 @@
                       </a:endParaRPr>
                     </a:p>
                   </a:txBody>
-                  <a:tcPr marL="66675" marR="66675" marT="66675" marB="66675" anchor="t">
+                  <a:tcPr marL="66675" marR="66675" marT="66675" marB="66675">
                     <a:lnL w="12700" cap="flat" cmpd="sng" algn="ctr">
                       <a:solidFill>
                         <a:srgbClr val="45484E"/>
@@ -13101,7 +13584,7 @@
                     <a:bodyPr/>
                     <a:lstStyle/>
                     <a:p>
-                      <a:pPr indent="0" marL="0">
+                      <a:pPr marL="0" indent="0">
                         <a:lnSpc>
                           <a:spcPts val="2100"/>
                         </a:lnSpc>
@@ -13125,7 +13608,7 @@
                       </a:endParaRPr>
                     </a:p>
                   </a:txBody>
-                  <a:tcPr marL="66675" marR="66675" marT="66675" marB="66675" anchor="t">
+                  <a:tcPr marL="66675" marR="66675" marT="66675" marB="66675">
                     <a:lnL w="12700" cap="flat" cmpd="sng" algn="ctr">
                       <a:solidFill>
                         <a:srgbClr val="45484E"/>
@@ -13164,6 +13647,11 @@
                     </a:lnB>
                   </a:tcPr>
                 </a:tc>
+                <a:extLst>
+                  <a:ext uri="{0D108BD9-81ED-4DB2-BD59-A6C34878D82A}">
+                    <a16:rowId xmlns:a16="http://schemas.microsoft.com/office/drawing/2014/main" val="10003"/>
+                  </a:ext>
+                </a:extLst>
               </a:tr>
             </a:tbl>
           </a:graphicData>
@@ -13185,6 +13673,7 @@
         <a:solidFill>
           <a:srgbClr val="F4F1EA"/>
         </a:solidFill>
+        <a:effectLst/>
       </p:bgPr>
     </p:bg>
     <p:spTree>
@@ -13224,14 +13713,14 @@
           </a:bodyPr>
           <a:lstStyle/>
           <a:p>
-            <a:pPr algn="l" indent="0" marL="0">
+            <a:pPr marL="0" indent="0" algn="l">
               <a:lnSpc>
                 <a:spcPts val="1820"/>
               </a:lnSpc>
               <a:buNone/>
             </a:pPr>
             <a:r>
-              <a:rPr lang="en-US" sz="1300" spc="150" kern="0" dirty="0">
+              <a:rPr lang="en-US" sz="1300" kern="0" spc="150" dirty="0">
                 <a:solidFill>
                   <a:srgbClr val="A65A00"/>
                 </a:solidFill>
@@ -13248,7 +13737,9 @@
       <p:sp>
         <p:nvSpPr>
           <p:cNvPr id="3" name="Text 1"/>
-          <p:cNvSpPr/>
+          <p:cNvSpPr>
+            <a:spLocks noGrp="1"/>
+          </p:cNvSpPr>
           <p:nvPr>
             <p:ph type="title"/>
           </p:nvPr>
@@ -13270,7 +13761,7 @@
           </a:bodyPr>
           <a:lstStyle/>
           <a:p>
-            <a:pPr algn="l" indent="0" marL="0">
+            <a:pPr marL="0" indent="0" algn="l">
               <a:lnSpc>
                 <a:spcPts val="3960"/>
               </a:lnSpc>
@@ -13314,7 +13805,7 @@
           </a:bodyPr>
           <a:lstStyle/>
           <a:p>
-            <a:pPr algn="l" indent="0" marL="0">
+            <a:pPr marL="0" indent="0" algn="l">
               <a:lnSpc>
                 <a:spcPts val="2100"/>
               </a:lnSpc>
@@ -13362,7 +13853,7 @@
           </a:bodyPr>
           <a:lstStyle/>
           <a:p>
-            <a:pPr algn="ctr" indent="0" marL="0">
+            <a:pPr marL="0" indent="0" algn="ctr">
               <a:lnSpc>
                 <a:spcPts val="2100"/>
               </a:lnSpc>
@@ -13406,7 +13897,7 @@
           </a:bodyPr>
           <a:lstStyle/>
           <a:p>
-            <a:pPr algn="l" indent="0" marL="0">
+            <a:pPr marL="0" indent="0" algn="l">
               <a:lnSpc>
                 <a:spcPts val="2100"/>
               </a:lnSpc>
@@ -13454,7 +13945,7 @@
           </a:bodyPr>
           <a:lstStyle/>
           <a:p>
-            <a:pPr algn="ctr" indent="0" marL="0">
+            <a:pPr marL="0" indent="0" algn="ctr">
               <a:lnSpc>
                 <a:spcPts val="2100"/>
               </a:lnSpc>
@@ -13502,7 +13993,7 @@
           </a:bodyPr>
           <a:lstStyle/>
           <a:p>
-            <a:pPr algn="ctr" indent="0" marL="0">
+            <a:pPr marL="0" indent="0" algn="ctr">
               <a:lnSpc>
                 <a:spcPts val="2100"/>
               </a:lnSpc>
@@ -13546,7 +14037,7 @@
           </a:bodyPr>
           <a:lstStyle/>
           <a:p>
-            <a:pPr algn="l" indent="0" marL="0">
+            <a:pPr marL="0" indent="0" algn="l">
               <a:lnSpc>
                 <a:spcPts val="2100"/>
               </a:lnSpc>
@@ -13594,7 +14085,7 @@
           </a:bodyPr>
           <a:lstStyle/>
           <a:p>
-            <a:pPr algn="ctr" indent="0" marL="0">
+            <a:pPr marL="0" indent="0" algn="ctr">
               <a:lnSpc>
                 <a:spcPts val="2100"/>
               </a:lnSpc>
@@ -13642,7 +14133,7 @@
           </a:bodyPr>
           <a:lstStyle/>
           <a:p>
-            <a:pPr algn="ctr" indent="0" marL="0">
+            <a:pPr marL="0" indent="0" algn="ctr">
               <a:lnSpc>
                 <a:spcPts val="2100"/>
               </a:lnSpc>
@@ -13690,7 +14181,7 @@
           </a:bodyPr>
           <a:lstStyle/>
           <a:p>
-            <a:pPr algn="ctr" indent="0" marL="0">
+            <a:pPr marL="0" indent="0" algn="ctr">
               <a:lnSpc>
                 <a:spcPts val="2100"/>
               </a:lnSpc>
@@ -13734,7 +14225,7 @@
           </a:bodyPr>
           <a:lstStyle/>
           <a:p>
-            <a:pPr algn="l" indent="0" marL="0">
+            <a:pPr marL="0" indent="0" algn="l">
               <a:lnSpc>
                 <a:spcPts val="2100"/>
               </a:lnSpc>
@@ -13782,7 +14273,7 @@
           </a:bodyPr>
           <a:lstStyle/>
           <a:p>
-            <a:pPr algn="ctr" indent="0" marL="0">
+            <a:pPr marL="0" indent="0" algn="ctr">
               <a:lnSpc>
                 <a:spcPts val="2100"/>
               </a:lnSpc>
@@ -13830,7 +14321,7 @@
           </a:bodyPr>
           <a:lstStyle/>
           <a:p>
-            <a:pPr algn="ctr" indent="0" marL="0">
+            <a:pPr marL="0" indent="0" algn="ctr">
               <a:lnSpc>
                 <a:spcPts val="2100"/>
               </a:lnSpc>
@@ -13878,7 +14369,7 @@
           </a:bodyPr>
           <a:lstStyle/>
           <a:p>
-            <a:pPr algn="ctr" indent="0" marL="0">
+            <a:pPr marL="0" indent="0" algn="ctr">
               <a:lnSpc>
                 <a:spcPts val="2100"/>
               </a:lnSpc>
@@ -13922,7 +14413,7 @@
           </a:bodyPr>
           <a:lstStyle/>
           <a:p>
-            <a:pPr algn="l" indent="0" marL="0">
+            <a:pPr marL="0" indent="0" algn="l">
               <a:lnSpc>
                 <a:spcPts val="1820"/>
               </a:lnSpc>
@@ -13966,7 +14457,7 @@
           </a:bodyPr>
           <a:lstStyle/>
           <a:p>
-            <a:pPr algn="l" indent="0" marL="0">
+            <a:pPr marL="0" indent="0" algn="l">
               <a:lnSpc>
                 <a:spcPts val="2100"/>
               </a:lnSpc>
@@ -14014,7 +14505,7 @@
           </a:bodyPr>
           <a:lstStyle/>
           <a:p>
-            <a:pPr algn="ctr" indent="0" marL="0">
+            <a:pPr marL="0" indent="0" algn="ctr">
               <a:lnSpc>
                 <a:spcPts val="2100"/>
               </a:lnSpc>
@@ -14062,7 +14553,7 @@
           </a:bodyPr>
           <a:lstStyle/>
           <a:p>
-            <a:pPr algn="ctr" indent="0" marL="0">
+            <a:pPr marL="0" indent="0" algn="ctr">
               <a:lnSpc>
                 <a:spcPts val="2100"/>
               </a:lnSpc>
@@ -14110,7 +14601,7 @@
           </a:bodyPr>
           <a:lstStyle/>
           <a:p>
-            <a:pPr algn="ctr" indent="0" marL="0">
+            <a:pPr marL="0" indent="0" algn="ctr">
               <a:lnSpc>
                 <a:spcPts val="2100"/>
               </a:lnSpc>
@@ -14161,7 +14652,7 @@
           </a:bodyPr>
           <a:lstStyle/>
           <a:p>
-            <a:pPr algn="ctr" indent="0" marL="0">
+            <a:pPr marL="0" indent="0" algn="ctr">
               <a:lnSpc>
                 <a:spcPts val="2100"/>
               </a:lnSpc>
@@ -14205,7 +14696,7 @@
           </a:bodyPr>
           <a:lstStyle/>
           <a:p>
-            <a:pPr algn="l" indent="0" marL="0">
+            <a:pPr marL="0" indent="0" algn="l">
               <a:lnSpc>
                 <a:spcPts val="1820"/>
               </a:lnSpc>
@@ -14249,7 +14740,7 @@
           </a:bodyPr>
           <a:lstStyle/>
           <a:p>
-            <a:pPr algn="l" indent="0" marL="0">
+            <a:pPr marL="0" indent="0" algn="l">
               <a:lnSpc>
                 <a:spcPts val="1960"/>
               </a:lnSpc>
@@ -14286,6 +14777,7 @@
         <a:solidFill>
           <a:srgbClr val="12161F"/>
         </a:solidFill>
+        <a:effectLst/>
       </p:bgPr>
     </p:bg>
     <p:spTree>
@@ -14325,14 +14817,14 @@
           </a:bodyPr>
           <a:lstStyle/>
           <a:p>
-            <a:pPr algn="l" indent="0" marL="0">
+            <a:pPr marL="0" indent="0" algn="l">
               <a:lnSpc>
                 <a:spcPts val="1820"/>
               </a:lnSpc>
               <a:buNone/>
             </a:pPr>
             <a:r>
-              <a:rPr lang="en-US" sz="1300" spc="150" kern="0" dirty="0">
+              <a:rPr lang="en-US" sz="1300" kern="0" spc="150" dirty="0">
                 <a:solidFill>
                   <a:srgbClr val="F2A541"/>
                 </a:solidFill>
@@ -14349,7 +14841,9 @@
       <p:sp>
         <p:nvSpPr>
           <p:cNvPr id="3" name="Text 1"/>
-          <p:cNvSpPr/>
+          <p:cNvSpPr>
+            <a:spLocks noGrp="1"/>
+          </p:cNvSpPr>
           <p:nvPr>
             <p:ph type="title"/>
           </p:nvPr>
@@ -14371,7 +14865,7 @@
           </a:bodyPr>
           <a:lstStyle/>
           <a:p>
-            <a:pPr algn="l" indent="0" marL="0">
+            <a:pPr marL="0" indent="0" algn="l">
               <a:lnSpc>
                 <a:spcPts val="3960"/>
               </a:lnSpc>
@@ -14413,6 +14907,13 @@
           </a:solidFill>
           <a:ln/>
         </p:spPr>
+        <p:txBody>
+          <a:bodyPr/>
+          <a:lstStyle/>
+          <a:p>
+            <a:endParaRPr lang="pt-BR"/>
+          </a:p>
+        </p:txBody>
       </p:sp>
       <p:sp>
         <p:nvSpPr>
@@ -14439,19 +14940,19 @@
                 <a:lnTo>
                   <a:pt x="127000" y="1186160"/>
                 </a:lnTo>
-                <a:arcTo hR="127000" wR="127000" stAng="5400000" swAng="5400000"/>
+                <a:arcTo wR="127000" hR="127000" stAng="5400000" swAng="5400000"/>
                 <a:lnTo>
                   <a:pt x="0" y="127000"/>
                 </a:lnTo>
-                <a:arcTo hR="127000" wR="127000" stAng="10800000" swAng="5400000"/>
+                <a:arcTo wR="127000" hR="127000" stAng="10800000" swAng="5400000"/>
                 <a:lnTo>
                   <a:pt x="127000" y="0"/>
                 </a:lnTo>
-                <a:arcTo hR="127000" wR="88900" stAng="16200000" swAng="-5400000"/>
+                <a:arcTo wR="88900" hR="127000" stAng="16200000" swAng="-5400000"/>
                 <a:lnTo>
                   <a:pt x="38100" y="1059160"/>
                 </a:lnTo>
-                <a:arcTo hR="127000" wR="88900" stAng="10800000" swAng="-5400000"/>
+                <a:arcTo wR="88900" hR="127000" stAng="10800000" swAng="-5400000"/>
                 <a:close/>
               </a:path>
             </a:pathLst>
@@ -14461,6 +14962,13 @@
           </a:solidFill>
           <a:ln/>
         </p:spPr>
+        <p:txBody>
+          <a:bodyPr/>
+          <a:lstStyle/>
+          <a:p>
+            <a:endParaRPr lang="pt-BR"/>
+          </a:p>
+        </p:txBody>
       </p:sp>
       <p:sp>
         <p:nvSpPr>
@@ -14485,7 +14993,7 @@
           </a:bodyPr>
           <a:lstStyle/>
           <a:p>
-            <a:pPr algn="l" indent="0" marL="0">
+            <a:pPr marL="0" indent="0" algn="l">
               <a:lnSpc>
                 <a:spcPts val="2640"/>
               </a:lnSpc>
@@ -14529,7 +15037,7 @@
           </a:bodyPr>
           <a:lstStyle/>
           <a:p>
-            <a:pPr algn="l" indent="0" marL="0">
+            <a:pPr marL="0" indent="0" algn="l">
               <a:lnSpc>
                 <a:spcPts val="2100"/>
               </a:lnSpc>
@@ -14582,6 +15090,13 @@
           </a:solidFill>
           <a:ln/>
         </p:spPr>
+        <p:txBody>
+          <a:bodyPr/>
+          <a:lstStyle/>
+          <a:p>
+            <a:endParaRPr lang="pt-BR"/>
+          </a:p>
+        </p:txBody>
       </p:sp>
       <p:sp>
         <p:nvSpPr>
@@ -14608,19 +15123,19 @@
                 <a:lnTo>
                   <a:pt x="127000" y="1186160"/>
                 </a:lnTo>
-                <a:arcTo hR="127000" wR="127000" stAng="5400000" swAng="5400000"/>
+                <a:arcTo wR="127000" hR="127000" stAng="5400000" swAng="5400000"/>
                 <a:lnTo>
                   <a:pt x="0" y="127000"/>
                 </a:lnTo>
-                <a:arcTo hR="127000" wR="127000" stAng="10800000" swAng="5400000"/>
+                <a:arcTo wR="127000" hR="127000" stAng="10800000" swAng="5400000"/>
                 <a:lnTo>
                   <a:pt x="127000" y="0"/>
                 </a:lnTo>
-                <a:arcTo hR="127000" wR="88900" stAng="16200000" swAng="-5400000"/>
+                <a:arcTo wR="88900" hR="127000" stAng="16200000" swAng="-5400000"/>
                 <a:lnTo>
                   <a:pt x="38100" y="1059160"/>
                 </a:lnTo>
-                <a:arcTo hR="127000" wR="88900" stAng="10800000" swAng="-5400000"/>
+                <a:arcTo wR="88900" hR="127000" stAng="10800000" swAng="-5400000"/>
                 <a:close/>
               </a:path>
             </a:pathLst>
@@ -14630,6 +15145,13 @@
           </a:solidFill>
           <a:ln/>
         </p:spPr>
+        <p:txBody>
+          <a:bodyPr/>
+          <a:lstStyle/>
+          <a:p>
+            <a:endParaRPr lang="pt-BR"/>
+          </a:p>
+        </p:txBody>
       </p:sp>
       <p:sp>
         <p:nvSpPr>
@@ -14654,7 +15176,7 @@
           </a:bodyPr>
           <a:lstStyle/>
           <a:p>
-            <a:pPr algn="l" indent="0" marL="0">
+            <a:pPr marL="0" indent="0" algn="l">
               <a:lnSpc>
                 <a:spcPts val="2640"/>
               </a:lnSpc>
@@ -14698,7 +15220,7 @@
           </a:bodyPr>
           <a:lstStyle/>
           <a:p>
-            <a:pPr algn="l" indent="0" marL="0">
+            <a:pPr marL="0" indent="0" algn="l">
               <a:lnSpc>
                 <a:spcPts val="2100"/>
               </a:lnSpc>
@@ -14740,6 +15262,13 @@
           </a:solidFill>
           <a:ln/>
         </p:spPr>
+        <p:txBody>
+          <a:bodyPr/>
+          <a:lstStyle/>
+          <a:p>
+            <a:endParaRPr lang="pt-BR"/>
+          </a:p>
+        </p:txBody>
       </p:sp>
       <p:sp>
         <p:nvSpPr>
@@ -14766,19 +15295,19 @@
                 <a:lnTo>
                   <a:pt x="127000" y="1186160"/>
                 </a:lnTo>
-                <a:arcTo hR="127000" wR="127000" stAng="5400000" swAng="5400000"/>
+                <a:arcTo wR="127000" hR="127000" stAng="5400000" swAng="5400000"/>
                 <a:lnTo>
                   <a:pt x="0" y="127000"/>
                 </a:lnTo>
-                <a:arcTo hR="127000" wR="127000" stAng="10800000" swAng="5400000"/>
+                <a:arcTo wR="127000" hR="127000" stAng="10800000" swAng="5400000"/>
                 <a:lnTo>
                   <a:pt x="127000" y="0"/>
                 </a:lnTo>
-                <a:arcTo hR="127000" wR="88900" stAng="16200000" swAng="-5400000"/>
+                <a:arcTo wR="88900" hR="127000" stAng="16200000" swAng="-5400000"/>
                 <a:lnTo>
                   <a:pt x="38100" y="1059160"/>
                 </a:lnTo>
-                <a:arcTo hR="127000" wR="88900" stAng="10800000" swAng="-5400000"/>
+                <a:arcTo wR="88900" hR="127000" stAng="10800000" swAng="-5400000"/>
                 <a:close/>
               </a:path>
             </a:pathLst>
@@ -14788,6 +15317,13 @@
           </a:solidFill>
           <a:ln/>
         </p:spPr>
+        <p:txBody>
+          <a:bodyPr/>
+          <a:lstStyle/>
+          <a:p>
+            <a:endParaRPr lang="pt-BR"/>
+          </a:p>
+        </p:txBody>
       </p:sp>
       <p:sp>
         <p:nvSpPr>
@@ -14812,7 +15348,7 @@
           </a:bodyPr>
           <a:lstStyle/>
           <a:p>
-            <a:pPr algn="l" indent="0" marL="0">
+            <a:pPr marL="0" indent="0" algn="l">
               <a:lnSpc>
                 <a:spcPts val="2640"/>
               </a:lnSpc>
@@ -14856,7 +15392,7 @@
           </a:bodyPr>
           <a:lstStyle/>
           <a:p>
-            <a:pPr algn="l" indent="0" marL="0">
+            <a:pPr marL="0" indent="0" algn="l">
               <a:lnSpc>
                 <a:spcPts val="2100"/>
               </a:lnSpc>
@@ -14898,6 +15434,13 @@
           </a:solidFill>
           <a:ln/>
         </p:spPr>
+        <p:txBody>
+          <a:bodyPr/>
+          <a:lstStyle/>
+          <a:p>
+            <a:endParaRPr lang="pt-BR"/>
+          </a:p>
+        </p:txBody>
       </p:sp>
       <p:sp>
         <p:nvSpPr>
@@ -14924,19 +15467,19 @@
                 <a:lnTo>
                   <a:pt x="127000" y="1186160"/>
                 </a:lnTo>
-                <a:arcTo hR="127000" wR="127000" stAng="5400000" swAng="5400000"/>
+                <a:arcTo wR="127000" hR="127000" stAng="5400000" swAng="5400000"/>
                 <a:lnTo>
                   <a:pt x="0" y="127000"/>
                 </a:lnTo>
-                <a:arcTo hR="127000" wR="127000" stAng="10800000" swAng="5400000"/>
+                <a:arcTo wR="127000" hR="127000" stAng="10800000" swAng="5400000"/>
                 <a:lnTo>
                   <a:pt x="127000" y="0"/>
                 </a:lnTo>
-                <a:arcTo hR="127000" wR="88900" stAng="16200000" swAng="-5400000"/>
+                <a:arcTo wR="88900" hR="127000" stAng="16200000" swAng="-5400000"/>
                 <a:lnTo>
                   <a:pt x="38100" y="1059160"/>
                 </a:lnTo>
-                <a:arcTo hR="127000" wR="88900" stAng="10800000" swAng="-5400000"/>
+                <a:arcTo wR="88900" hR="127000" stAng="10800000" swAng="-5400000"/>
                 <a:close/>
               </a:path>
             </a:pathLst>
@@ -14946,6 +15489,13 @@
           </a:solidFill>
           <a:ln/>
         </p:spPr>
+        <p:txBody>
+          <a:bodyPr/>
+          <a:lstStyle/>
+          <a:p>
+            <a:endParaRPr lang="pt-BR"/>
+          </a:p>
+        </p:txBody>
       </p:sp>
       <p:sp>
         <p:nvSpPr>
@@ -14970,7 +15520,7 @@
           </a:bodyPr>
           <a:lstStyle/>
           <a:p>
-            <a:pPr algn="l" indent="0" marL="0">
+            <a:pPr marL="0" indent="0" algn="l">
               <a:lnSpc>
                 <a:spcPts val="2640"/>
               </a:lnSpc>
@@ -15014,7 +15564,7 @@
           </a:bodyPr>
           <a:lstStyle/>
           <a:p>
-            <a:pPr algn="l" indent="0" marL="0">
+            <a:pPr marL="0" indent="0" algn="l">
               <a:lnSpc>
                 <a:spcPts val="2100"/>
               </a:lnSpc>
@@ -15051,6 +15601,7 @@
         <a:solidFill>
           <a:srgbClr val="F4F1EA"/>
         </a:solidFill>
+        <a:effectLst/>
       </p:bgPr>
     </p:bg>
     <p:spTree>
@@ -15090,14 +15641,14 @@
           </a:bodyPr>
           <a:lstStyle/>
           <a:p>
-            <a:pPr algn="l" indent="0" marL="0">
+            <a:pPr marL="0" indent="0" algn="l">
               <a:lnSpc>
                 <a:spcPts val="1820"/>
               </a:lnSpc>
               <a:buNone/>
             </a:pPr>
             <a:r>
-              <a:rPr lang="en-US" sz="1300" spc="150" kern="0" dirty="0">
+              <a:rPr lang="en-US" sz="1300" kern="0" spc="150" dirty="0">
                 <a:solidFill>
                   <a:srgbClr val="A65A00"/>
                 </a:solidFill>
@@ -15114,7 +15665,9 @@
       <p:sp>
         <p:nvSpPr>
           <p:cNvPr id="3" name="Text 1"/>
-          <p:cNvSpPr/>
+          <p:cNvSpPr>
+            <a:spLocks noGrp="1"/>
+          </p:cNvSpPr>
           <p:nvPr>
             <p:ph type="title"/>
           </p:nvPr>
@@ -15136,7 +15689,7 @@
           </a:bodyPr>
           <a:lstStyle/>
           <a:p>
-            <a:pPr algn="l" indent="0" marL="0">
+            <a:pPr marL="0" indent="0" algn="l">
               <a:lnSpc>
                 <a:spcPts val="3960"/>
               </a:lnSpc>
@@ -15183,18 +15736,25 @@
             <a:prstDash val="solid"/>
           </a:ln>
         </p:spPr>
+        <p:txBody>
+          <a:bodyPr/>
+          <a:lstStyle/>
+          <a:p>
+            <a:endParaRPr lang="pt-BR"/>
+          </a:p>
+        </p:txBody>
       </p:sp>
       <p:pic>
         <p:nvPicPr>
-          <p:cNvPr id="5" name="Image 0" descr="Globe">    </p:cNvPr>
+          <p:cNvPr id="5" name="Image 0" descr="Globe"/>
           <p:cNvPicPr>
             <a:picLocks noChangeAspect="1"/>
           </p:cNvPicPr>
           <p:nvPr/>
         </p:nvPicPr>
         <p:blipFill>
-          <a:blip r:embed="rId1"/>
-          <a:srcRect l="0" r="0" t="0" b="0"/>
+          <a:blip r:embed="rId3"/>
+          <a:srcRect/>
           <a:stretch/>
         </p:blipFill>
         <p:spPr>
@@ -15230,7 +15790,7 @@
           </a:bodyPr>
           <a:lstStyle/>
           <a:p>
-            <a:pPr algn="l" indent="0" marL="0">
+            <a:pPr marL="0" indent="0" algn="l">
               <a:lnSpc>
                 <a:spcPts val="2400"/>
               </a:lnSpc>
@@ -15274,7 +15834,7 @@
           </a:bodyPr>
           <a:lstStyle/>
           <a:p>
-            <a:pPr algn="l" indent="0" marL="0">
+            <a:pPr marL="0" indent="0" algn="l">
               <a:lnSpc>
                 <a:spcPts val="2100"/>
               </a:lnSpc>
@@ -15321,18 +15881,25 @@
             <a:prstDash val="solid"/>
           </a:ln>
         </p:spPr>
+        <p:txBody>
+          <a:bodyPr/>
+          <a:lstStyle/>
+          <a:p>
+            <a:endParaRPr lang="pt-BR"/>
+          </a:p>
+        </p:txBody>
       </p:sp>
       <p:pic>
         <p:nvPicPr>
-          <p:cNvPr id="9" name="Image 1" descr="Clock">    </p:cNvPr>
+          <p:cNvPr id="9" name="Image 1" descr="Clock"/>
           <p:cNvPicPr>
             <a:picLocks noChangeAspect="1"/>
           </p:cNvPicPr>
           <p:nvPr/>
         </p:nvPicPr>
         <p:blipFill>
-          <a:blip r:embed="rId2"/>
-          <a:srcRect l="0" r="0" t="0" b="0"/>
+          <a:blip r:embed="rId4"/>
+          <a:srcRect/>
           <a:stretch/>
         </p:blipFill>
         <p:spPr>
@@ -15368,7 +15935,7 @@
           </a:bodyPr>
           <a:lstStyle/>
           <a:p>
-            <a:pPr algn="l" indent="0" marL="0">
+            <a:pPr marL="0" indent="0" algn="l">
               <a:lnSpc>
                 <a:spcPts val="2400"/>
               </a:lnSpc>
@@ -15412,7 +15979,7 @@
           </a:bodyPr>
           <a:lstStyle/>
           <a:p>
-            <a:pPr algn="l" indent="0" marL="0">
+            <a:pPr marL="0" indent="0" algn="l">
               <a:lnSpc>
                 <a:spcPts val="2100"/>
               </a:lnSpc>
@@ -15459,18 +16026,25 @@
             <a:prstDash val="solid"/>
           </a:ln>
         </p:spPr>
+        <p:txBody>
+          <a:bodyPr/>
+          <a:lstStyle/>
+          <a:p>
+            <a:endParaRPr lang="pt-BR"/>
+          </a:p>
+        </p:txBody>
       </p:sp>
       <p:pic>
         <p:nvPicPr>
-          <p:cNvPr id="13" name="Image 2" descr="Cloud">    </p:cNvPr>
+          <p:cNvPr id="13" name="Image 2" descr="Cloud"/>
           <p:cNvPicPr>
             <a:picLocks noChangeAspect="1"/>
           </p:cNvPicPr>
           <p:nvPr/>
         </p:nvPicPr>
         <p:blipFill>
-          <a:blip r:embed="rId3"/>
-          <a:srcRect l="0" r="0" t="0" b="0"/>
+          <a:blip r:embed="rId5"/>
+          <a:srcRect/>
           <a:stretch/>
         </p:blipFill>
         <p:spPr>
@@ -15506,7 +16080,7 @@
           </a:bodyPr>
           <a:lstStyle/>
           <a:p>
-            <a:pPr algn="l" indent="0" marL="0">
+            <a:pPr marL="0" indent="0" algn="l">
               <a:lnSpc>
                 <a:spcPts val="2400"/>
               </a:lnSpc>
@@ -15550,7 +16124,7 @@
           </a:bodyPr>
           <a:lstStyle/>
           <a:p>
-            <a:pPr algn="l" indent="0" marL="0">
+            <a:pPr marL="0" indent="0" algn="l">
               <a:lnSpc>
                 <a:spcPts val="2100"/>
               </a:lnSpc>
@@ -15587,6 +16161,7 @@
         <a:solidFill>
           <a:srgbClr val="12161F"/>
         </a:solidFill>
+        <a:effectLst/>
       </p:bgPr>
     </p:bg>
     <p:spTree>
@@ -15626,14 +16201,14 @@
           </a:bodyPr>
           <a:lstStyle/>
           <a:p>
-            <a:pPr algn="l" indent="0" marL="0">
+            <a:pPr marL="0" indent="0" algn="l">
               <a:lnSpc>
                 <a:spcPts val="1820"/>
               </a:lnSpc>
               <a:buNone/>
             </a:pPr>
             <a:r>
-              <a:rPr lang="en-US" sz="1300" spc="150" kern="0" dirty="0">
+              <a:rPr lang="en-US" sz="1300" kern="0" spc="150" dirty="0">
                 <a:solidFill>
                   <a:srgbClr val="F2A541"/>
                 </a:solidFill>
@@ -15650,7 +16225,9 @@
       <p:sp>
         <p:nvSpPr>
           <p:cNvPr id="3" name="Text 1"/>
-          <p:cNvSpPr/>
+          <p:cNvSpPr>
+            <a:spLocks noGrp="1"/>
+          </p:cNvSpPr>
           <p:nvPr>
             <p:ph type="title"/>
           </p:nvPr>
@@ -15672,7 +16249,7 @@
           </a:bodyPr>
           <a:lstStyle/>
           <a:p>
-            <a:pPr algn="l" indent="0" marL="0">
+            <a:pPr marL="0" indent="0" algn="l">
               <a:lnSpc>
                 <a:spcPts val="3960"/>
               </a:lnSpc>
@@ -15714,18 +16291,25 @@
           </a:solidFill>
           <a:ln/>
         </p:spPr>
+        <p:txBody>
+          <a:bodyPr/>
+          <a:lstStyle/>
+          <a:p>
+            <a:endParaRPr lang="pt-BR"/>
+          </a:p>
+        </p:txBody>
       </p:sp>
       <p:pic>
         <p:nvPicPr>
-          <p:cNvPr id="5" name="Image 0" descr="Database">    </p:cNvPr>
+          <p:cNvPr id="5" name="Image 0" descr="Database"/>
           <p:cNvPicPr>
             <a:picLocks noChangeAspect="1"/>
           </p:cNvPicPr>
           <p:nvPr/>
         </p:nvPicPr>
         <p:blipFill>
-          <a:blip r:embed="rId1"/>
-          <a:srcRect l="0" r="0" t="0" b="0"/>
+          <a:blip r:embed="rId3"/>
+          <a:srcRect/>
           <a:stretch/>
         </p:blipFill>
         <p:spPr>
@@ -15761,7 +16345,7 @@
           </a:bodyPr>
           <a:lstStyle/>
           <a:p>
-            <a:pPr algn="l" indent="0" marL="0">
+            <a:pPr marL="0" indent="0" algn="l">
               <a:lnSpc>
                 <a:spcPts val="1920"/>
               </a:lnSpc>
@@ -15805,7 +16389,7 @@
           </a:bodyPr>
           <a:lstStyle/>
           <a:p>
-            <a:pPr algn="l" indent="0" marL="0">
+            <a:pPr marL="0" indent="0" algn="l">
               <a:lnSpc>
                 <a:spcPts val="1820"/>
               </a:lnSpc>
@@ -15847,18 +16431,25 @@
           </a:solidFill>
           <a:ln/>
         </p:spPr>
+        <p:txBody>
+          <a:bodyPr/>
+          <a:lstStyle/>
+          <a:p>
+            <a:endParaRPr lang="pt-BR"/>
+          </a:p>
+        </p:txBody>
       </p:sp>
       <p:pic>
         <p:nvPicPr>
-          <p:cNvPr id="9" name="Image 1" descr="Globe">    </p:cNvPr>
+          <p:cNvPr id="9" name="Image 1" descr="Globe"/>
           <p:cNvPicPr>
             <a:picLocks noChangeAspect="1"/>
           </p:cNvPicPr>
           <p:nvPr/>
         </p:nvPicPr>
         <p:blipFill>
-          <a:blip r:embed="rId2"/>
-          <a:srcRect l="0" r="0" t="0" b="0"/>
+          <a:blip r:embed="rId4"/>
+          <a:srcRect/>
           <a:stretch/>
         </p:blipFill>
         <p:spPr>
@@ -15894,7 +16485,7 @@
           </a:bodyPr>
           <a:lstStyle/>
           <a:p>
-            <a:pPr algn="l" indent="0" marL="0">
+            <a:pPr marL="0" indent="0" algn="l">
               <a:lnSpc>
                 <a:spcPts val="1920"/>
               </a:lnSpc>
@@ -15938,7 +16529,7 @@
           </a:bodyPr>
           <a:lstStyle/>
           <a:p>
-            <a:pPr algn="l" indent="0" marL="0">
+            <a:pPr marL="0" indent="0" algn="l">
               <a:lnSpc>
                 <a:spcPts val="1820"/>
               </a:lnSpc>
@@ -15980,18 +16571,25 @@
           </a:solidFill>
           <a:ln/>
         </p:spPr>
+        <p:txBody>
+          <a:bodyPr/>
+          <a:lstStyle/>
+          <a:p>
+            <a:endParaRPr lang="pt-BR"/>
+          </a:p>
+        </p:txBody>
       </p:sp>
       <p:pic>
         <p:nvPicPr>
-          <p:cNvPr id="13" name="Image 2" descr="Chart">    </p:cNvPr>
+          <p:cNvPr id="13" name="Image 2" descr="Chart"/>
           <p:cNvPicPr>
             <a:picLocks noChangeAspect="1"/>
           </p:cNvPicPr>
           <p:nvPr/>
         </p:nvPicPr>
         <p:blipFill>
-          <a:blip r:embed="rId3"/>
-          <a:srcRect l="0" r="0" t="0" b="0"/>
+          <a:blip r:embed="rId5"/>
+          <a:srcRect/>
           <a:stretch/>
         </p:blipFill>
         <p:spPr>
@@ -16027,7 +16625,7 @@
           </a:bodyPr>
           <a:lstStyle/>
           <a:p>
-            <a:pPr algn="l" indent="0" marL="0">
+            <a:pPr marL="0" indent="0" algn="l">
               <a:lnSpc>
                 <a:spcPts val="1920"/>
               </a:lnSpc>
@@ -16071,7 +16669,7 @@
           </a:bodyPr>
           <a:lstStyle/>
           <a:p>
-            <a:pPr algn="l" indent="0" marL="0">
+            <a:pPr marL="0" indent="0" algn="l">
               <a:lnSpc>
                 <a:spcPts val="1820"/>
               </a:lnSpc>
@@ -16113,18 +16711,25 @@
           </a:solidFill>
           <a:ln/>
         </p:spPr>
+        <p:txBody>
+          <a:bodyPr/>
+          <a:lstStyle/>
+          <a:p>
+            <a:endParaRPr lang="pt-BR"/>
+          </a:p>
+        </p:txBody>
       </p:sp>
       <p:pic>
         <p:nvPicPr>
-          <p:cNvPr id="17" name="Image 3" descr="Cloud">    </p:cNvPr>
+          <p:cNvPr id="17" name="Image 3" descr="Cloud"/>
           <p:cNvPicPr>
             <a:picLocks noChangeAspect="1"/>
           </p:cNvPicPr>
           <p:nvPr/>
         </p:nvPicPr>
         <p:blipFill>
-          <a:blip r:embed="rId4"/>
-          <a:srcRect l="0" r="0" t="0" b="0"/>
+          <a:blip r:embed="rId6"/>
+          <a:srcRect/>
           <a:stretch/>
         </p:blipFill>
         <p:spPr>
@@ -16160,7 +16765,7 @@
           </a:bodyPr>
           <a:lstStyle/>
           <a:p>
-            <a:pPr algn="l" indent="0" marL="0">
+            <a:pPr marL="0" indent="0" algn="l">
               <a:lnSpc>
                 <a:spcPts val="1920"/>
               </a:lnSpc>
@@ -16204,7 +16809,7 @@
           </a:bodyPr>
           <a:lstStyle/>
           <a:p>
-            <a:pPr algn="l" indent="0" marL="0">
+            <a:pPr marL="0" indent="0" algn="l">
               <a:lnSpc>
                 <a:spcPts val="1820"/>
               </a:lnSpc>
@@ -16248,7 +16853,7 @@
           </a:bodyPr>
           <a:lstStyle/>
           <a:p>
-            <a:pPr algn="l" indent="0" marL="0">
+            <a:pPr marL="0" indent="0" algn="l">
               <a:lnSpc>
                 <a:spcPts val="2520"/>
               </a:lnSpc>
@@ -16291,6 +16896,13 @@
             <a:prstDash val="solid"/>
           </a:ln>
         </p:spPr>
+        <p:txBody>
+          <a:bodyPr/>
+          <a:lstStyle/>
+          <a:p>
+            <a:endParaRPr lang="pt-BR"/>
+          </a:p>
+        </p:txBody>
       </p:sp>
       <p:sp>
         <p:nvSpPr>
@@ -16315,7 +16927,7 @@
           </a:bodyPr>
           <a:lstStyle/>
           <a:p>
-            <a:pPr algn="l" indent="0" marL="0">
+            <a:pPr marL="0" indent="0" algn="l">
               <a:lnSpc>
                 <a:spcPts val="1960"/>
               </a:lnSpc>
@@ -16369,6 +16981,13 @@
             <a:prstDash val="solid"/>
           </a:ln>
         </p:spPr>
+        <p:txBody>
+          <a:bodyPr/>
+          <a:lstStyle/>
+          <a:p>
+            <a:endParaRPr lang="pt-BR"/>
+          </a:p>
+        </p:txBody>
       </p:sp>
       <p:sp>
         <p:nvSpPr>
@@ -16393,7 +17012,7 @@
           </a:bodyPr>
           <a:lstStyle/>
           <a:p>
-            <a:pPr algn="l" indent="0" marL="0">
+            <a:pPr marL="0" indent="0" algn="l">
               <a:lnSpc>
                 <a:spcPts val="1960"/>
               </a:lnSpc>
@@ -16447,6 +17066,13 @@
             <a:prstDash val="solid"/>
           </a:ln>
         </p:spPr>
+        <p:txBody>
+          <a:bodyPr/>
+          <a:lstStyle/>
+          <a:p>
+            <a:endParaRPr lang="pt-BR"/>
+          </a:p>
+        </p:txBody>
       </p:sp>
       <p:sp>
         <p:nvSpPr>
@@ -16471,7 +17097,7 @@
           </a:bodyPr>
           <a:lstStyle/>
           <a:p>
-            <a:pPr algn="l" indent="0" marL="0">
+            <a:pPr marL="0" indent="0" algn="l">
               <a:lnSpc>
                 <a:spcPts val="1960"/>
               </a:lnSpc>
@@ -16519,6 +17145,7 @@
         <a:solidFill>
           <a:srgbClr val="F4F1EA"/>
         </a:solidFill>
+        <a:effectLst/>
       </p:bgPr>
     </p:bg>
     <p:spTree>
@@ -16558,14 +17185,14 @@
           </a:bodyPr>
           <a:lstStyle/>
           <a:p>
-            <a:pPr algn="l" indent="0" marL="0">
+            <a:pPr marL="0" indent="0" algn="l">
               <a:lnSpc>
                 <a:spcPts val="1774"/>
               </a:lnSpc>
               <a:buNone/>
             </a:pPr>
             <a:r>
-              <a:rPr lang="en-US" sz="1268" spc="150" kern="0" dirty="0">
+              <a:rPr lang="en-US" sz="1268" kern="0" spc="150" dirty="0">
                 <a:solidFill>
                   <a:srgbClr val="A65A00"/>
                 </a:solidFill>
@@ -16582,7 +17209,9 @@
       <p:sp>
         <p:nvSpPr>
           <p:cNvPr id="3" name="Text 1"/>
-          <p:cNvSpPr/>
+          <p:cNvSpPr>
+            <a:spLocks noGrp="1"/>
+          </p:cNvSpPr>
           <p:nvPr>
             <p:ph type="title"/>
           </p:nvPr>
@@ -16604,7 +17233,7 @@
           </a:bodyPr>
           <a:lstStyle/>
           <a:p>
-            <a:pPr algn="l" indent="0" marL="0">
+            <a:pPr marL="0" indent="0" algn="l">
               <a:lnSpc>
                 <a:spcPts val="3911"/>
               </a:lnSpc>
@@ -16651,6 +17280,13 @@
             <a:prstDash val="solid"/>
           </a:ln>
         </p:spPr>
+        <p:txBody>
+          <a:bodyPr/>
+          <a:lstStyle/>
+          <a:p>
+            <a:endParaRPr lang="pt-BR"/>
+          </a:p>
+        </p:txBody>
       </p:sp>
       <p:sp>
         <p:nvSpPr>
@@ -16675,7 +17311,7 @@
           </a:bodyPr>
           <a:lstStyle/>
           <a:p>
-            <a:pPr algn="l" indent="0" marL="0">
+            <a:pPr marL="0" indent="0" algn="l">
               <a:lnSpc>
                 <a:spcPts val="4613"/>
               </a:lnSpc>
@@ -16719,7 +17355,7 @@
           </a:bodyPr>
           <a:lstStyle/>
           <a:p>
-            <a:pPr algn="l" indent="0" marL="0">
+            <a:pPr marL="0" indent="0" algn="l">
               <a:lnSpc>
                 <a:spcPts val="1622"/>
               </a:lnSpc>
@@ -16763,7 +17399,7 @@
           </a:bodyPr>
           <a:lstStyle/>
           <a:p>
-            <a:pPr algn="l" indent="0" marL="0">
+            <a:pPr marL="0" indent="0" algn="l">
               <a:lnSpc>
                 <a:spcPts val="2008"/>
               </a:lnSpc>
@@ -16786,15 +17422,15 @@
       </p:sp>
       <p:pic>
         <p:nvPicPr>
-          <p:cNvPr id="8" name="Image 0" descr="line">    </p:cNvPr>
+          <p:cNvPr id="8" name="Image 0" descr="line"/>
           <p:cNvPicPr>
             <a:picLocks noChangeAspect="1"/>
           </p:cNvPicPr>
           <p:nvPr/>
         </p:nvPicPr>
         <p:blipFill>
-          <a:blip r:embed="rId1"/>
-          <a:srcRect l="0" r="0" t="-39" b="-39"/>
+          <a:blip r:embed="rId3"/>
+          <a:srcRect t="-39" b="-39"/>
           <a:stretch/>
         </p:blipFill>
         <p:spPr>
@@ -16830,7 +17466,7 @@
           </a:bodyPr>
           <a:lstStyle/>
           <a:p>
-            <a:pPr algn="l" indent="0" marL="0">
+            <a:pPr marL="0" indent="0" algn="l">
               <a:lnSpc>
                 <a:spcPts val="1622"/>
               </a:lnSpc>
@@ -16874,7 +17510,7 @@
           </a:bodyPr>
           <a:lstStyle/>
           <a:p>
-            <a:pPr algn="l" indent="0" marL="0">
+            <a:pPr marL="0" indent="0" algn="l">
               <a:lnSpc>
                 <a:spcPts val="2418"/>
               </a:lnSpc>
@@ -16921,6 +17557,13 @@
             <a:prstDash val="solid"/>
           </a:ln>
         </p:spPr>
+        <p:txBody>
+          <a:bodyPr/>
+          <a:lstStyle/>
+          <a:p>
+            <a:endParaRPr lang="pt-BR"/>
+          </a:p>
+        </p:txBody>
       </p:sp>
       <p:sp>
         <p:nvSpPr>
@@ -16945,7 +17588,7 @@
           </a:bodyPr>
           <a:lstStyle/>
           <a:p>
-            <a:pPr algn="l" indent="0" marL="0">
+            <a:pPr marL="0" indent="0" algn="l">
               <a:lnSpc>
                 <a:spcPts val="4674"/>
               </a:lnSpc>
@@ -16989,7 +17632,7 @@
           </a:bodyPr>
           <a:lstStyle/>
           <a:p>
-            <a:pPr algn="l" indent="0" marL="0">
+            <a:pPr marL="0" indent="0" algn="l">
               <a:lnSpc>
                 <a:spcPts val="1622"/>
               </a:lnSpc>
@@ -17033,7 +17676,7 @@
           </a:bodyPr>
           <a:lstStyle/>
           <a:p>
-            <a:pPr algn="l" indent="0" marL="0">
+            <a:pPr marL="0" indent="0" algn="l">
               <a:lnSpc>
                 <a:spcPts val="2008"/>
               </a:lnSpc>
@@ -17056,15 +17699,15 @@
       </p:sp>
       <p:pic>
         <p:nvPicPr>
-          <p:cNvPr id="15" name="Image 1" descr="line">    </p:cNvPr>
+          <p:cNvPr id="15" name="Image 1" descr="line"/>
           <p:cNvPicPr>
             <a:picLocks noChangeAspect="1"/>
           </p:cNvPicPr>
           <p:nvPr/>
         </p:nvPicPr>
         <p:blipFill>
-          <a:blip r:embed="rId2"/>
-          <a:srcRect l="0" r="0" t="-35" b="-35"/>
+          <a:blip r:embed="rId3"/>
+          <a:srcRect t="-35" b="-35"/>
           <a:stretch/>
         </p:blipFill>
         <p:spPr>
@@ -17100,7 +17743,7 @@
           </a:bodyPr>
           <a:lstStyle/>
           <a:p>
-            <a:pPr algn="l" indent="0" marL="0">
+            <a:pPr marL="0" indent="0" algn="l">
               <a:lnSpc>
                 <a:spcPts val="1622"/>
               </a:lnSpc>
@@ -17144,7 +17787,7 @@
           </a:bodyPr>
           <a:lstStyle/>
           <a:p>
-            <a:pPr algn="l" indent="0" marL="0">
+            <a:pPr marL="0" indent="0" algn="l">
               <a:lnSpc>
                 <a:spcPts val="2418"/>
               </a:lnSpc>
@@ -17191,6 +17834,13 @@
             <a:prstDash val="solid"/>
           </a:ln>
         </p:spPr>
+        <p:txBody>
+          <a:bodyPr/>
+          <a:lstStyle/>
+          <a:p>
+            <a:endParaRPr lang="pt-BR"/>
+          </a:p>
+        </p:txBody>
       </p:sp>
       <p:sp>
         <p:nvSpPr>
@@ -17215,7 +17865,7 @@
           </a:bodyPr>
           <a:lstStyle/>
           <a:p>
-            <a:pPr algn="l" indent="0" marL="0">
+            <a:pPr marL="0" indent="0" algn="l">
               <a:lnSpc>
                 <a:spcPts val="4674"/>
               </a:lnSpc>
@@ -17259,7 +17909,7 @@
           </a:bodyPr>
           <a:lstStyle/>
           <a:p>
-            <a:pPr algn="l" indent="0" marL="0">
+            <a:pPr marL="0" indent="0" algn="l">
               <a:lnSpc>
                 <a:spcPts val="1622"/>
               </a:lnSpc>
@@ -17303,7 +17953,7 @@
           </a:bodyPr>
           <a:lstStyle/>
           <a:p>
-            <a:pPr algn="l" indent="0" marL="0">
+            <a:pPr marL="0" indent="0" algn="l">
               <a:lnSpc>
                 <a:spcPts val="2008"/>
               </a:lnSpc>
@@ -17326,7 +17976,7 @@
       </p:sp>
       <p:pic>
         <p:nvPicPr>
-          <p:cNvPr id="22" name="Image 2" descr="line">    </p:cNvPr>
+          <p:cNvPr id="22" name="Image 2" descr="line"/>
           <p:cNvPicPr>
             <a:picLocks noChangeAspect="1"/>
           </p:cNvPicPr>
@@ -17334,7 +17984,7 @@
         </p:nvPicPr>
         <p:blipFill>
           <a:blip r:embed="rId3"/>
-          <a:srcRect l="0" r="0" t="-35" b="-35"/>
+          <a:srcRect t="-35" b="-35"/>
           <a:stretch/>
         </p:blipFill>
         <p:spPr>
@@ -17370,7 +18020,7 @@
           </a:bodyPr>
           <a:lstStyle/>
           <a:p>
-            <a:pPr algn="l" indent="0" marL="0">
+            <a:pPr marL="0" indent="0" algn="l">
               <a:lnSpc>
                 <a:spcPts val="1622"/>
               </a:lnSpc>
@@ -17414,7 +18064,7 @@
           </a:bodyPr>
           <a:lstStyle/>
           <a:p>
-            <a:pPr algn="l" indent="0" marL="0">
+            <a:pPr marL="0" indent="0" algn="l">
               <a:lnSpc>
                 <a:spcPts val="2418"/>
               </a:lnSpc>
@@ -17458,7 +18108,7 @@
           </a:bodyPr>
           <a:lstStyle/>
           <a:p>
-            <a:pPr algn="l" indent="0" marL="0">
+            <a:pPr marL="0" indent="0" algn="l">
               <a:lnSpc>
                 <a:spcPts val="2721"/>
               </a:lnSpc>
@@ -17797,4 +18447,319 @@
   <a:objectDefaults/>
   <a:extraClrSchemeLst/>
 </a:theme>
+</file>
+
+<file path=ppt/theme/theme2.xml><?xml version="1.0" encoding="utf-8"?>
+<a:theme xmlns:a="http://schemas.openxmlformats.org/drawingml/2006/main" name="Tema do Office">
+  <a:themeElements>
+    <a:clrScheme name="Office">
+      <a:dk1>
+        <a:sysClr val="windowText" lastClr="000000"/>
+      </a:dk1>
+      <a:lt1>
+        <a:sysClr val="window" lastClr="FFFFFF"/>
+      </a:lt1>
+      <a:dk2>
+        <a:srgbClr val="0E2841"/>
+      </a:dk2>
+      <a:lt2>
+        <a:srgbClr val="E8E8E8"/>
+      </a:lt2>
+      <a:accent1>
+        <a:srgbClr val="156082"/>
+      </a:accent1>
+      <a:accent2>
+        <a:srgbClr val="E97132"/>
+      </a:accent2>
+      <a:accent3>
+        <a:srgbClr val="196B24"/>
+      </a:accent3>
+      <a:accent4>
+        <a:srgbClr val="0F9ED5"/>
+      </a:accent4>
+      <a:accent5>
+        <a:srgbClr val="A02B93"/>
+      </a:accent5>
+      <a:accent6>
+        <a:srgbClr val="4EA72E"/>
+      </a:accent6>
+      <a:hlink>
+        <a:srgbClr val="467886"/>
+      </a:hlink>
+      <a:folHlink>
+        <a:srgbClr val="96607D"/>
+      </a:folHlink>
+    </a:clrScheme>
+    <a:fontScheme name="Office">
+      <a:majorFont>
+        <a:latin typeface="Aptos Display" panose="02110004020202020204"/>
+        <a:ea typeface=""/>
+        <a:cs typeface=""/>
+        <a:font script="Jpan" typeface="游ゴシック Light"/>
+        <a:font script="Hang" typeface="맑은 고딕"/>
+        <a:font script="Hans" typeface="等线 Light"/>
+        <a:font script="Hant" typeface="新細明體"/>
+        <a:font script="Arab" typeface="Times New Roman"/>
+        <a:font script="Hebr" typeface="Times New Roman"/>
+        <a:font script="Thai" typeface="Angsana New"/>
+        <a:font script="Ethi" typeface="Nyala"/>
+        <a:font script="Beng" typeface="Vrinda"/>
+        <a:font script="Gujr" typeface="Shruti"/>
+        <a:font script="Khmr" typeface="MoolBoran"/>
+        <a:font script="Knda" typeface="Tunga"/>
+        <a:font script="Guru" typeface="Raavi"/>
+        <a:font script="Cans" typeface="Euphemia"/>
+        <a:font script="Cher" typeface="Plantagenet Cherokee"/>
+        <a:font script="Yiii" typeface="Microsoft Yi Baiti"/>
+        <a:font script="Tibt" typeface="Microsoft Himalaya"/>
+        <a:font script="Thaa" typeface="MV Boli"/>
+        <a:font script="Deva" typeface="Mangal"/>
+        <a:font script="Telu" typeface="Gautami"/>
+        <a:font script="Taml" typeface="Latha"/>
+        <a:font script="Syrc" typeface="Estrangelo Edessa"/>
+        <a:font script="Orya" typeface="Kalinga"/>
+        <a:font script="Mlym" typeface="Kartika"/>
+        <a:font script="Laoo" typeface="DokChampa"/>
+        <a:font script="Sinh" typeface="Iskoola Pota"/>
+        <a:font script="Mong" typeface="Mongolian Baiti"/>
+        <a:font script="Viet" typeface="Times New Roman"/>
+        <a:font script="Uigh" typeface="Microsoft Uighur"/>
+        <a:font script="Geor" typeface="Sylfaen"/>
+        <a:font script="Armn" typeface="Arial"/>
+        <a:font script="Bugi" typeface="Leelawadee UI"/>
+        <a:font script="Bopo" typeface="Microsoft JhengHei"/>
+        <a:font script="Java" typeface="Javanese Text"/>
+        <a:font script="Lisu" typeface="Segoe UI"/>
+        <a:font script="Mymr" typeface="Myanmar Text"/>
+        <a:font script="Nkoo" typeface="Ebrima"/>
+        <a:font script="Olck" typeface="Nirmala UI"/>
+        <a:font script="Osma" typeface="Ebrima"/>
+        <a:font script="Phag" typeface="Phagspa"/>
+        <a:font script="Syrn" typeface="Estrangelo Edessa"/>
+        <a:font script="Syrj" typeface="Estrangelo Edessa"/>
+        <a:font script="Syre" typeface="Estrangelo Edessa"/>
+        <a:font script="Sora" typeface="Nirmala UI"/>
+        <a:font script="Tale" typeface="Microsoft Tai Le"/>
+        <a:font script="Talu" typeface="Microsoft New Tai Lue"/>
+        <a:font script="Tfng" typeface="Ebrima"/>
+      </a:majorFont>
+      <a:minorFont>
+        <a:latin typeface="Aptos" panose="02110004020202020204"/>
+        <a:ea typeface=""/>
+        <a:cs typeface=""/>
+        <a:font script="Jpan" typeface="游ゴシック"/>
+        <a:font script="Hang" typeface="맑은 고딕"/>
+        <a:font script="Hans" typeface="等线"/>
+        <a:font script="Hant" typeface="新細明體"/>
+        <a:font script="Arab" typeface="Arial"/>
+        <a:font script="Hebr" typeface="Arial"/>
+        <a:font script="Thai" typeface="Cordia New"/>
+        <a:font script="Ethi" typeface="Nyala"/>
+        <a:font script="Beng" typeface="Vrinda"/>
+        <a:font script="Gujr" typeface="Shruti"/>
+        <a:font script="Khmr" typeface="DaunPenh"/>
+        <a:font script="Knda" typeface="Tunga"/>
+        <a:font script="Guru" typeface="Raavi"/>
+        <a:font script="Cans" typeface="Euphemia"/>
+        <a:font script="Cher" typeface="Plantagenet Cherokee"/>
+        <a:font script="Yiii" typeface="Microsoft Yi Baiti"/>
+        <a:font script="Tibt" typeface="Microsoft Himalaya"/>
+        <a:font script="Thaa" typeface="MV Boli"/>
+        <a:font script="Deva" typeface="Mangal"/>
+        <a:font script="Telu" typeface="Gautami"/>
+        <a:font script="Taml" typeface="Latha"/>
+        <a:font script="Syrc" typeface="Estrangelo Edessa"/>
+        <a:font script="Orya" typeface="Kalinga"/>
+        <a:font script="Mlym" typeface="Kartika"/>
+        <a:font script="Laoo" typeface="DokChampa"/>
+        <a:font script="Sinh" typeface="Iskoola Pota"/>
+        <a:font script="Mong" typeface="Mongolian Baiti"/>
+        <a:font script="Viet" typeface="Arial"/>
+        <a:font script="Uigh" typeface="Microsoft Uighur"/>
+        <a:font script="Geor" typeface="Sylfaen"/>
+        <a:font script="Armn" typeface="Arial"/>
+        <a:font script="Bugi" typeface="Leelawadee UI"/>
+        <a:font script="Bopo" typeface="Microsoft JhengHei"/>
+        <a:font script="Java" typeface="Javanese Text"/>
+        <a:font script="Lisu" typeface="Segoe UI"/>
+        <a:font script="Mymr" typeface="Myanmar Text"/>
+        <a:font script="Nkoo" typeface="Ebrima"/>
+        <a:font script="Olck" typeface="Nirmala UI"/>
+        <a:font script="Osma" typeface="Ebrima"/>
+        <a:font script="Phag" typeface="Phagspa"/>
+        <a:font script="Syrn" typeface="Estrangelo Edessa"/>
+        <a:font script="Syrj" typeface="Estrangelo Edessa"/>
+        <a:font script="Syre" typeface="Estrangelo Edessa"/>
+        <a:font script="Sora" typeface="Nirmala UI"/>
+        <a:font script="Tale" typeface="Microsoft Tai Le"/>
+        <a:font script="Talu" typeface="Microsoft New Tai Lue"/>
+        <a:font script="Tfng" typeface="Ebrima"/>
+      </a:minorFont>
+    </a:fontScheme>
+    <a:fmtScheme name="Office">
+      <a:fillStyleLst>
+        <a:solidFill>
+          <a:schemeClr val="phClr"/>
+        </a:solidFill>
+        <a:gradFill rotWithShape="1">
+          <a:gsLst>
+            <a:gs pos="0">
+              <a:schemeClr val="phClr">
+                <a:lumMod val="110000"/>
+                <a:satMod val="105000"/>
+                <a:tint val="67000"/>
+              </a:schemeClr>
+            </a:gs>
+            <a:gs pos="50000">
+              <a:schemeClr val="phClr">
+                <a:lumMod val="105000"/>
+                <a:satMod val="103000"/>
+                <a:tint val="73000"/>
+              </a:schemeClr>
+            </a:gs>
+            <a:gs pos="100000">
+              <a:schemeClr val="phClr">
+                <a:lumMod val="105000"/>
+                <a:satMod val="109000"/>
+                <a:tint val="81000"/>
+              </a:schemeClr>
+            </a:gs>
+          </a:gsLst>
+          <a:lin ang="5400000" scaled="0"/>
+        </a:gradFill>
+        <a:gradFill rotWithShape="1">
+          <a:gsLst>
+            <a:gs pos="0">
+              <a:schemeClr val="phClr">
+                <a:satMod val="103000"/>
+                <a:lumMod val="102000"/>
+                <a:tint val="94000"/>
+              </a:schemeClr>
+            </a:gs>
+            <a:gs pos="50000">
+              <a:schemeClr val="phClr">
+                <a:satMod val="110000"/>
+                <a:lumMod val="100000"/>
+                <a:shade val="100000"/>
+              </a:schemeClr>
+            </a:gs>
+            <a:gs pos="100000">
+              <a:schemeClr val="phClr">
+                <a:lumMod val="99000"/>
+                <a:satMod val="120000"/>
+                <a:shade val="78000"/>
+              </a:schemeClr>
+            </a:gs>
+          </a:gsLst>
+          <a:lin ang="5400000" scaled="0"/>
+        </a:gradFill>
+      </a:fillStyleLst>
+      <a:lnStyleLst>
+        <a:ln w="12700" cap="flat" cmpd="sng" algn="ctr">
+          <a:solidFill>
+            <a:schemeClr val="phClr"/>
+          </a:solidFill>
+          <a:prstDash val="solid"/>
+          <a:miter lim="800000"/>
+        </a:ln>
+        <a:ln w="19050" cap="flat" cmpd="sng" algn="ctr">
+          <a:solidFill>
+            <a:schemeClr val="phClr"/>
+          </a:solidFill>
+          <a:prstDash val="solid"/>
+          <a:miter lim="800000"/>
+        </a:ln>
+        <a:ln w="25400" cap="flat" cmpd="sng" algn="ctr">
+          <a:solidFill>
+            <a:schemeClr val="phClr"/>
+          </a:solidFill>
+          <a:prstDash val="solid"/>
+          <a:miter lim="800000"/>
+        </a:ln>
+      </a:lnStyleLst>
+      <a:effectStyleLst>
+        <a:effectStyle>
+          <a:effectLst/>
+        </a:effectStyle>
+        <a:effectStyle>
+          <a:effectLst/>
+        </a:effectStyle>
+        <a:effectStyle>
+          <a:effectLst>
+            <a:outerShdw blurRad="57150" dist="19050" dir="5400000" algn="ctr" rotWithShape="0">
+              <a:srgbClr val="000000">
+                <a:alpha val="63000"/>
+              </a:srgbClr>
+            </a:outerShdw>
+          </a:effectLst>
+        </a:effectStyle>
+      </a:effectStyleLst>
+      <a:bgFillStyleLst>
+        <a:solidFill>
+          <a:schemeClr val="phClr"/>
+        </a:solidFill>
+        <a:solidFill>
+          <a:schemeClr val="phClr">
+            <a:tint val="95000"/>
+            <a:satMod val="170000"/>
+          </a:schemeClr>
+        </a:solidFill>
+        <a:gradFill rotWithShape="1">
+          <a:gsLst>
+            <a:gs pos="0">
+              <a:schemeClr val="phClr">
+                <a:tint val="93000"/>
+                <a:satMod val="150000"/>
+                <a:shade val="98000"/>
+                <a:lumMod val="102000"/>
+              </a:schemeClr>
+            </a:gs>
+            <a:gs pos="50000">
+              <a:schemeClr val="phClr">
+                <a:tint val="98000"/>
+                <a:satMod val="130000"/>
+                <a:shade val="90000"/>
+                <a:lumMod val="103000"/>
+              </a:schemeClr>
+            </a:gs>
+            <a:gs pos="100000">
+              <a:schemeClr val="phClr">
+                <a:shade val="63000"/>
+                <a:satMod val="120000"/>
+              </a:schemeClr>
+            </a:gs>
+          </a:gsLst>
+          <a:lin ang="5400000" scaled="0"/>
+        </a:gradFill>
+      </a:bgFillStyleLst>
+    </a:fmtScheme>
+  </a:themeElements>
+  <a:objectDefaults>
+    <a:lnDef>
+      <a:spPr/>
+      <a:bodyPr/>
+      <a:lstStyle/>
+      <a:style>
+        <a:lnRef idx="2">
+          <a:schemeClr val="accent1"/>
+        </a:lnRef>
+        <a:fillRef idx="0">
+          <a:schemeClr val="accent1"/>
+        </a:fillRef>
+        <a:effectRef idx="1">
+          <a:schemeClr val="accent1"/>
+        </a:effectRef>
+        <a:fontRef idx="minor">
+          <a:schemeClr val="tx1"/>
+        </a:fontRef>
+      </a:style>
+    </a:lnDef>
+  </a:objectDefaults>
+  <a:extraClrSchemeLst/>
+  <a:extLst>
+    <a:ext uri="{05A4C25C-085E-4340-85A3-A5531E510DB2}">
+      <thm15:themeFamily xmlns:thm15="http://schemas.microsoft.com/office/thememl/2012/main" name="Office Theme" id="{2E142A2C-CD16-42D6-873A-C26D2A0506FA}" vid="{1BDDFF52-6CD6-40A5-AB3C-68EB2F1E4D0A}"/>
+    </a:ext>
+  </a:extLst>
+</a:theme>
 </file>